--- a/design/FE_phi.vu_Design of Secure Remote Diag on Container Separation Architecture_final.pptx
+++ b/design/FE_phi.vu_Design of Secure Remote Diag on Container Separation Architecture_final.pptx
@@ -228,7 +228,7 @@
           <a:p>
             <a:fld id="{341C17E2-92C1-406A-80C1-BA1B838099E9}" type="datetimeFigureOut">
               <a:rPr lang="en-US" smtClean="0"/>
-              <a:t>10/5/2026</a:t>
+              <a:t>10/13/2026</a:t>
             </a:fld>
             <a:endParaRPr lang="en-US"/>
           </a:p>
@@ -500,6 +500,479 @@
   <p:cSld>
     <p:spTree>
       <p:nvGrpSpPr>
+        <p:cNvPr id="1" name=""/>
+        <p:cNvGrpSpPr/>
+        <p:nvPr/>
+      </p:nvGrpSpPr>
+      <p:grpSpPr>
+        <a:xfrm>
+          <a:off x="0" y="0"/>
+          <a:ext cx="0" cy="0"/>
+          <a:chOff x="0" y="0"/>
+          <a:chExt cx="0" cy="0"/>
+        </a:xfrm>
+      </p:grpSpPr>
+      <p:sp>
+        <p:nvSpPr>
+          <p:cNvPr id="2" name="Slide Image Placeholder 1"/>
+          <p:cNvSpPr>
+            <a:spLocks noGrp="1" noRot="1" noChangeAspect="1"/>
+          </p:cNvSpPr>
+          <p:nvPr>
+            <p:ph type="sldImg"/>
+          </p:nvPr>
+        </p:nvSpPr>
+        <p:spPr/>
+      </p:sp>
+      <p:sp>
+        <p:nvSpPr>
+          <p:cNvPr id="3" name="Notes Placeholder 2"/>
+          <p:cNvSpPr>
+            <a:spLocks noGrp="1"/>
+          </p:cNvSpPr>
+          <p:nvPr>
+            <p:ph type="body" idx="1"/>
+          </p:nvPr>
+        </p:nvSpPr>
+        <p:spPr/>
+        <p:txBody>
+          <a:bodyPr/>
+          <a:lstStyle/>
+          <a:p>
+            <a:r>
+              <a:rPr lang="en-US" smtClean="0"/>
+              <a:t>(Nhớ</a:t>
+            </a:r>
+            <a:r>
+              <a:rPr lang="en-US" baseline="0" smtClean="0"/>
+              <a:t> bật mouse laser)</a:t>
+            </a:r>
+            <a:endParaRPr lang="en-US" smtClean="0"/>
+          </a:p>
+          <a:p>
+            <a:endParaRPr lang="en-US" smtClean="0"/>
+          </a:p>
+          <a:p>
+            <a:r>
+              <a:rPr lang="en-US" smtClean="0"/>
+              <a:t>Hello</a:t>
+            </a:r>
+            <a:r>
+              <a:rPr lang="en-US" baseline="0" smtClean="0"/>
+              <a:t> everyone, my name is Phi, from Software Engineering part.</a:t>
+            </a:r>
+          </a:p>
+          <a:p>
+            <a:endParaRPr lang="en-US" baseline="0" smtClean="0"/>
+          </a:p>
+          <a:p>
+            <a:r>
+              <a:rPr lang="en-US" baseline="0" smtClean="0"/>
+              <a:t>Today, I will present about the topic: Design of Secure Remote Diag on Container Separation Architecture</a:t>
+            </a:r>
+            <a:endParaRPr lang="en-US"/>
+          </a:p>
+        </p:txBody>
+      </p:sp>
+      <p:sp>
+        <p:nvSpPr>
+          <p:cNvPr id="4" name="Slide Number Placeholder 3"/>
+          <p:cNvSpPr>
+            <a:spLocks noGrp="1"/>
+          </p:cNvSpPr>
+          <p:nvPr>
+            <p:ph type="sldNum" sz="quarter" idx="10"/>
+          </p:nvPr>
+        </p:nvSpPr>
+        <p:spPr/>
+        <p:txBody>
+          <a:bodyPr/>
+          <a:lstStyle/>
+          <a:p>
+            <a:fld id="{EF277405-33BD-42BD-B604-93760E4185DC}" type="slidenum">
+              <a:rPr lang="en-US" smtClean="0"/>
+              <a:t>1</a:t>
+            </a:fld>
+            <a:endParaRPr lang="en-US"/>
+          </a:p>
+        </p:txBody>
+      </p:sp>
+    </p:spTree>
+    <p:extLst>
+      <p:ext uri="{BB962C8B-B14F-4D97-AF65-F5344CB8AC3E}">
+        <p14:creationId xmlns:p14="http://schemas.microsoft.com/office/powerpoint/2010/main" val="4277877542"/>
+      </p:ext>
+    </p:extLst>
+  </p:cSld>
+  <p:clrMapOvr>
+    <a:masterClrMapping/>
+  </p:clrMapOvr>
+</p:notes>
+</file>
+
+<file path=ppt/notesSlides/notesSlide10.xml><?xml version="1.0" encoding="utf-8"?>
+<p:notes xmlns:a="http://schemas.openxmlformats.org/drawingml/2006/main" xmlns:r="http://schemas.openxmlformats.org/officeDocument/2006/relationships" xmlns:p="http://schemas.openxmlformats.org/presentationml/2006/main">
+  <p:cSld>
+    <p:spTree>
+      <p:nvGrpSpPr>
+        <p:cNvPr id="1" name=""/>
+        <p:cNvGrpSpPr/>
+        <p:nvPr/>
+      </p:nvGrpSpPr>
+      <p:grpSpPr>
+        <a:xfrm>
+          <a:off x="0" y="0"/>
+          <a:ext cx="0" cy="0"/>
+          <a:chOff x="0" y="0"/>
+          <a:chExt cx="0" cy="0"/>
+        </a:xfrm>
+      </p:grpSpPr>
+      <p:sp>
+        <p:nvSpPr>
+          <p:cNvPr id="2" name="Slide Image Placeholder 1"/>
+          <p:cNvSpPr>
+            <a:spLocks noGrp="1" noRot="1" noChangeAspect="1"/>
+          </p:cNvSpPr>
+          <p:nvPr>
+            <p:ph type="sldImg"/>
+          </p:nvPr>
+        </p:nvSpPr>
+        <p:spPr/>
+      </p:sp>
+      <p:sp>
+        <p:nvSpPr>
+          <p:cNvPr id="3" name="Notes Placeholder 2"/>
+          <p:cNvSpPr>
+            <a:spLocks noGrp="1"/>
+          </p:cNvSpPr>
+          <p:nvPr>
+            <p:ph type="body" idx="1"/>
+          </p:nvPr>
+        </p:nvSpPr>
+        <p:spPr/>
+        <p:txBody>
+          <a:bodyPr/>
+          <a:lstStyle/>
+          <a:p>
+            <a:endParaRPr lang="en-US"/>
+          </a:p>
+        </p:txBody>
+      </p:sp>
+      <p:sp>
+        <p:nvSpPr>
+          <p:cNvPr id="4" name="Slide Number Placeholder 3"/>
+          <p:cNvSpPr>
+            <a:spLocks noGrp="1"/>
+          </p:cNvSpPr>
+          <p:nvPr>
+            <p:ph type="sldNum" sz="quarter" idx="10"/>
+          </p:nvPr>
+        </p:nvSpPr>
+        <p:spPr/>
+        <p:txBody>
+          <a:bodyPr/>
+          <a:lstStyle/>
+          <a:p>
+            <a:fld id="{EF277405-33BD-42BD-B604-93760E4185DC}" type="slidenum">
+              <a:rPr lang="en-US" smtClean="0"/>
+              <a:t>10</a:t>
+            </a:fld>
+            <a:endParaRPr lang="en-US"/>
+          </a:p>
+        </p:txBody>
+      </p:sp>
+    </p:spTree>
+    <p:extLst>
+      <p:ext uri="{BB962C8B-B14F-4D97-AF65-F5344CB8AC3E}">
+        <p14:creationId xmlns:p14="http://schemas.microsoft.com/office/powerpoint/2010/main" val="3467681225"/>
+      </p:ext>
+    </p:extLst>
+  </p:cSld>
+  <p:clrMapOvr>
+    <a:masterClrMapping/>
+  </p:clrMapOvr>
+</p:notes>
+</file>
+
+<file path=ppt/notesSlides/notesSlide11.xml><?xml version="1.0" encoding="utf-8"?>
+<p:notes xmlns:a="http://schemas.openxmlformats.org/drawingml/2006/main" xmlns:r="http://schemas.openxmlformats.org/officeDocument/2006/relationships" xmlns:p="http://schemas.openxmlformats.org/presentationml/2006/main">
+  <p:cSld>
+    <p:spTree>
+      <p:nvGrpSpPr>
+        <p:cNvPr id="1" name=""/>
+        <p:cNvGrpSpPr/>
+        <p:nvPr/>
+      </p:nvGrpSpPr>
+      <p:grpSpPr>
+        <a:xfrm>
+          <a:off x="0" y="0"/>
+          <a:ext cx="0" cy="0"/>
+          <a:chOff x="0" y="0"/>
+          <a:chExt cx="0" cy="0"/>
+        </a:xfrm>
+      </p:grpSpPr>
+      <p:sp>
+        <p:nvSpPr>
+          <p:cNvPr id="2" name="Slide Image Placeholder 1"/>
+          <p:cNvSpPr>
+            <a:spLocks noGrp="1" noRot="1" noChangeAspect="1"/>
+          </p:cNvSpPr>
+          <p:nvPr>
+            <p:ph type="sldImg"/>
+          </p:nvPr>
+        </p:nvSpPr>
+        <p:spPr/>
+      </p:sp>
+      <p:sp>
+        <p:nvSpPr>
+          <p:cNvPr id="3" name="Notes Placeholder 2"/>
+          <p:cNvSpPr>
+            <a:spLocks noGrp="1"/>
+          </p:cNvSpPr>
+          <p:nvPr>
+            <p:ph type="body" idx="1"/>
+          </p:nvPr>
+        </p:nvSpPr>
+        <p:spPr/>
+        <p:txBody>
+          <a:bodyPr/>
+          <a:lstStyle/>
+          <a:p>
+            <a:endParaRPr lang="en-US"/>
+          </a:p>
+        </p:txBody>
+      </p:sp>
+      <p:sp>
+        <p:nvSpPr>
+          <p:cNvPr id="4" name="Slide Number Placeholder 3"/>
+          <p:cNvSpPr>
+            <a:spLocks noGrp="1"/>
+          </p:cNvSpPr>
+          <p:nvPr>
+            <p:ph type="sldNum" sz="quarter" idx="10"/>
+          </p:nvPr>
+        </p:nvSpPr>
+        <p:spPr/>
+        <p:txBody>
+          <a:bodyPr/>
+          <a:lstStyle/>
+          <a:p>
+            <a:fld id="{EF277405-33BD-42BD-B604-93760E4185DC}" type="slidenum">
+              <a:rPr lang="en-US" smtClean="0"/>
+              <a:t>11</a:t>
+            </a:fld>
+            <a:endParaRPr lang="en-US"/>
+          </a:p>
+        </p:txBody>
+      </p:sp>
+    </p:spTree>
+    <p:extLst>
+      <p:ext uri="{BB962C8B-B14F-4D97-AF65-F5344CB8AC3E}">
+        <p14:creationId xmlns:p14="http://schemas.microsoft.com/office/powerpoint/2010/main" val="194177539"/>
+      </p:ext>
+    </p:extLst>
+  </p:cSld>
+  <p:clrMapOvr>
+    <a:masterClrMapping/>
+  </p:clrMapOvr>
+</p:notes>
+</file>
+
+<file path=ppt/notesSlides/notesSlide12.xml><?xml version="1.0" encoding="utf-8"?>
+<p:notes xmlns:a="http://schemas.openxmlformats.org/drawingml/2006/main" xmlns:r="http://schemas.openxmlformats.org/officeDocument/2006/relationships" xmlns:p="http://schemas.openxmlformats.org/presentationml/2006/main">
+  <p:cSld>
+    <p:spTree>
+      <p:nvGrpSpPr>
+        <p:cNvPr id="1" name=""/>
+        <p:cNvGrpSpPr/>
+        <p:nvPr/>
+      </p:nvGrpSpPr>
+      <p:grpSpPr>
+        <a:xfrm>
+          <a:off x="0" y="0"/>
+          <a:ext cx="0" cy="0"/>
+          <a:chOff x="0" y="0"/>
+          <a:chExt cx="0" cy="0"/>
+        </a:xfrm>
+      </p:grpSpPr>
+      <p:sp>
+        <p:nvSpPr>
+          <p:cNvPr id="2" name="Slide Image Placeholder 1"/>
+          <p:cNvSpPr>
+            <a:spLocks noGrp="1" noRot="1" noChangeAspect="1"/>
+          </p:cNvSpPr>
+          <p:nvPr>
+            <p:ph type="sldImg"/>
+          </p:nvPr>
+        </p:nvSpPr>
+        <p:spPr/>
+      </p:sp>
+      <p:sp>
+        <p:nvSpPr>
+          <p:cNvPr id="3" name="Notes Placeholder 2"/>
+          <p:cNvSpPr>
+            <a:spLocks noGrp="1"/>
+          </p:cNvSpPr>
+          <p:nvPr>
+            <p:ph type="body" idx="1"/>
+          </p:nvPr>
+        </p:nvSpPr>
+        <p:spPr/>
+        <p:txBody>
+          <a:bodyPr/>
+          <a:lstStyle/>
+          <a:p>
+            <a:endParaRPr lang="en-US"/>
+          </a:p>
+        </p:txBody>
+      </p:sp>
+      <p:sp>
+        <p:nvSpPr>
+          <p:cNvPr id="4" name="Slide Number Placeholder 3"/>
+          <p:cNvSpPr>
+            <a:spLocks noGrp="1"/>
+          </p:cNvSpPr>
+          <p:nvPr>
+            <p:ph type="sldNum" sz="quarter" idx="10"/>
+          </p:nvPr>
+        </p:nvSpPr>
+        <p:spPr/>
+        <p:txBody>
+          <a:bodyPr/>
+          <a:lstStyle/>
+          <a:p>
+            <a:fld id="{EF277405-33BD-42BD-B604-93760E4185DC}" type="slidenum">
+              <a:rPr lang="en-US" smtClean="0"/>
+              <a:t>12</a:t>
+            </a:fld>
+            <a:endParaRPr lang="en-US"/>
+          </a:p>
+        </p:txBody>
+      </p:sp>
+    </p:spTree>
+    <p:extLst>
+      <p:ext uri="{BB962C8B-B14F-4D97-AF65-F5344CB8AC3E}">
+        <p14:creationId xmlns:p14="http://schemas.microsoft.com/office/powerpoint/2010/main" val="3095113047"/>
+      </p:ext>
+    </p:extLst>
+  </p:cSld>
+  <p:clrMapOvr>
+    <a:masterClrMapping/>
+  </p:clrMapOvr>
+</p:notes>
+</file>
+
+<file path=ppt/notesSlides/notesSlide2.xml><?xml version="1.0" encoding="utf-8"?>
+<p:notes xmlns:a="http://schemas.openxmlformats.org/drawingml/2006/main" xmlns:r="http://schemas.openxmlformats.org/officeDocument/2006/relationships" xmlns:p="http://schemas.openxmlformats.org/presentationml/2006/main">
+  <p:cSld>
+    <p:spTree>
+      <p:nvGrpSpPr>
+        <p:cNvPr id="1" name=""/>
+        <p:cNvGrpSpPr/>
+        <p:nvPr/>
+      </p:nvGrpSpPr>
+      <p:grpSpPr>
+        <a:xfrm>
+          <a:off x="0" y="0"/>
+          <a:ext cx="0" cy="0"/>
+          <a:chOff x="0" y="0"/>
+          <a:chExt cx="0" cy="0"/>
+        </a:xfrm>
+      </p:grpSpPr>
+      <p:sp>
+        <p:nvSpPr>
+          <p:cNvPr id="2" name="Slide Image Placeholder 1"/>
+          <p:cNvSpPr>
+            <a:spLocks noGrp="1" noRot="1" noChangeAspect="1"/>
+          </p:cNvSpPr>
+          <p:nvPr>
+            <p:ph type="sldImg"/>
+          </p:nvPr>
+        </p:nvSpPr>
+        <p:spPr/>
+      </p:sp>
+      <p:sp>
+        <p:nvSpPr>
+          <p:cNvPr id="3" name="Notes Placeholder 2"/>
+          <p:cNvSpPr>
+            <a:spLocks noGrp="1"/>
+          </p:cNvSpPr>
+          <p:nvPr>
+            <p:ph type="body" idx="1"/>
+          </p:nvPr>
+        </p:nvSpPr>
+        <p:spPr/>
+        <p:txBody>
+          <a:bodyPr/>
+          <a:lstStyle/>
+          <a:p>
+            <a:r>
+              <a:rPr lang="en-US" smtClean="0"/>
+              <a:t>For the topic</a:t>
+            </a:r>
+            <a:r>
+              <a:rPr lang="en-US" baseline="0" smtClean="0"/>
+              <a:t> presentation, </a:t>
+            </a:r>
+            <a:r>
+              <a:rPr lang="en-US" smtClean="0"/>
+              <a:t>I will go through six</a:t>
+            </a:r>
+            <a:r>
+              <a:rPr lang="en-US" baseline="0" smtClean="0"/>
+              <a:t> sections as you can see in the monitor.</a:t>
+            </a:r>
+          </a:p>
+          <a:p>
+            <a:r>
+              <a:rPr lang="en-US" baseline="0" smtClean="0"/>
+              <a:t>First one is Context of my Function Expert topic.</a:t>
+            </a:r>
+            <a:endParaRPr lang="en-US"/>
+          </a:p>
+        </p:txBody>
+      </p:sp>
+      <p:sp>
+        <p:nvSpPr>
+          <p:cNvPr id="4" name="Slide Number Placeholder 3"/>
+          <p:cNvSpPr>
+            <a:spLocks noGrp="1"/>
+          </p:cNvSpPr>
+          <p:nvPr>
+            <p:ph type="sldNum" sz="quarter" idx="10"/>
+          </p:nvPr>
+        </p:nvSpPr>
+        <p:spPr/>
+        <p:txBody>
+          <a:bodyPr/>
+          <a:lstStyle/>
+          <a:p>
+            <a:fld id="{EF277405-33BD-42BD-B604-93760E4185DC}" type="slidenum">
+              <a:rPr lang="en-US" smtClean="0"/>
+              <a:t>2</a:t>
+            </a:fld>
+            <a:endParaRPr lang="en-US"/>
+          </a:p>
+        </p:txBody>
+      </p:sp>
+    </p:spTree>
+    <p:extLst>
+      <p:ext uri="{BB962C8B-B14F-4D97-AF65-F5344CB8AC3E}">
+        <p14:creationId xmlns:p14="http://schemas.microsoft.com/office/powerpoint/2010/main" val="2711782163"/>
+      </p:ext>
+    </p:extLst>
+  </p:cSld>
+  <p:clrMapOvr>
+    <a:masterClrMapping/>
+  </p:clrMapOvr>
+</p:notes>
+</file>
+
+<file path=ppt/notesSlides/notesSlide3.xml><?xml version="1.0" encoding="utf-8"?>
+<p:notes xmlns:a="http://schemas.openxmlformats.org/drawingml/2006/main" xmlns:r="http://schemas.openxmlformats.org/officeDocument/2006/relationships" xmlns:p="http://schemas.openxmlformats.org/presentationml/2006/main">
+  <p:cSld>
+    <p:spTree>
+      <p:nvGrpSpPr>
         <p:cNvPr id="1" name="">
           <a:extLst>
             <a:ext uri="{FF2B5EF4-FFF2-40B4-BE49-F238E27FC236}">
@@ -557,6 +1030,41 @@
           <a:bodyPr/>
           <a:lstStyle/>
           <a:p>
+            <a:r>
+              <a:rPr lang="en-US" smtClean="0"/>
+              <a:t>The Toyota DCM is a telematics platform</a:t>
+            </a:r>
+            <a:r>
+              <a:rPr lang="en-US" baseline="0" smtClean="0"/>
+              <a:t> which provides services that allows vehicles to connect to the network, including the remote diagnostics from OEM server.</a:t>
+            </a:r>
+          </a:p>
+          <a:p>
+            <a:endParaRPr lang="en-US" baseline="0" smtClean="0"/>
+          </a:p>
+          <a:p>
+            <a:r>
+              <a:rPr lang="en-US" baseline="0" smtClean="0"/>
+              <a:t>and It also supports diagnostic communication and OTA update feature, through Internal CAN bus … and the MM ECU which acts as OTA Master.</a:t>
+            </a:r>
+          </a:p>
+          <a:p>
+            <a:endParaRPr lang="en-US" baseline="0" smtClean="0"/>
+          </a:p>
+          <a:p>
+            <a:r>
+              <a:rPr lang="en-US" baseline="0" smtClean="0"/>
+              <a:t>As you can see in the diagram, the Current architecture is monolithic, with all components running in a single partition.</a:t>
+            </a:r>
+          </a:p>
+          <a:p>
+            <a:endParaRPr lang="en-US" baseline="0" smtClean="0"/>
+          </a:p>
+          <a:p>
+            <a:r>
+              <a:rPr lang="en-US" baseline="0" smtClean="0"/>
+              <a:t>On next slide, we will talk about the architecture migration.</a:t>
+            </a:r>
             <a:endParaRPr lang="en-US"/>
           </a:p>
         </p:txBody>
@@ -594,174 +1102,6 @@
     <p:extLst>
       <p:ext uri="{BB962C8B-B14F-4D97-AF65-F5344CB8AC3E}">
         <p14:creationId xmlns:p14="http://schemas.microsoft.com/office/powerpoint/2010/main" val="1475643500"/>
-      </p:ext>
-    </p:extLst>
-  </p:cSld>
-  <p:clrMapOvr>
-    <a:masterClrMapping/>
-  </p:clrMapOvr>
-</p:notes>
-</file>
-
-<file path=ppt/notesSlides/notesSlide2.xml><?xml version="1.0" encoding="utf-8"?>
-<p:notes xmlns:a="http://schemas.openxmlformats.org/drawingml/2006/main" xmlns:r="http://schemas.openxmlformats.org/officeDocument/2006/relationships" xmlns:p="http://schemas.openxmlformats.org/presentationml/2006/main">
-  <p:cSld>
-    <p:spTree>
-      <p:nvGrpSpPr>
-        <p:cNvPr id="1" name=""/>
-        <p:cNvGrpSpPr/>
-        <p:nvPr/>
-      </p:nvGrpSpPr>
-      <p:grpSpPr>
-        <a:xfrm>
-          <a:off x="0" y="0"/>
-          <a:ext cx="0" cy="0"/>
-          <a:chOff x="0" y="0"/>
-          <a:chExt cx="0" cy="0"/>
-        </a:xfrm>
-      </p:grpSpPr>
-      <p:sp>
-        <p:nvSpPr>
-          <p:cNvPr id="2" name="Slide Image Placeholder 1"/>
-          <p:cNvSpPr>
-            <a:spLocks noGrp="1" noRot="1" noChangeAspect="1"/>
-          </p:cNvSpPr>
-          <p:nvPr>
-            <p:ph type="sldImg"/>
-          </p:nvPr>
-        </p:nvSpPr>
-        <p:spPr/>
-      </p:sp>
-      <p:sp>
-        <p:nvSpPr>
-          <p:cNvPr id="3" name="Notes Placeholder 2"/>
-          <p:cNvSpPr>
-            <a:spLocks noGrp="1"/>
-          </p:cNvSpPr>
-          <p:nvPr>
-            <p:ph type="body" idx="1"/>
-          </p:nvPr>
-        </p:nvSpPr>
-        <p:spPr/>
-        <p:txBody>
-          <a:bodyPr/>
-          <a:lstStyle/>
-          <a:p>
-            <a:endParaRPr lang="en-US"/>
-          </a:p>
-        </p:txBody>
-      </p:sp>
-      <p:sp>
-        <p:nvSpPr>
-          <p:cNvPr id="4" name="Slide Number Placeholder 3"/>
-          <p:cNvSpPr>
-            <a:spLocks noGrp="1"/>
-          </p:cNvSpPr>
-          <p:nvPr>
-            <p:ph type="sldNum" sz="quarter" idx="10"/>
-          </p:nvPr>
-        </p:nvSpPr>
-        <p:spPr/>
-        <p:txBody>
-          <a:bodyPr/>
-          <a:lstStyle/>
-          <a:p>
-            <a:fld id="{EF277405-33BD-42BD-B604-93760E4185DC}" type="slidenum">
-              <a:rPr lang="en-US" smtClean="0"/>
-              <a:t>4</a:t>
-            </a:fld>
-            <a:endParaRPr lang="en-US"/>
-          </a:p>
-        </p:txBody>
-      </p:sp>
-    </p:spTree>
-    <p:extLst>
-      <p:ext uri="{BB962C8B-B14F-4D97-AF65-F5344CB8AC3E}">
-        <p14:creationId xmlns:p14="http://schemas.microsoft.com/office/powerpoint/2010/main" val="632864446"/>
-      </p:ext>
-    </p:extLst>
-  </p:cSld>
-  <p:clrMapOvr>
-    <a:masterClrMapping/>
-  </p:clrMapOvr>
-</p:notes>
-</file>
-
-<file path=ppt/notesSlides/notesSlide3.xml><?xml version="1.0" encoding="utf-8"?>
-<p:notes xmlns:a="http://schemas.openxmlformats.org/drawingml/2006/main" xmlns:r="http://schemas.openxmlformats.org/officeDocument/2006/relationships" xmlns:p="http://schemas.openxmlformats.org/presentationml/2006/main">
-  <p:cSld>
-    <p:spTree>
-      <p:nvGrpSpPr>
-        <p:cNvPr id="1" name=""/>
-        <p:cNvGrpSpPr/>
-        <p:nvPr/>
-      </p:nvGrpSpPr>
-      <p:grpSpPr>
-        <a:xfrm>
-          <a:off x="0" y="0"/>
-          <a:ext cx="0" cy="0"/>
-          <a:chOff x="0" y="0"/>
-          <a:chExt cx="0" cy="0"/>
-        </a:xfrm>
-      </p:grpSpPr>
-      <p:sp>
-        <p:nvSpPr>
-          <p:cNvPr id="2" name="Slide Image Placeholder 1"/>
-          <p:cNvSpPr>
-            <a:spLocks noGrp="1" noRot="1" noChangeAspect="1"/>
-          </p:cNvSpPr>
-          <p:nvPr>
-            <p:ph type="sldImg"/>
-          </p:nvPr>
-        </p:nvSpPr>
-        <p:spPr/>
-      </p:sp>
-      <p:sp>
-        <p:nvSpPr>
-          <p:cNvPr id="3" name="Notes Placeholder 2"/>
-          <p:cNvSpPr>
-            <a:spLocks noGrp="1"/>
-          </p:cNvSpPr>
-          <p:nvPr>
-            <p:ph type="body" idx="1"/>
-          </p:nvPr>
-        </p:nvSpPr>
-        <p:spPr/>
-        <p:txBody>
-          <a:bodyPr/>
-          <a:lstStyle/>
-          <a:p>
-            <a:endParaRPr lang="en-US"/>
-          </a:p>
-        </p:txBody>
-      </p:sp>
-      <p:sp>
-        <p:nvSpPr>
-          <p:cNvPr id="4" name="Slide Number Placeholder 3"/>
-          <p:cNvSpPr>
-            <a:spLocks noGrp="1"/>
-          </p:cNvSpPr>
-          <p:nvPr>
-            <p:ph type="sldNum" sz="quarter" idx="5"/>
-          </p:nvPr>
-        </p:nvSpPr>
-        <p:spPr/>
-        <p:txBody>
-          <a:bodyPr/>
-          <a:lstStyle/>
-          <a:p>
-            <a:fld id="{EF277405-33BD-42BD-B604-93760E4185DC}" type="slidenum">
-              <a:rPr lang="en-US" smtClean="0"/>
-              <a:t>7</a:t>
-            </a:fld>
-            <a:endParaRPr lang="en-US"/>
-          </a:p>
-        </p:txBody>
-      </p:sp>
-    </p:spTree>
-    <p:extLst>
-      <p:ext uri="{BB962C8B-B14F-4D97-AF65-F5344CB8AC3E}">
-        <p14:creationId xmlns:p14="http://schemas.microsoft.com/office/powerpoint/2010/main" val="1380153111"/>
       </p:ext>
     </p:extLst>
   </p:cSld>
@@ -815,9 +1155,8 @@
           <a:bodyPr/>
           <a:lstStyle/>
           <a:p>
-            <a:pPr fontAlgn="t"/>
-            <a:r>
-              <a:rPr lang="en-US" sz="1200" b="1" i="0" kern="1200">
+            <a:r>
+              <a:rPr lang="en-US" sz="1200" b="0" i="0" kern="1200" smtClean="0">
                 <a:solidFill>
                   <a:schemeClr val="tx1"/>
                 </a:solidFill>
@@ -826,13 +1165,23 @@
                 <a:ea typeface="+mn-ea"/>
                 <a:cs typeface="+mn-cs"/>
               </a:rPr>
-              <a:t>Trade-offs</a:t>
-            </a:r>
-          </a:p>
-          <a:p>
-            <a:pPr fontAlgn="t"/>
-            <a:r>
-              <a:rPr lang="en-US" sz="1200" b="1" i="0" kern="1200">
+              <a:t>From the OEM security perspective, a potential threat is that the Entry Point partition could be compromised by unauthorized software and taken over.</a:t>
+            </a:r>
+          </a:p>
+          <a:p>
+            <a:endParaRPr lang="en-US" sz="1200" b="0" i="0" kern="1200" smtClean="0">
+              <a:solidFill>
+                <a:schemeClr val="tx1"/>
+              </a:solidFill>
+              <a:effectLst/>
+              <a:latin typeface="+mn-lt"/>
+              <a:ea typeface="+mn-ea"/>
+              <a:cs typeface="+mn-cs"/>
+            </a:endParaRPr>
+          </a:p>
+          <a:p>
+            <a:r>
+              <a:rPr lang="en-US" sz="1200" b="0" i="0" kern="1200" smtClean="0">
                 <a:solidFill>
                   <a:schemeClr val="tx1"/>
                 </a:solidFill>
@@ -841,10 +1190,10 @@
                 <a:ea typeface="+mn-ea"/>
                 <a:cs typeface="+mn-cs"/>
               </a:rPr>
-              <a:t>Maintainability:</a:t>
-            </a:r>
-            <a:r>
-              <a:rPr lang="en-US" sz="1200" b="0" i="0" kern="1200">
+              <a:t>To address the</a:t>
+            </a:r>
+            <a:r>
+              <a:rPr lang="en-US" sz="1200" b="0" i="0" kern="1200" baseline="0" smtClean="0">
                 <a:solidFill>
                   <a:schemeClr val="tx1"/>
                 </a:solidFill>
@@ -853,11 +1202,149 @@
                 <a:ea typeface="+mn-ea"/>
                 <a:cs typeface="+mn-cs"/>
               </a:rPr>
-              <a:t> All EP modules require cross-container IPC support, increasing implementation effort and code-change scope.</a:t>
-            </a:r>
-          </a:p>
-          <a:p>
-            <a:endParaRPr lang="en-US"/>
+              <a:t> security</a:t>
+            </a:r>
+            <a:r>
+              <a:rPr lang="en-US" sz="1200" b="0" i="0" kern="1200" smtClean="0">
+                <a:solidFill>
+                  <a:schemeClr val="tx1"/>
+                </a:solidFill>
+                <a:effectLst/>
+                <a:latin typeface="+mn-lt"/>
+                <a:ea typeface="+mn-ea"/>
+                <a:cs typeface="+mn-cs"/>
+              </a:rPr>
+              <a:t> risk, OEM proposed the security requirements to </a:t>
+            </a:r>
+            <a:r>
+              <a:rPr lang="en-US" sz="1200" b="1" i="0" kern="1200" smtClean="0">
+                <a:solidFill>
+                  <a:schemeClr val="tx1"/>
+                </a:solidFill>
+                <a:effectLst/>
+                <a:latin typeface="+mn-lt"/>
+                <a:ea typeface="+mn-ea"/>
+                <a:cs typeface="+mn-cs"/>
+              </a:rPr>
+              <a:t>limit</a:t>
+            </a:r>
+            <a:r>
+              <a:rPr lang="en-US" sz="1200" b="0" i="0" kern="1200" smtClean="0">
+                <a:solidFill>
+                  <a:schemeClr val="tx1"/>
+                </a:solidFill>
+                <a:effectLst/>
+                <a:latin typeface="+mn-lt"/>
+                <a:ea typeface="+mn-ea"/>
+                <a:cs typeface="+mn-cs"/>
+              </a:rPr>
+              <a:t> the scope of compromise to the EP partition only. The compromise must not propagate to the internal partition or in-vehicle CAN bus.</a:t>
+            </a:r>
+          </a:p>
+          <a:p>
+            <a:r>
+              <a:rPr lang="en-US" sz="1200" b="0" i="0" kern="1200" smtClean="0">
+                <a:solidFill>
+                  <a:schemeClr val="tx1"/>
+                </a:solidFill>
+                <a:effectLst/>
+                <a:latin typeface="+mn-lt"/>
+                <a:ea typeface="+mn-ea"/>
+                <a:cs typeface="+mn-cs"/>
+              </a:rPr>
+              <a:t/>
+            </a:r>
+            <a:br>
+              <a:rPr lang="en-US" sz="1200" b="0" i="0" kern="1200" smtClean="0">
+                <a:solidFill>
+                  <a:schemeClr val="tx1"/>
+                </a:solidFill>
+                <a:effectLst/>
+                <a:latin typeface="+mn-lt"/>
+                <a:ea typeface="+mn-ea"/>
+                <a:cs typeface="+mn-cs"/>
+              </a:rPr>
+            </a:br>
+            <a:r>
+              <a:rPr lang="en-US" sz="1200" b="0" i="0" kern="1200" smtClean="0">
+                <a:solidFill>
+                  <a:schemeClr val="tx1"/>
+                </a:solidFill>
+                <a:effectLst/>
+                <a:latin typeface="+mn-lt"/>
+                <a:ea typeface="+mn-ea"/>
+                <a:cs typeface="+mn-cs"/>
+              </a:rPr>
+              <a:t>Then, to achieve this, LGE came</a:t>
+            </a:r>
+            <a:r>
+              <a:rPr lang="en-US" sz="1200" b="0" i="0" kern="1200" baseline="0" smtClean="0">
+                <a:solidFill>
+                  <a:schemeClr val="tx1"/>
+                </a:solidFill>
+                <a:effectLst/>
+                <a:latin typeface="+mn-lt"/>
+                <a:ea typeface="+mn-ea"/>
+                <a:cs typeface="+mn-cs"/>
+              </a:rPr>
+              <a:t> up with a solution: Separate the DCM architecture into two partitions using LXC containers:</a:t>
+            </a:r>
+          </a:p>
+          <a:p>
+            <a:pPr marL="171450" indent="-171450">
+              <a:buFontTx/>
+              <a:buChar char="-"/>
+            </a:pPr>
+            <a:r>
+              <a:rPr lang="en-US" sz="1200" b="0" i="0" kern="1200" baseline="0" smtClean="0">
+                <a:solidFill>
+                  <a:schemeClr val="tx1"/>
+                </a:solidFill>
+                <a:effectLst/>
+                <a:latin typeface="+mn-lt"/>
+                <a:ea typeface="+mn-ea"/>
+                <a:cs typeface="+mn-cs"/>
+              </a:rPr>
+              <a:t>The EP container will hosts externally exposed network components</a:t>
+            </a:r>
+          </a:p>
+          <a:p>
+            <a:pPr marL="171450" indent="-171450">
+              <a:buFontTx/>
+              <a:buChar char="-"/>
+            </a:pPr>
+            <a:r>
+              <a:rPr lang="en-US" sz="1200" b="0" i="0" kern="1200" baseline="0" smtClean="0">
+                <a:solidFill>
+                  <a:schemeClr val="tx1"/>
+                </a:solidFill>
+                <a:effectLst/>
+                <a:latin typeface="+mn-lt"/>
+                <a:ea typeface="+mn-ea"/>
+                <a:cs typeface="+mn-cs"/>
+              </a:rPr>
+              <a:t>And The Internal container will hosts the components which require access to the CAN bus.</a:t>
+            </a:r>
+            <a:endParaRPr lang="en-US" sz="1200" b="0" i="0" kern="1200" baseline="0">
+              <a:solidFill>
+                <a:schemeClr val="tx1"/>
+              </a:solidFill>
+              <a:effectLst/>
+              <a:latin typeface="+mn-lt"/>
+              <a:ea typeface="+mn-ea"/>
+              <a:cs typeface="+mn-cs"/>
+            </a:endParaRPr>
+          </a:p>
+          <a:p>
+            <a:endParaRPr lang="en-US" sz="1200" b="0" i="0" kern="1200" baseline="0" smtClean="0">
+              <a:solidFill>
+                <a:schemeClr val="tx1"/>
+              </a:solidFill>
+              <a:effectLst/>
+              <a:latin typeface="+mn-lt"/>
+              <a:ea typeface="+mn-ea"/>
+              <a:cs typeface="+mn-cs"/>
+            </a:endParaRPr>
           </a:p>
         </p:txBody>
       </p:sp>
@@ -878,7 +1365,7 @@
           <a:p>
             <a:fld id="{EF277405-33BD-42BD-B604-93760E4185DC}" type="slidenum">
               <a:rPr lang="en-US" smtClean="0"/>
-              <a:t>9</a:t>
+              <a:t>4</a:t>
             </a:fld>
             <a:endParaRPr lang="en-US"/>
           </a:p>
@@ -887,7 +1374,7 @@
     </p:spTree>
     <p:extLst>
       <p:ext uri="{BB962C8B-B14F-4D97-AF65-F5344CB8AC3E}">
-        <p14:creationId xmlns:p14="http://schemas.microsoft.com/office/powerpoint/2010/main" val="3809231641"/>
+        <p14:creationId xmlns:p14="http://schemas.microsoft.com/office/powerpoint/2010/main" val="632864446"/>
       </p:ext>
     </p:extLst>
   </p:cSld>
@@ -941,6 +1428,122 @@
           <a:bodyPr/>
           <a:lstStyle/>
           <a:p>
+            <a:r>
+              <a:rPr lang="en-US" smtClean="0"/>
+              <a:t>RemoteDiag</a:t>
+            </a:r>
+            <a:r>
+              <a:rPr lang="en-US" baseline="0" smtClean="0"/>
+              <a:t> is responsible for processing diagnotics for each ECU and uploading diagnostic data to the OEM server</a:t>
+            </a:r>
+          </a:p>
+          <a:p>
+            <a:r>
+              <a:rPr lang="en-US" baseline="0" smtClean="0"/>
+              <a:t>Currently, RemoteDiag has two main communication paths: </a:t>
+            </a:r>
+          </a:p>
+          <a:p>
+            <a:r>
+              <a:rPr lang="en-US" baseline="0" smtClean="0"/>
+              <a:t>One with the OEM server (the red flow), for direct diagnostic commands.</a:t>
+            </a:r>
+          </a:p>
+          <a:p>
+            <a:r>
+              <a:rPr lang="en-US" baseline="0" smtClean="0"/>
+              <a:t>And The other one with the MM ECU (the pink flow), for OTA updates.</a:t>
+            </a:r>
+          </a:p>
+          <a:p>
+            <a:r>
+              <a:rPr lang="en-US" smtClean="0"/>
+              <a:t>However,</a:t>
+            </a:r>
+            <a:r>
+              <a:rPr lang="en-US" baseline="0" smtClean="0"/>
+              <a:t> there are security risks in the current design:</a:t>
+            </a:r>
+          </a:p>
+          <a:p>
+            <a:pPr marL="171450" indent="-171450">
+              <a:buFontTx/>
+              <a:buChar char="-"/>
+            </a:pPr>
+            <a:r>
+              <a:rPr lang="en-US" baseline="0" smtClean="0"/>
+              <a:t>The communication path between RemoteDiag and the MM ECU routes in the EP container. If the EP container is compromised, this communication could be exposed to an attacker.</a:t>
+            </a:r>
+          </a:p>
+          <a:p>
+            <a:pPr marL="171450" indent="-171450">
+              <a:buFontTx/>
+              <a:buChar char="-"/>
+            </a:pPr>
+            <a:r>
+              <a:rPr lang="en-US" baseline="0" smtClean="0"/>
+              <a:t>And, OEM also requests that </a:t>
+            </a:r>
+            <a:r>
+              <a:rPr lang="en-US" sz="1200" b="1" smtClean="0"/>
+              <a:t>unauthorized reprogramming requests should be filtered</a:t>
+            </a:r>
+          </a:p>
+          <a:p>
+            <a:pPr marL="0" indent="0">
+              <a:buFontTx/>
+              <a:buNone/>
+            </a:pPr>
+            <a:endParaRPr lang="en-US" sz="1200" b="1" baseline="0" smtClean="0"/>
+          </a:p>
+          <a:p>
+            <a:pPr marL="0" indent="0">
+              <a:buFontTx/>
+              <a:buNone/>
+            </a:pPr>
+            <a:r>
+              <a:rPr lang="en-US" sz="1200" b="0" i="0" kern="1200" smtClean="0">
+                <a:solidFill>
+                  <a:schemeClr val="tx1"/>
+                </a:solidFill>
+                <a:effectLst/>
+                <a:latin typeface="+mn-lt"/>
+                <a:ea typeface="+mn-ea"/>
+                <a:cs typeface="+mn-cs"/>
+              </a:rPr>
+              <a:t>As a result, the internal architecture of</a:t>
+            </a:r>
+            <a:r>
+              <a:rPr lang="en-US" sz="1200" b="0" i="0" kern="1200" baseline="0" smtClean="0">
+                <a:solidFill>
+                  <a:schemeClr val="tx1"/>
+                </a:solidFill>
+                <a:effectLst/>
+                <a:latin typeface="+mn-lt"/>
+                <a:ea typeface="+mn-ea"/>
+                <a:cs typeface="+mn-cs"/>
+              </a:rPr>
+              <a:t> RemoteDiag</a:t>
+            </a:r>
+            <a:r>
+              <a:rPr lang="en-US" sz="1200" b="0" i="0" kern="1200" smtClean="0">
+                <a:solidFill>
+                  <a:schemeClr val="tx1"/>
+                </a:solidFill>
+                <a:effectLst/>
+                <a:latin typeface="+mn-lt"/>
+                <a:ea typeface="+mn-ea"/>
+                <a:cs typeface="+mn-cs"/>
+              </a:rPr>
+              <a:t> and communication flow need to be redesigned so that they are aligned with the new container architecture.”</a:t>
+            </a:r>
+            <a:endParaRPr lang="en-US" b="0" baseline="0" smtClean="0"/>
+          </a:p>
+          <a:p>
+            <a:pPr marL="171450" indent="-171450">
+              <a:buFontTx/>
+              <a:buChar char="-"/>
+            </a:pPr>
             <a:endParaRPr lang="en-US"/>
           </a:p>
         </p:txBody>
@@ -962,7 +1565,7 @@
           <a:p>
             <a:fld id="{EF277405-33BD-42BD-B604-93760E4185DC}" type="slidenum">
               <a:rPr lang="en-US" smtClean="0"/>
-              <a:t>10</a:t>
+              <a:t>5</a:t>
             </a:fld>
             <a:endParaRPr lang="en-US"/>
           </a:p>
@@ -971,7 +1574,7 @@
     </p:spTree>
     <p:extLst>
       <p:ext uri="{BB962C8B-B14F-4D97-AF65-F5344CB8AC3E}">
-        <p14:creationId xmlns:p14="http://schemas.microsoft.com/office/powerpoint/2010/main" val="3467681225"/>
+        <p14:creationId xmlns:p14="http://schemas.microsoft.com/office/powerpoint/2010/main" val="566984018"/>
       </p:ext>
     </p:extLst>
   </p:cSld>
@@ -1025,6 +1628,14 @@
           <a:bodyPr/>
           <a:lstStyle/>
           <a:p>
+            <a:r>
+              <a:rPr lang="en-US" smtClean="0"/>
+              <a:t>Base on OEM requirements</a:t>
+            </a:r>
+            <a:r>
+              <a:rPr lang="en-US" baseline="0" smtClean="0"/>
+              <a:t> and security perspective, I extract the functional requirements as shown in the table.</a:t>
+            </a:r>
             <a:endParaRPr lang="en-US"/>
           </a:p>
         </p:txBody>
@@ -1046,7 +1657,7 @@
           <a:p>
             <a:fld id="{EF277405-33BD-42BD-B604-93760E4185DC}" type="slidenum">
               <a:rPr lang="en-US" smtClean="0"/>
-              <a:t>11</a:t>
+              <a:t>6</a:t>
             </a:fld>
             <a:endParaRPr lang="en-US"/>
           </a:p>
@@ -1055,7 +1666,7 @@
     </p:spTree>
     <p:extLst>
       <p:ext uri="{BB962C8B-B14F-4D97-AF65-F5344CB8AC3E}">
-        <p14:creationId xmlns:p14="http://schemas.microsoft.com/office/powerpoint/2010/main" val="194177539"/>
+        <p14:creationId xmlns:p14="http://schemas.microsoft.com/office/powerpoint/2010/main" val="3944749670"/>
       </p:ext>
     </p:extLst>
   </p:cSld>
@@ -1109,6 +1720,104 @@
           <a:bodyPr/>
           <a:lstStyle/>
           <a:p>
+            <a:r>
+              <a:rPr lang="en-US" smtClean="0"/>
+              <a:t>Here</a:t>
+            </a:r>
+            <a:r>
+              <a:rPr lang="en-US" baseline="0" smtClean="0"/>
+              <a:t> is the quality attribute table which I’m concerning.</a:t>
+            </a:r>
+          </a:p>
+          <a:p>
+            <a:r>
+              <a:rPr lang="en-US" baseline="0" smtClean="0"/>
+              <a:t>Basically, I focus on Security attributes. Then, Modifiability and Maintainability.</a:t>
+            </a:r>
+            <a:endParaRPr lang="en-US"/>
+          </a:p>
+        </p:txBody>
+      </p:sp>
+      <p:sp>
+        <p:nvSpPr>
+          <p:cNvPr id="4" name="Slide Number Placeholder 3"/>
+          <p:cNvSpPr>
+            <a:spLocks noGrp="1"/>
+          </p:cNvSpPr>
+          <p:nvPr>
+            <p:ph type="sldNum" sz="quarter" idx="5"/>
+          </p:nvPr>
+        </p:nvSpPr>
+        <p:spPr/>
+        <p:txBody>
+          <a:bodyPr/>
+          <a:lstStyle/>
+          <a:p>
+            <a:fld id="{EF277405-33BD-42BD-B604-93760E4185DC}" type="slidenum">
+              <a:rPr lang="en-US" smtClean="0"/>
+              <a:t>7</a:t>
+            </a:fld>
+            <a:endParaRPr lang="en-US"/>
+          </a:p>
+        </p:txBody>
+      </p:sp>
+    </p:spTree>
+    <p:extLst>
+      <p:ext uri="{BB962C8B-B14F-4D97-AF65-F5344CB8AC3E}">
+        <p14:creationId xmlns:p14="http://schemas.microsoft.com/office/powerpoint/2010/main" val="1380153111"/>
+      </p:ext>
+    </p:extLst>
+  </p:cSld>
+  <p:clrMapOvr>
+    <a:masterClrMapping/>
+  </p:clrMapOvr>
+</p:notes>
+</file>
+
+<file path=ppt/notesSlides/notesSlide8.xml><?xml version="1.0" encoding="utf-8"?>
+<p:notes xmlns:a="http://schemas.openxmlformats.org/drawingml/2006/main" xmlns:r="http://schemas.openxmlformats.org/officeDocument/2006/relationships" xmlns:p="http://schemas.openxmlformats.org/presentationml/2006/main">
+  <p:cSld>
+    <p:spTree>
+      <p:nvGrpSpPr>
+        <p:cNvPr id="1" name=""/>
+        <p:cNvGrpSpPr/>
+        <p:nvPr/>
+      </p:nvGrpSpPr>
+      <p:grpSpPr>
+        <a:xfrm>
+          <a:off x="0" y="0"/>
+          <a:ext cx="0" cy="0"/>
+          <a:chOff x="0" y="0"/>
+          <a:chExt cx="0" cy="0"/>
+        </a:xfrm>
+      </p:grpSpPr>
+      <p:sp>
+        <p:nvSpPr>
+          <p:cNvPr id="2" name="Slide Image Placeholder 1"/>
+          <p:cNvSpPr>
+            <a:spLocks noGrp="1" noRot="1" noChangeAspect="1"/>
+          </p:cNvSpPr>
+          <p:nvPr>
+            <p:ph type="sldImg"/>
+          </p:nvPr>
+        </p:nvSpPr>
+        <p:spPr/>
+      </p:sp>
+      <p:sp>
+        <p:nvSpPr>
+          <p:cNvPr id="3" name="Notes Placeholder 2"/>
+          <p:cNvSpPr>
+            <a:spLocks noGrp="1"/>
+          </p:cNvSpPr>
+          <p:nvPr>
+            <p:ph type="body" idx="1"/>
+          </p:nvPr>
+        </p:nvSpPr>
+        <p:spPr/>
+        <p:txBody>
+          <a:bodyPr/>
+          <a:lstStyle/>
+          <a:p>
             <a:endParaRPr lang="en-US"/>
           </a:p>
         </p:txBody>
@@ -1130,7 +1839,7 @@
           <a:p>
             <a:fld id="{EF277405-33BD-42BD-B604-93760E4185DC}" type="slidenum">
               <a:rPr lang="en-US" smtClean="0"/>
-              <a:t>12</a:t>
+              <a:t>8</a:t>
             </a:fld>
             <a:endParaRPr lang="en-US"/>
           </a:p>
@@ -1139,7 +1848,133 @@
     </p:spTree>
     <p:extLst>
       <p:ext uri="{BB962C8B-B14F-4D97-AF65-F5344CB8AC3E}">
-        <p14:creationId xmlns:p14="http://schemas.microsoft.com/office/powerpoint/2010/main" val="3095113047"/>
+        <p14:creationId xmlns:p14="http://schemas.microsoft.com/office/powerpoint/2010/main" val="130619238"/>
+      </p:ext>
+    </p:extLst>
+  </p:cSld>
+  <p:clrMapOvr>
+    <a:masterClrMapping/>
+  </p:clrMapOvr>
+</p:notes>
+</file>
+
+<file path=ppt/notesSlides/notesSlide9.xml><?xml version="1.0" encoding="utf-8"?>
+<p:notes xmlns:a="http://schemas.openxmlformats.org/drawingml/2006/main" xmlns:r="http://schemas.openxmlformats.org/officeDocument/2006/relationships" xmlns:p="http://schemas.openxmlformats.org/presentationml/2006/main">
+  <p:cSld>
+    <p:spTree>
+      <p:nvGrpSpPr>
+        <p:cNvPr id="1" name=""/>
+        <p:cNvGrpSpPr/>
+        <p:nvPr/>
+      </p:nvGrpSpPr>
+      <p:grpSpPr>
+        <a:xfrm>
+          <a:off x="0" y="0"/>
+          <a:ext cx="0" cy="0"/>
+          <a:chOff x="0" y="0"/>
+          <a:chExt cx="0" cy="0"/>
+        </a:xfrm>
+      </p:grpSpPr>
+      <p:sp>
+        <p:nvSpPr>
+          <p:cNvPr id="2" name="Slide Image Placeholder 1"/>
+          <p:cNvSpPr>
+            <a:spLocks noGrp="1" noRot="1" noChangeAspect="1"/>
+          </p:cNvSpPr>
+          <p:nvPr>
+            <p:ph type="sldImg"/>
+          </p:nvPr>
+        </p:nvSpPr>
+        <p:spPr/>
+      </p:sp>
+      <p:sp>
+        <p:nvSpPr>
+          <p:cNvPr id="3" name="Notes Placeholder 2"/>
+          <p:cNvSpPr>
+            <a:spLocks noGrp="1"/>
+          </p:cNvSpPr>
+          <p:nvPr>
+            <p:ph type="body" idx="1"/>
+          </p:nvPr>
+        </p:nvSpPr>
+        <p:spPr/>
+        <p:txBody>
+          <a:bodyPr/>
+          <a:lstStyle/>
+          <a:p>
+            <a:pPr fontAlgn="t"/>
+            <a:r>
+              <a:rPr lang="en-US" sz="1200" b="1" i="0" kern="1200">
+                <a:solidFill>
+                  <a:schemeClr val="tx1"/>
+                </a:solidFill>
+                <a:effectLst/>
+                <a:latin typeface="+mn-lt"/>
+                <a:ea typeface="+mn-ea"/>
+                <a:cs typeface="+mn-cs"/>
+              </a:rPr>
+              <a:t>Trade-offs</a:t>
+            </a:r>
+          </a:p>
+          <a:p>
+            <a:pPr fontAlgn="t"/>
+            <a:r>
+              <a:rPr lang="en-US" sz="1200" b="1" i="0" kern="1200">
+                <a:solidFill>
+                  <a:schemeClr val="tx1"/>
+                </a:solidFill>
+                <a:effectLst/>
+                <a:latin typeface="+mn-lt"/>
+                <a:ea typeface="+mn-ea"/>
+                <a:cs typeface="+mn-cs"/>
+              </a:rPr>
+              <a:t>Maintainability:</a:t>
+            </a:r>
+            <a:r>
+              <a:rPr lang="en-US" sz="1200" b="0" i="0" kern="1200">
+                <a:solidFill>
+                  <a:schemeClr val="tx1"/>
+                </a:solidFill>
+                <a:effectLst/>
+                <a:latin typeface="+mn-lt"/>
+                <a:ea typeface="+mn-ea"/>
+                <a:cs typeface="+mn-cs"/>
+              </a:rPr>
+              <a:t> All EP modules require cross-container IPC support, increasing implementation effort and code-change scope.</a:t>
+            </a:r>
+          </a:p>
+          <a:p>
+            <a:endParaRPr lang="en-US"/>
+          </a:p>
+        </p:txBody>
+      </p:sp>
+      <p:sp>
+        <p:nvSpPr>
+          <p:cNvPr id="4" name="Slide Number Placeholder 3"/>
+          <p:cNvSpPr>
+            <a:spLocks noGrp="1"/>
+          </p:cNvSpPr>
+          <p:nvPr>
+            <p:ph type="sldNum" sz="quarter" idx="10"/>
+          </p:nvPr>
+        </p:nvSpPr>
+        <p:spPr/>
+        <p:txBody>
+          <a:bodyPr/>
+          <a:lstStyle/>
+          <a:p>
+            <a:fld id="{EF277405-33BD-42BD-B604-93760E4185DC}" type="slidenum">
+              <a:rPr lang="en-US" smtClean="0"/>
+              <a:t>9</a:t>
+            </a:fld>
+            <a:endParaRPr lang="en-US"/>
+          </a:p>
+        </p:txBody>
+      </p:sp>
+    </p:spTree>
+    <p:extLst>
+      <p:ext uri="{BB962C8B-B14F-4D97-AF65-F5344CB8AC3E}">
+        <p14:creationId xmlns:p14="http://schemas.microsoft.com/office/powerpoint/2010/main" val="3809231641"/>
       </p:ext>
     </p:extLst>
   </p:cSld>
@@ -1278,7 +2113,7 @@
           <a:p>
             <a:fld id="{B934B22C-8C05-4817-830F-8B9F9DEAE546}" type="datetimeFigureOut">
               <a:rPr lang="en-US" smtClean="0"/>
-              <a:t>10/5/2026</a:t>
+              <a:t>10/13/2026</a:t>
             </a:fld>
             <a:endParaRPr lang="en-US"/>
           </a:p>
@@ -1446,7 +2281,7 @@
           <a:p>
             <a:fld id="{B934B22C-8C05-4817-830F-8B9F9DEAE546}" type="datetimeFigureOut">
               <a:rPr lang="en-US" smtClean="0"/>
-              <a:t>10/5/2026</a:t>
+              <a:t>10/13/2026</a:t>
             </a:fld>
             <a:endParaRPr lang="en-US"/>
           </a:p>
@@ -1624,7 +2459,7 @@
           <a:p>
             <a:fld id="{B934B22C-8C05-4817-830F-8B9F9DEAE546}" type="datetimeFigureOut">
               <a:rPr lang="en-US" smtClean="0"/>
-              <a:t>10/5/2026</a:t>
+              <a:t>10/13/2026</a:t>
             </a:fld>
             <a:endParaRPr lang="en-US"/>
           </a:p>
@@ -1818,7 +2653,7 @@
           <a:p>
             <a:fld id="{B934B22C-8C05-4817-830F-8B9F9DEAE546}" type="datetimeFigureOut">
               <a:rPr lang="en-US" smtClean="0"/>
-              <a:t>10/5/2026</a:t>
+              <a:t>10/13/2026</a:t>
             </a:fld>
             <a:endParaRPr lang="en-US"/>
           </a:p>
@@ -2123,7 +2958,7 @@
           <a:p>
             <a:fld id="{B934B22C-8C05-4817-830F-8B9F9DEAE546}" type="datetimeFigureOut">
               <a:rPr lang="en-US" smtClean="0"/>
-              <a:t>10/5/2026</a:t>
+              <a:t>10/13/2026</a:t>
             </a:fld>
             <a:endParaRPr lang="en-US"/>
           </a:p>
@@ -2352,7 +3187,7 @@
           <a:p>
             <a:fld id="{B934B22C-8C05-4817-830F-8B9F9DEAE546}" type="datetimeFigureOut">
               <a:rPr lang="en-US" smtClean="0"/>
-              <a:t>10/5/2026</a:t>
+              <a:t>10/13/2026</a:t>
             </a:fld>
             <a:endParaRPr lang="en-US"/>
           </a:p>
@@ -2716,7 +3551,7 @@
           <a:p>
             <a:fld id="{B934B22C-8C05-4817-830F-8B9F9DEAE546}" type="datetimeFigureOut">
               <a:rPr lang="en-US" smtClean="0"/>
-              <a:t>10/5/2026</a:t>
+              <a:t>10/13/2026</a:t>
             </a:fld>
             <a:endParaRPr lang="en-US"/>
           </a:p>
@@ -2833,7 +3668,7 @@
           <a:p>
             <a:fld id="{B934B22C-8C05-4817-830F-8B9F9DEAE546}" type="datetimeFigureOut">
               <a:rPr lang="en-US" smtClean="0"/>
-              <a:t>10/5/2026</a:t>
+              <a:t>10/13/2026</a:t>
             </a:fld>
             <a:endParaRPr lang="en-US"/>
           </a:p>
@@ -2928,7 +3763,7 @@
           <a:p>
             <a:fld id="{B934B22C-8C05-4817-830F-8B9F9DEAE546}" type="datetimeFigureOut">
               <a:rPr lang="en-US" smtClean="0"/>
-              <a:t>10/5/2026</a:t>
+              <a:t>10/13/2026</a:t>
             </a:fld>
             <a:endParaRPr lang="en-US"/>
           </a:p>
@@ -3203,7 +4038,7 @@
           <a:p>
             <a:fld id="{B934B22C-8C05-4817-830F-8B9F9DEAE546}" type="datetimeFigureOut">
               <a:rPr lang="en-US" smtClean="0"/>
-              <a:t>10/5/2026</a:t>
+              <a:t>10/13/2026</a:t>
             </a:fld>
             <a:endParaRPr lang="en-US"/>
           </a:p>
@@ -3455,7 +4290,7 @@
           <a:p>
             <a:fld id="{B934B22C-8C05-4817-830F-8B9F9DEAE546}" type="datetimeFigureOut">
               <a:rPr lang="en-US" smtClean="0"/>
-              <a:t>10/5/2026</a:t>
+              <a:t>10/13/2026</a:t>
             </a:fld>
             <a:endParaRPr lang="en-US"/>
           </a:p>
@@ -3666,7 +4501,7 @@
           <a:p>
             <a:fld id="{B934B22C-8C05-4817-830F-8B9F9DEAE546}" type="datetimeFigureOut">
               <a:rPr lang="en-US" smtClean="0"/>
-              <a:t>10/5/2026</a:t>
+              <a:t>10/13/2026</a:t>
             </a:fld>
             <a:endParaRPr lang="en-US"/>
           </a:p>
@@ -4593,14 +5428,14 @@
           <p:nvPr>
             <p:extLst>
               <p:ext uri="{D42A27DB-BD31-4B8C-83A1-F6EECF244321}">
-                <p14:modId xmlns:p14="http://schemas.microsoft.com/office/powerpoint/2010/main" val="550902463"/>
+                <p14:modId xmlns:p14="http://schemas.microsoft.com/office/powerpoint/2010/main" val="2158287634"/>
               </p:ext>
             </p:extLst>
           </p:nvPr>
         </p:nvGraphicFramePr>
         <p:xfrm>
           <a:off x="72428" y="625771"/>
-          <a:ext cx="12050161" cy="5296762"/>
+          <a:ext cx="12050161" cy="5307684"/>
         </p:xfrm>
         <a:graphic>
           <a:graphicData uri="http://schemas.openxmlformats.org/drawingml/2006/table">
@@ -5057,6 +5892,7 @@
                       <a:headEnd type="none" w="med" len="med"/>
                       <a:tailEnd type="none" w="med" len="med"/>
                     </a:lnB>
+                    <a:noFill/>
                   </a:tcPr>
                 </a:tc>
                 <a:tc>
@@ -5181,6 +6017,7 @@
                       <a:headEnd type="none" w="med" len="med"/>
                       <a:tailEnd type="none" w="med" len="med"/>
                     </a:lnB>
+                    <a:noFill/>
                   </a:tcPr>
                 </a:tc>
                 <a:tc>
@@ -5300,6 +6137,7 @@
                       <a:headEnd type="none" w="med" len="med"/>
                       <a:tailEnd type="none" w="med" len="med"/>
                     </a:lnB>
+                    <a:noFill/>
                   </a:tcPr>
                 </a:tc>
                 <a:tc>
@@ -5419,6 +6257,7 @@
                       <a:headEnd type="none" w="med" len="med"/>
                       <a:tailEnd type="none" w="med" len="med"/>
                     </a:lnB>
+                    <a:noFill/>
                   </a:tcPr>
                 </a:tc>
                 <a:extLst>
@@ -5508,6 +6347,7 @@
                       <a:headEnd type="none" w="med" len="med"/>
                       <a:tailEnd type="none" w="med" len="med"/>
                     </a:lnB>
+                    <a:noFill/>
                   </a:tcPr>
                 </a:tc>
                 <a:tc>
@@ -5635,6 +6475,7 @@
                       <a:headEnd type="none" w="med" len="med"/>
                       <a:tailEnd type="none" w="med" len="med"/>
                     </a:lnB>
+                    <a:noFill/>
                   </a:tcPr>
                 </a:tc>
                 <a:tc>
@@ -5745,6 +6586,7 @@
                       <a:headEnd type="none" w="med" len="med"/>
                       <a:tailEnd type="none" w="med" len="med"/>
                     </a:lnB>
+                    <a:noFill/>
                   </a:tcPr>
                 </a:tc>
                 <a:tc>
@@ -5864,6 +6706,7 @@
                       <a:headEnd type="none" w="med" len="med"/>
                       <a:tailEnd type="none" w="med" len="med"/>
                     </a:lnB>
+                    <a:noFill/>
                   </a:tcPr>
                 </a:tc>
                 <a:extLst>
@@ -5953,6 +6796,7 @@
                       <a:headEnd type="none" w="med" len="med"/>
                       <a:tailEnd type="none" w="med" len="med"/>
                     </a:lnB>
+                    <a:noFill/>
                   </a:tcPr>
                 </a:tc>
                 <a:tc>
@@ -6234,6 +7078,7 @@
                       <a:headEnd type="none" w="med" len="med"/>
                       <a:tailEnd type="none" w="med" len="med"/>
                     </a:lnB>
+                    <a:noFill/>
                   </a:tcPr>
                 </a:tc>
                 <a:tc>
@@ -6336,6 +7181,7 @@
                       <a:headEnd type="none" w="med" len="med"/>
                       <a:tailEnd type="none" w="med" len="med"/>
                     </a:lnB>
+                    <a:noFill/>
                   </a:tcPr>
                 </a:tc>
                 <a:tc>
@@ -6449,6 +7295,7 @@
                       <a:headEnd type="none" w="med" len="med"/>
                       <a:tailEnd type="none" w="med" len="med"/>
                     </a:lnB>
+                    <a:noFill/>
                   </a:tcPr>
                 </a:tc>
                 <a:extLst>
@@ -6538,6 +7385,7 @@
                       <a:headEnd type="none" w="med" len="med"/>
                       <a:tailEnd type="none" w="med" len="med"/>
                     </a:lnB>
+                    <a:noFill/>
                   </a:tcPr>
                 </a:tc>
                 <a:tc>
@@ -6664,6 +7512,7 @@
                       <a:headEnd type="none" w="med" len="med"/>
                       <a:tailEnd type="none" w="med" len="med"/>
                     </a:lnB>
+                    <a:noFill/>
                   </a:tcPr>
                 </a:tc>
                 <a:tc>
@@ -6835,6 +7684,7 @@
                       <a:headEnd type="none" w="med" len="med"/>
                       <a:tailEnd type="none" w="med" len="med"/>
                     </a:lnB>
+                    <a:noFill/>
                   </a:tcPr>
                 </a:tc>
                 <a:tc>
@@ -6979,6 +7829,7 @@
                       <a:headEnd type="none" w="med" len="med"/>
                       <a:tailEnd type="none" w="med" len="med"/>
                     </a:lnB>
+                    <a:noFill/>
                   </a:tcPr>
                 </a:tc>
                 <a:extLst>
@@ -7049,6 +7900,7 @@
                       <a:headEnd type="none" w="med" len="med"/>
                       <a:tailEnd type="none" w="med" len="med"/>
                     </a:lnB>
+                    <a:noFill/>
                   </a:tcPr>
                 </a:tc>
                 <a:tc>
@@ -7118,6 +7970,7 @@
                       <a:headEnd type="none" w="med" len="med"/>
                       <a:tailEnd type="none" w="med" len="med"/>
                     </a:lnB>
+                    <a:noFill/>
                   </a:tcPr>
                 </a:tc>
                 <a:tc>
@@ -7193,6 +8046,7 @@
                       <a:headEnd type="none" w="med" len="med"/>
                       <a:tailEnd type="none" w="med" len="med"/>
                     </a:lnB>
+                    <a:noFill/>
                   </a:tcPr>
                 </a:tc>
                 <a:tc>
@@ -7251,6 +8105,7 @@
                       <a:headEnd type="none" w="med" len="med"/>
                       <a:tailEnd type="none" w="med" len="med"/>
                     </a:lnB>
+                    <a:noFill/>
                   </a:tcPr>
                 </a:tc>
                 <a:extLst>
@@ -13850,11 +14705,7 @@
             <a:pPr algn="r"/>
             <a:r>
               <a:rPr lang="en-US"/>
-              <a:t>Detail design</a:t>
-            </a:r>
-            <a:r>
-              <a:rPr lang="en-US"/>
-              <a:t>: </a:t>
+              <a:t>Detail design: </a:t>
             </a:r>
             <a:r>
               <a:rPr lang="en-US" smtClean="0"/>
@@ -14114,7 +14965,7 @@
         </p:blipFill>
         <p:spPr>
           <a:xfrm>
-            <a:off x="2790266" y="2652517"/>
+            <a:off x="2736926" y="2652517"/>
             <a:ext cx="6611468" cy="3803224"/>
           </a:xfrm>
           <a:prstGeom prst="rect">
@@ -14330,7 +15181,19 @@
             </a:r>
             <a:r>
               <a:rPr lang="en-US" sz="1600" dirty="0"/>
-              <a:t>Entry Point (EP) partition is compromised by unauthorized software and has been taken over.</a:t>
+              <a:t>Entry Point (EP</a:t>
+            </a:r>
+            <a:r>
+              <a:rPr lang="en-US" sz="1600"/>
+              <a:t>) </a:t>
+            </a:r>
+            <a:r>
+              <a:rPr lang="en-US" sz="1600" smtClean="0"/>
+              <a:t>partition (containing components which is able to communicate with network) could be </a:t>
+            </a:r>
+            <a:r>
+              <a:rPr lang="en-US" sz="1600" dirty="0"/>
+              <a:t>compromised by unauthorized software and has been taken over.</a:t>
             </a:r>
             <a:endParaRPr lang="en-US" sz="1400" dirty="0"/>
           </a:p>
@@ -14621,7 +15484,7 @@
           <p:nvPr/>
         </p:nvPicPr>
         <p:blipFill>
-          <a:blip r:embed="rId2"/>
+          <a:blip r:embed="rId3"/>
           <a:stretch>
             <a:fillRect/>
           </a:stretch>
@@ -14947,7 +15810,7 @@
           <p:nvPr/>
         </p:nvPicPr>
         <p:blipFill>
-          <a:blip r:embed="rId3"/>
+          <a:blip r:embed="rId4"/>
           <a:stretch>
             <a:fillRect/>
           </a:stretch>
@@ -15071,7 +15934,7 @@
           <p:nvPr>
             <p:extLst>
               <p:ext uri="{D42A27DB-BD31-4B8C-83A1-F6EECF244321}">
-                <p14:modId xmlns:p14="http://schemas.microsoft.com/office/powerpoint/2010/main" val="3689793615"/>
+                <p14:modId xmlns:p14="http://schemas.microsoft.com/office/powerpoint/2010/main" val="3157120159"/>
               </p:ext>
             </p:extLst>
           </p:nvPr>
@@ -15302,6 +16165,7 @@
                       <a:headEnd type="none" w="med" len="med"/>
                       <a:tailEnd type="none" w="med" len="med"/>
                     </a:lnB>
+                    <a:noFill/>
                   </a:tcPr>
                 </a:tc>
                 <a:tc>
@@ -15368,6 +16232,7 @@
                       <a:headEnd type="none" w="med" len="med"/>
                       <a:tailEnd type="none" w="med" len="med"/>
                     </a:lnB>
+                    <a:noFill/>
                   </a:tcPr>
                 </a:tc>
                 <a:extLst>
@@ -15450,6 +16315,7 @@
                       <a:headEnd type="none" w="med" len="med"/>
                       <a:tailEnd type="none" w="med" len="med"/>
                     </a:lnB>
+                    <a:noFill/>
                   </a:tcPr>
                 </a:tc>
                 <a:tc>
@@ -15516,6 +16382,7 @@
                       <a:headEnd type="none" w="med" len="med"/>
                       <a:tailEnd type="none" w="med" len="med"/>
                     </a:lnB>
+                    <a:noFill/>
                   </a:tcPr>
                 </a:tc>
                 <a:extLst>
@@ -15810,14 +16677,14 @@
           <p:nvPr>
             <p:extLst>
               <p:ext uri="{D42A27DB-BD31-4B8C-83A1-F6EECF244321}">
-                <p14:modId xmlns:p14="http://schemas.microsoft.com/office/powerpoint/2010/main" val="2327283940"/>
+                <p14:modId xmlns:p14="http://schemas.microsoft.com/office/powerpoint/2010/main" val="3315760293"/>
               </p:ext>
             </p:extLst>
           </p:nvPr>
         </p:nvGraphicFramePr>
         <p:xfrm>
           <a:off x="182820" y="960039"/>
-          <a:ext cx="11903556" cy="5059760"/>
+          <a:ext cx="11887260" cy="5059760"/>
         </p:xfrm>
         <a:graphic>
           <a:graphicData uri="http://schemas.openxmlformats.org/drawingml/2006/table">
@@ -15826,38 +16693,26 @@
                 <a:tableStyleId>{5C22544A-7EE6-4342-B048-85BDC9FD1C3A}</a:tableStyleId>
               </a:tblPr>
               <a:tblGrid>
-                <a:gridCol w="745942">
+                <a:gridCol w="811057">
                   <a:extLst>
                     <a:ext uri="{9D8B030D-6E8A-4147-A177-3AD203B41FA5}">
                       <a16:colId xmlns:a16="http://schemas.microsoft.com/office/drawing/2014/main" xmlns="" val="20000"/>
                     </a:ext>
                   </a:extLst>
                 </a:gridCol>
-                <a:gridCol w="4275879">
+                <a:gridCol w="1467383"/>
+                <a:gridCol w="960120"/>
+                <a:gridCol w="4324350">
                   <a:extLst>
                     <a:ext uri="{9D8B030D-6E8A-4147-A177-3AD203B41FA5}">
                       <a16:colId xmlns:a16="http://schemas.microsoft.com/office/drawing/2014/main" xmlns="" val="20001"/>
                     </a:ext>
                   </a:extLst>
                 </a:gridCol>
-                <a:gridCol w="4419193">
+                <a:gridCol w="4324350">
                   <a:extLst>
                     <a:ext uri="{9D8B030D-6E8A-4147-A177-3AD203B41FA5}">
                       <a16:colId xmlns:a16="http://schemas.microsoft.com/office/drawing/2014/main" xmlns="" val="2530683369"/>
-                    </a:ext>
-                  </a:extLst>
-                </a:gridCol>
-                <a:gridCol w="1475715">
-                  <a:extLst>
-                    <a:ext uri="{9D8B030D-6E8A-4147-A177-3AD203B41FA5}">
-                      <a16:colId xmlns:a16="http://schemas.microsoft.com/office/drawing/2014/main" xmlns="" val="20002"/>
-                    </a:ext>
-                  </a:extLst>
-                </a:gridCol>
-                <a:gridCol w="986827">
-                  <a:extLst>
-                    <a:ext uri="{9D8B030D-6E8A-4147-A177-3AD203B41FA5}">
-                      <a16:colId xmlns:a16="http://schemas.microsoft.com/office/drawing/2014/main" xmlns="" val="20003"/>
                     </a:ext>
                   </a:extLst>
                 </a:gridCol>
@@ -15875,150 +16730,6 @@
                           <a:cs typeface="Arial" panose="020B0604020202020204" pitchFamily="34" charset="0"/>
                         </a:rPr>
                         <a:t>ID</a:t>
-                      </a:r>
-                    </a:p>
-                  </a:txBody>
-                  <a:tcPr marL="106700" marR="106700" marT="53350" marB="53350" anchor="ctr">
-                    <a:lnL w="12700" cap="flat" cmpd="sng" algn="ctr">
-                      <a:solidFill>
-                        <a:schemeClr val="tx1"/>
-                      </a:solidFill>
-                      <a:prstDash val="solid"/>
-                      <a:round/>
-                      <a:headEnd type="none" w="med" len="med"/>
-                      <a:tailEnd type="none" w="med" len="med"/>
-                    </a:lnL>
-                    <a:lnR w="12700" cap="flat" cmpd="sng" algn="ctr">
-                      <a:solidFill>
-                        <a:schemeClr val="tx1"/>
-                      </a:solidFill>
-                      <a:prstDash val="solid"/>
-                      <a:round/>
-                      <a:headEnd type="none" w="med" len="med"/>
-                      <a:tailEnd type="none" w="med" len="med"/>
-                    </a:lnR>
-                    <a:lnT w="12700" cap="flat" cmpd="sng" algn="ctr">
-                      <a:solidFill>
-                        <a:schemeClr val="tx1"/>
-                      </a:solidFill>
-                      <a:prstDash val="solid"/>
-                      <a:round/>
-                      <a:headEnd type="none" w="med" len="med"/>
-                      <a:tailEnd type="none" w="med" len="med"/>
-                    </a:lnT>
-                    <a:lnB w="12700" cap="flat" cmpd="sng" algn="ctr">
-                      <a:solidFill>
-                        <a:schemeClr val="tx1"/>
-                      </a:solidFill>
-                      <a:prstDash val="solid"/>
-                      <a:round/>
-                      <a:headEnd type="none" w="med" len="med"/>
-                      <a:tailEnd type="none" w="med" len="med"/>
-                    </a:lnB>
-                  </a:tcPr>
-                </a:tc>
-                <a:tc>
-                  <a:txBody>
-                    <a:bodyPr/>
-                    <a:lstStyle/>
-                    <a:p>
-                      <a:pPr marL="0" marR="0" indent="0" algn="l" defTabSz="914400" rtl="0" eaLnBrk="1" fontAlgn="auto" latinLnBrk="0" hangingPunct="1">
-                        <a:lnSpc>
-                          <a:spcPct val="100000"/>
-                        </a:lnSpc>
-                        <a:spcBef>
-                          <a:spcPts val="0"/>
-                        </a:spcBef>
-                        <a:spcAft>
-                          <a:spcPts val="0"/>
-                        </a:spcAft>
-                        <a:buClrTx/>
-                        <a:buSzTx/>
-                        <a:buFontTx/>
-                        <a:buNone/>
-                        <a:tabLst/>
-                        <a:defRPr/>
-                      </a:pPr>
-                      <a:r>
-                        <a:rPr lang="en-US" sz="1600" b="0">
-                          <a:effectLst/>
-                          <a:latin typeface="+mn-lt"/>
-                          <a:ea typeface="Malgun Gothic" panose="020B0503020000020004" pitchFamily="34" charset="-127"/>
-                          <a:cs typeface="Arial" panose="020B0604020202020204" pitchFamily="34" charset="0"/>
-                        </a:rPr>
-                        <a:t>QA Scenario</a:t>
-                      </a:r>
-                    </a:p>
-                  </a:txBody>
-                  <a:tcPr marL="106700" marR="106700" marT="53350" marB="53350" anchor="ctr">
-                    <a:lnL w="12700" cap="flat" cmpd="sng" algn="ctr">
-                      <a:solidFill>
-                        <a:schemeClr val="tx1"/>
-                      </a:solidFill>
-                      <a:prstDash val="solid"/>
-                      <a:round/>
-                      <a:headEnd type="none" w="med" len="med"/>
-                      <a:tailEnd type="none" w="med" len="med"/>
-                    </a:lnL>
-                    <a:lnR w="12700" cap="flat" cmpd="sng" algn="ctr">
-                      <a:solidFill>
-                        <a:schemeClr val="tx1"/>
-                      </a:solidFill>
-                      <a:prstDash val="solid"/>
-                      <a:round/>
-                      <a:headEnd type="none" w="med" len="med"/>
-                      <a:tailEnd type="none" w="med" len="med"/>
-                    </a:lnR>
-                    <a:lnT w="12700" cap="flat" cmpd="sng" algn="ctr">
-                      <a:solidFill>
-                        <a:schemeClr val="tx1"/>
-                      </a:solidFill>
-                      <a:prstDash val="solid"/>
-                      <a:round/>
-                      <a:headEnd type="none" w="med" len="med"/>
-                      <a:tailEnd type="none" w="med" len="med"/>
-                    </a:lnT>
-                    <a:lnB w="12700" cap="flat" cmpd="sng" algn="ctr">
-                      <a:solidFill>
-                        <a:schemeClr val="tx1"/>
-                      </a:solidFill>
-                      <a:prstDash val="solid"/>
-                      <a:round/>
-                      <a:headEnd type="none" w="med" len="med"/>
-                      <a:tailEnd type="none" w="med" len="med"/>
-                    </a:lnB>
-                  </a:tcPr>
-                </a:tc>
-                <a:tc>
-                  <a:txBody>
-                    <a:bodyPr/>
-                    <a:lstStyle/>
-                    <a:p>
-                      <a:pPr marL="0" marR="0" indent="0" algn="l" defTabSz="914400" rtl="0" eaLnBrk="1" fontAlgn="auto" latinLnBrk="0" hangingPunct="1">
-                        <a:lnSpc>
-                          <a:spcPct val="100000"/>
-                        </a:lnSpc>
-                        <a:spcBef>
-                          <a:spcPts val="0"/>
-                        </a:spcBef>
-                        <a:spcAft>
-                          <a:spcPts val="0"/>
-                        </a:spcAft>
-                        <a:buClrTx/>
-                        <a:buSzTx/>
-                        <a:buFontTx/>
-                        <a:buNone/>
-                        <a:tabLst/>
-                        <a:defRPr/>
-                      </a:pPr>
-                      <a:r>
-                        <a:rPr lang="en-US" sz="1600" b="0">
-                          <a:effectLst/>
-                          <a:latin typeface="+mn-lt"/>
-                          <a:ea typeface="Malgun Gothic" panose="020B0503020000020004" pitchFamily="34" charset="-127"/>
-                          <a:cs typeface="Arial" panose="020B0604020202020204" pitchFamily="34" charset="0"/>
-                        </a:rPr>
-                        <a:t>Measure</a:t>
                       </a:r>
                     </a:p>
                   </a:txBody>
@@ -16215,6 +16926,150 @@
                     </a:lnB>
                   </a:tcPr>
                 </a:tc>
+                <a:tc>
+                  <a:txBody>
+                    <a:bodyPr/>
+                    <a:lstStyle/>
+                    <a:p>
+                      <a:pPr marL="0" marR="0" indent="0" algn="l" defTabSz="914400" rtl="0" eaLnBrk="1" fontAlgn="auto" latinLnBrk="0" hangingPunct="1">
+                        <a:lnSpc>
+                          <a:spcPct val="100000"/>
+                        </a:lnSpc>
+                        <a:spcBef>
+                          <a:spcPts val="0"/>
+                        </a:spcBef>
+                        <a:spcAft>
+                          <a:spcPts val="0"/>
+                        </a:spcAft>
+                        <a:buClrTx/>
+                        <a:buSzTx/>
+                        <a:buFontTx/>
+                        <a:buNone/>
+                        <a:tabLst/>
+                        <a:defRPr/>
+                      </a:pPr>
+                      <a:r>
+                        <a:rPr lang="en-US" sz="1600" b="0">
+                          <a:effectLst/>
+                          <a:latin typeface="+mn-lt"/>
+                          <a:ea typeface="Malgun Gothic" panose="020B0503020000020004" pitchFamily="34" charset="-127"/>
+                          <a:cs typeface="Arial" panose="020B0604020202020204" pitchFamily="34" charset="0"/>
+                        </a:rPr>
+                        <a:t>QA Scenario</a:t>
+                      </a:r>
+                    </a:p>
+                  </a:txBody>
+                  <a:tcPr marL="106700" marR="106700" marT="53350" marB="53350" anchor="ctr">
+                    <a:lnL w="12700" cap="flat" cmpd="sng" algn="ctr">
+                      <a:solidFill>
+                        <a:schemeClr val="tx1"/>
+                      </a:solidFill>
+                      <a:prstDash val="solid"/>
+                      <a:round/>
+                      <a:headEnd type="none" w="med" len="med"/>
+                      <a:tailEnd type="none" w="med" len="med"/>
+                    </a:lnL>
+                    <a:lnR w="12700" cap="flat" cmpd="sng" algn="ctr">
+                      <a:solidFill>
+                        <a:schemeClr val="tx1"/>
+                      </a:solidFill>
+                      <a:prstDash val="solid"/>
+                      <a:round/>
+                      <a:headEnd type="none" w="med" len="med"/>
+                      <a:tailEnd type="none" w="med" len="med"/>
+                    </a:lnR>
+                    <a:lnT w="12700" cap="flat" cmpd="sng" algn="ctr">
+                      <a:solidFill>
+                        <a:schemeClr val="tx1"/>
+                      </a:solidFill>
+                      <a:prstDash val="solid"/>
+                      <a:round/>
+                      <a:headEnd type="none" w="med" len="med"/>
+                      <a:tailEnd type="none" w="med" len="med"/>
+                    </a:lnT>
+                    <a:lnB w="12700" cap="flat" cmpd="sng" algn="ctr">
+                      <a:solidFill>
+                        <a:schemeClr val="tx1"/>
+                      </a:solidFill>
+                      <a:prstDash val="solid"/>
+                      <a:round/>
+                      <a:headEnd type="none" w="med" len="med"/>
+                      <a:tailEnd type="none" w="med" len="med"/>
+                    </a:lnB>
+                  </a:tcPr>
+                </a:tc>
+                <a:tc>
+                  <a:txBody>
+                    <a:bodyPr/>
+                    <a:lstStyle/>
+                    <a:p>
+                      <a:pPr marL="0" marR="0" indent="0" algn="l" defTabSz="914400" rtl="0" eaLnBrk="1" fontAlgn="auto" latinLnBrk="0" hangingPunct="1">
+                        <a:lnSpc>
+                          <a:spcPct val="100000"/>
+                        </a:lnSpc>
+                        <a:spcBef>
+                          <a:spcPts val="0"/>
+                        </a:spcBef>
+                        <a:spcAft>
+                          <a:spcPts val="0"/>
+                        </a:spcAft>
+                        <a:buClrTx/>
+                        <a:buSzTx/>
+                        <a:buFontTx/>
+                        <a:buNone/>
+                        <a:tabLst/>
+                        <a:defRPr/>
+                      </a:pPr>
+                      <a:r>
+                        <a:rPr lang="en-US" sz="1600" b="0">
+                          <a:effectLst/>
+                          <a:latin typeface="+mn-lt"/>
+                          <a:ea typeface="Malgun Gothic" panose="020B0503020000020004" pitchFamily="34" charset="-127"/>
+                          <a:cs typeface="Arial" panose="020B0604020202020204" pitchFamily="34" charset="0"/>
+                        </a:rPr>
+                        <a:t>Measure</a:t>
+                      </a:r>
+                    </a:p>
+                  </a:txBody>
+                  <a:tcPr marL="106700" marR="106700" marT="53350" marB="53350" anchor="ctr">
+                    <a:lnL w="12700" cap="flat" cmpd="sng" algn="ctr">
+                      <a:solidFill>
+                        <a:schemeClr val="tx1"/>
+                      </a:solidFill>
+                      <a:prstDash val="solid"/>
+                      <a:round/>
+                      <a:headEnd type="none" w="med" len="med"/>
+                      <a:tailEnd type="none" w="med" len="med"/>
+                    </a:lnL>
+                    <a:lnR w="12700" cap="flat" cmpd="sng" algn="ctr">
+                      <a:solidFill>
+                        <a:schemeClr val="tx1"/>
+                      </a:solidFill>
+                      <a:prstDash val="solid"/>
+                      <a:round/>
+                      <a:headEnd type="none" w="med" len="med"/>
+                      <a:tailEnd type="none" w="med" len="med"/>
+                    </a:lnR>
+                    <a:lnT w="12700" cap="flat" cmpd="sng" algn="ctr">
+                      <a:solidFill>
+                        <a:schemeClr val="tx1"/>
+                      </a:solidFill>
+                      <a:prstDash val="solid"/>
+                      <a:round/>
+                      <a:headEnd type="none" w="med" len="med"/>
+                      <a:tailEnd type="none" w="med" len="med"/>
+                    </a:lnT>
+                    <a:lnB w="12700" cap="flat" cmpd="sng" algn="ctr">
+                      <a:solidFill>
+                        <a:schemeClr val="tx1"/>
+                      </a:solidFill>
+                      <a:prstDash val="solid"/>
+                      <a:round/>
+                      <a:headEnd type="none" w="med" len="med"/>
+                      <a:tailEnd type="none" w="med" len="med"/>
+                    </a:lnB>
+                  </a:tcPr>
+                </a:tc>
                 <a:extLst>
                   <a:ext uri="{0D108BD9-81ED-4DB2-BD59-A6C34878D82A}">
                     <a16:rowId xmlns:a16="http://schemas.microsoft.com/office/drawing/2014/main" xmlns="" val="10000"/>
@@ -16283,6 +17138,135 @@
                       <a:headEnd type="none" w="med" len="med"/>
                       <a:tailEnd type="none" w="med" len="med"/>
                     </a:lnB>
+                    <a:noFill/>
+                  </a:tcPr>
+                </a:tc>
+                <a:tc>
+                  <a:txBody>
+                    <a:bodyPr/>
+                    <a:lstStyle/>
+                    <a:p>
+                      <a:pPr algn="l" latinLnBrk="0">
+                        <a:lnSpc>
+                          <a:spcPct val="150000"/>
+                        </a:lnSpc>
+                      </a:pPr>
+                      <a:r>
+                        <a:rPr lang="en-US" sz="1600" b="0">
+                          <a:effectLst/>
+                          <a:latin typeface="+mn-lt"/>
+                          <a:cs typeface="Arial" panose="020B0604020202020204" pitchFamily="34" charset="0"/>
+                        </a:rPr>
+                        <a:t>Security</a:t>
+                      </a:r>
+                      <a:endParaRPr lang="en-US" sz="1600" b="0">
+                        <a:latin typeface="+mn-lt"/>
+                        <a:cs typeface="Arial" panose="020B0604020202020204" pitchFamily="34" charset="0"/>
+                      </a:endParaRPr>
+                    </a:p>
+                  </a:txBody>
+                  <a:tcPr marL="106700" marR="106700" marT="53350" marB="53350" anchor="ctr">
+                    <a:lnL w="12700" cap="flat" cmpd="sng" algn="ctr">
+                      <a:solidFill>
+                        <a:schemeClr val="tx1"/>
+                      </a:solidFill>
+                      <a:prstDash val="solid"/>
+                      <a:round/>
+                      <a:headEnd type="none" w="med" len="med"/>
+                      <a:tailEnd type="none" w="med" len="med"/>
+                    </a:lnL>
+                    <a:lnR w="12700" cap="flat" cmpd="sng" algn="ctr">
+                      <a:solidFill>
+                        <a:schemeClr val="tx1"/>
+                      </a:solidFill>
+                      <a:prstDash val="solid"/>
+                      <a:round/>
+                      <a:headEnd type="none" w="med" len="med"/>
+                      <a:tailEnd type="none" w="med" len="med"/>
+                    </a:lnR>
+                    <a:lnT w="12700" cap="flat" cmpd="sng" algn="ctr">
+                      <a:solidFill>
+                        <a:schemeClr val="tx1"/>
+                      </a:solidFill>
+                      <a:prstDash val="solid"/>
+                      <a:round/>
+                      <a:headEnd type="none" w="med" len="med"/>
+                      <a:tailEnd type="none" w="med" len="med"/>
+                    </a:lnT>
+                    <a:lnB w="12700" cap="flat" cmpd="sng" algn="ctr">
+                      <a:solidFill>
+                        <a:schemeClr val="tx1"/>
+                      </a:solidFill>
+                      <a:prstDash val="solid"/>
+                      <a:round/>
+                      <a:headEnd type="none" w="med" len="med"/>
+                      <a:tailEnd type="none" w="med" len="med"/>
+                    </a:lnB>
+                    <a:noFill/>
+                  </a:tcPr>
+                </a:tc>
+                <a:tc>
+                  <a:txBody>
+                    <a:bodyPr/>
+                    <a:lstStyle/>
+                    <a:p>
+                      <a:pPr algn="l" latinLnBrk="0">
+                        <a:lnSpc>
+                          <a:spcPct val="150000"/>
+                        </a:lnSpc>
+                      </a:pPr>
+                      <a:r>
+                        <a:rPr lang="en-US" sz="1600" b="0">
+                          <a:effectLst/>
+                          <a:latin typeface="+mn-lt"/>
+                          <a:cs typeface="Arial" panose="020B0604020202020204" pitchFamily="34" charset="0"/>
+                        </a:rPr>
+                        <a:t>High</a:t>
+                      </a:r>
+                      <a:endParaRPr lang="en-US" sz="1600" b="0">
+                        <a:latin typeface="+mn-lt"/>
+                        <a:cs typeface="Arial" panose="020B0604020202020204" pitchFamily="34" charset="0"/>
+                      </a:endParaRPr>
+                    </a:p>
+                  </a:txBody>
+                  <a:tcPr marL="106700" marR="106700" marT="53350" marB="53350" anchor="ctr">
+                    <a:lnL w="12700" cap="flat" cmpd="sng" algn="ctr">
+                      <a:solidFill>
+                        <a:schemeClr val="tx1"/>
+                      </a:solidFill>
+                      <a:prstDash val="solid"/>
+                      <a:round/>
+                      <a:headEnd type="none" w="med" len="med"/>
+                      <a:tailEnd type="none" w="med" len="med"/>
+                    </a:lnL>
+                    <a:lnR w="12700" cap="flat" cmpd="sng" algn="ctr">
+                      <a:solidFill>
+                        <a:schemeClr val="tx1"/>
+                      </a:solidFill>
+                      <a:prstDash val="solid"/>
+                      <a:round/>
+                      <a:headEnd type="none" w="med" len="med"/>
+                      <a:tailEnd type="none" w="med" len="med"/>
+                    </a:lnR>
+                    <a:lnT w="12700" cap="flat" cmpd="sng" algn="ctr">
+                      <a:solidFill>
+                        <a:schemeClr val="tx1"/>
+                      </a:solidFill>
+                      <a:prstDash val="solid"/>
+                      <a:round/>
+                      <a:headEnd type="none" w="med" len="med"/>
+                      <a:tailEnd type="none" w="med" len="med"/>
+                    </a:lnT>
+                    <a:lnB w="12700" cap="flat" cmpd="sng" algn="ctr">
+                      <a:solidFill>
+                        <a:schemeClr val="tx1"/>
+                      </a:solidFill>
+                      <a:prstDash val="solid"/>
+                      <a:round/>
+                      <a:headEnd type="none" w="med" len="med"/>
+                      <a:tailEnd type="none" w="med" len="med"/>
+                    </a:lnB>
+                    <a:noFill/>
                   </a:tcPr>
                 </a:tc>
                 <a:tc>
@@ -16352,6 +17336,7 @@
                       <a:headEnd type="none" w="med" len="med"/>
                       <a:tailEnd type="none" w="med" len="med"/>
                     </a:lnB>
+                    <a:noFill/>
                   </a:tcPr>
                 </a:tc>
                 <a:tc>
@@ -16419,132 +17404,7 @@
                       <a:headEnd type="none" w="med" len="med"/>
                       <a:tailEnd type="none" w="med" len="med"/>
                     </a:lnB>
-                  </a:tcPr>
-                </a:tc>
-                <a:tc>
-                  <a:txBody>
-                    <a:bodyPr/>
-                    <a:lstStyle/>
-                    <a:p>
-                      <a:pPr algn="l" latinLnBrk="0">
-                        <a:lnSpc>
-                          <a:spcPct val="150000"/>
-                        </a:lnSpc>
-                      </a:pPr>
-                      <a:r>
-                        <a:rPr lang="en-US" sz="1600" b="0">
-                          <a:effectLst/>
-                          <a:latin typeface="+mn-lt"/>
-                          <a:cs typeface="Arial" panose="020B0604020202020204" pitchFamily="34" charset="0"/>
-                        </a:rPr>
-                        <a:t>Security</a:t>
-                      </a:r>
-                      <a:endParaRPr lang="en-US" sz="1600" b="0">
-                        <a:latin typeface="+mn-lt"/>
-                        <a:cs typeface="Arial" panose="020B0604020202020204" pitchFamily="34" charset="0"/>
-                      </a:endParaRPr>
-                    </a:p>
-                  </a:txBody>
-                  <a:tcPr marL="106700" marR="106700" marT="53350" marB="53350" anchor="ctr">
-                    <a:lnL w="12700" cap="flat" cmpd="sng" algn="ctr">
-                      <a:solidFill>
-                        <a:schemeClr val="tx1"/>
-                      </a:solidFill>
-                      <a:prstDash val="solid"/>
-                      <a:round/>
-                      <a:headEnd type="none" w="med" len="med"/>
-                      <a:tailEnd type="none" w="med" len="med"/>
-                    </a:lnL>
-                    <a:lnR w="12700" cap="flat" cmpd="sng" algn="ctr">
-                      <a:solidFill>
-                        <a:schemeClr val="tx1"/>
-                      </a:solidFill>
-                      <a:prstDash val="solid"/>
-                      <a:round/>
-                      <a:headEnd type="none" w="med" len="med"/>
-                      <a:tailEnd type="none" w="med" len="med"/>
-                    </a:lnR>
-                    <a:lnT w="12700" cap="flat" cmpd="sng" algn="ctr">
-                      <a:solidFill>
-                        <a:schemeClr val="tx1"/>
-                      </a:solidFill>
-                      <a:prstDash val="solid"/>
-                      <a:round/>
-                      <a:headEnd type="none" w="med" len="med"/>
-                      <a:tailEnd type="none" w="med" len="med"/>
-                    </a:lnT>
-                    <a:lnB w="12700" cap="flat" cmpd="sng" algn="ctr">
-                      <a:solidFill>
-                        <a:schemeClr val="tx1"/>
-                      </a:solidFill>
-                      <a:prstDash val="solid"/>
-                      <a:round/>
-                      <a:headEnd type="none" w="med" len="med"/>
-                      <a:tailEnd type="none" w="med" len="med"/>
-                    </a:lnB>
-                  </a:tcPr>
-                </a:tc>
-                <a:tc>
-                  <a:txBody>
-                    <a:bodyPr/>
-                    <a:lstStyle/>
-                    <a:p>
-                      <a:pPr algn="l" latinLnBrk="0">
-                        <a:lnSpc>
-                          <a:spcPct val="150000"/>
-                        </a:lnSpc>
-                      </a:pPr>
-                      <a:r>
-                        <a:rPr lang="en-US" sz="1600" b="0">
-                          <a:effectLst/>
-                          <a:latin typeface="+mn-lt"/>
-                          <a:cs typeface="Arial" panose="020B0604020202020204" pitchFamily="34" charset="0"/>
-                        </a:rPr>
-                        <a:t>High</a:t>
-                      </a:r>
-                      <a:endParaRPr lang="en-US" sz="1600" b="0">
-                        <a:latin typeface="+mn-lt"/>
-                        <a:cs typeface="Arial" panose="020B0604020202020204" pitchFamily="34" charset="0"/>
-                      </a:endParaRPr>
-                    </a:p>
-                  </a:txBody>
-                  <a:tcPr marL="106700" marR="106700" marT="53350" marB="53350" anchor="ctr">
-                    <a:lnL w="12700" cap="flat" cmpd="sng" algn="ctr">
-                      <a:solidFill>
-                        <a:schemeClr val="tx1"/>
-                      </a:solidFill>
-                      <a:prstDash val="solid"/>
-                      <a:round/>
-                      <a:headEnd type="none" w="med" len="med"/>
-                      <a:tailEnd type="none" w="med" len="med"/>
-                    </a:lnL>
-                    <a:lnR w="12700" cap="flat" cmpd="sng" algn="ctr">
-                      <a:solidFill>
-                        <a:schemeClr val="tx1"/>
-                      </a:solidFill>
-                      <a:prstDash val="solid"/>
-                      <a:round/>
-                      <a:headEnd type="none" w="med" len="med"/>
-                      <a:tailEnd type="none" w="med" len="med"/>
-                    </a:lnR>
-                    <a:lnT w="12700" cap="flat" cmpd="sng" algn="ctr">
-                      <a:solidFill>
-                        <a:schemeClr val="tx1"/>
-                      </a:solidFill>
-                      <a:prstDash val="solid"/>
-                      <a:round/>
-                      <a:headEnd type="none" w="med" len="med"/>
-                      <a:tailEnd type="none" w="med" len="med"/>
-                    </a:lnT>
-                    <a:lnB w="12700" cap="flat" cmpd="sng" algn="ctr">
-                      <a:solidFill>
-                        <a:schemeClr val="tx1"/>
-                      </a:solidFill>
-                      <a:prstDash val="solid"/>
-                      <a:round/>
-                      <a:headEnd type="none" w="med" len="med"/>
-                      <a:tailEnd type="none" w="med" len="med"/>
-                    </a:lnB>
+                    <a:noFill/>
                   </a:tcPr>
                 </a:tc>
                 <a:extLst>
@@ -16627,6 +17487,135 @@
                       <a:headEnd type="none" w="med" len="med"/>
                       <a:tailEnd type="none" w="med" len="med"/>
                     </a:lnB>
+                    <a:noFill/>
+                  </a:tcPr>
+                </a:tc>
+                <a:tc>
+                  <a:txBody>
+                    <a:bodyPr/>
+                    <a:lstStyle/>
+                    <a:p>
+                      <a:pPr algn="l" latinLnBrk="0">
+                        <a:lnSpc>
+                          <a:spcPct val="150000"/>
+                        </a:lnSpc>
+                      </a:pPr>
+                      <a:r>
+                        <a:rPr lang="en-US" sz="1600" b="0">
+                          <a:effectLst/>
+                          <a:latin typeface="+mn-lt"/>
+                          <a:cs typeface="Arial" panose="020B0604020202020204" pitchFamily="34" charset="0"/>
+                        </a:rPr>
+                        <a:t>Security</a:t>
+                      </a:r>
+                      <a:endParaRPr lang="en-US" sz="1600" b="0">
+                        <a:latin typeface="+mn-lt"/>
+                        <a:cs typeface="Arial" panose="020B0604020202020204" pitchFamily="34" charset="0"/>
+                      </a:endParaRPr>
+                    </a:p>
+                  </a:txBody>
+                  <a:tcPr marL="106700" marR="106700" marT="53350" marB="53350" anchor="ctr">
+                    <a:lnL w="12700" cap="flat" cmpd="sng" algn="ctr">
+                      <a:solidFill>
+                        <a:schemeClr val="tx1"/>
+                      </a:solidFill>
+                      <a:prstDash val="solid"/>
+                      <a:round/>
+                      <a:headEnd type="none" w="med" len="med"/>
+                      <a:tailEnd type="none" w="med" len="med"/>
+                    </a:lnL>
+                    <a:lnR w="12700" cap="flat" cmpd="sng" algn="ctr">
+                      <a:solidFill>
+                        <a:schemeClr val="tx1"/>
+                      </a:solidFill>
+                      <a:prstDash val="solid"/>
+                      <a:round/>
+                      <a:headEnd type="none" w="med" len="med"/>
+                      <a:tailEnd type="none" w="med" len="med"/>
+                    </a:lnR>
+                    <a:lnT w="12700" cap="flat" cmpd="sng" algn="ctr">
+                      <a:solidFill>
+                        <a:schemeClr val="tx1"/>
+                      </a:solidFill>
+                      <a:prstDash val="solid"/>
+                      <a:round/>
+                      <a:headEnd type="none" w="med" len="med"/>
+                      <a:tailEnd type="none" w="med" len="med"/>
+                    </a:lnT>
+                    <a:lnB w="12700" cap="flat" cmpd="sng" algn="ctr">
+                      <a:solidFill>
+                        <a:schemeClr val="tx1"/>
+                      </a:solidFill>
+                      <a:prstDash val="solid"/>
+                      <a:round/>
+                      <a:headEnd type="none" w="med" len="med"/>
+                      <a:tailEnd type="none" w="med" len="med"/>
+                    </a:lnB>
+                    <a:noFill/>
+                  </a:tcPr>
+                </a:tc>
+                <a:tc>
+                  <a:txBody>
+                    <a:bodyPr/>
+                    <a:lstStyle/>
+                    <a:p>
+                      <a:pPr algn="l" latinLnBrk="0">
+                        <a:lnSpc>
+                          <a:spcPct val="150000"/>
+                        </a:lnSpc>
+                      </a:pPr>
+                      <a:r>
+                        <a:rPr lang="en-US" sz="1600" b="0">
+                          <a:effectLst/>
+                          <a:latin typeface="+mn-lt"/>
+                          <a:cs typeface="Arial" panose="020B0604020202020204" pitchFamily="34" charset="0"/>
+                        </a:rPr>
+                        <a:t>High</a:t>
+                      </a:r>
+                      <a:endParaRPr lang="en-US" sz="1600" b="0">
+                        <a:latin typeface="+mn-lt"/>
+                        <a:cs typeface="Arial" panose="020B0604020202020204" pitchFamily="34" charset="0"/>
+                      </a:endParaRPr>
+                    </a:p>
+                  </a:txBody>
+                  <a:tcPr marL="106700" marR="106700" marT="53350" marB="53350" anchor="ctr">
+                    <a:lnL w="12700" cap="flat" cmpd="sng" algn="ctr">
+                      <a:solidFill>
+                        <a:schemeClr val="tx1"/>
+                      </a:solidFill>
+                      <a:prstDash val="solid"/>
+                      <a:round/>
+                      <a:headEnd type="none" w="med" len="med"/>
+                      <a:tailEnd type="none" w="med" len="med"/>
+                    </a:lnL>
+                    <a:lnR w="12700" cap="flat" cmpd="sng" algn="ctr">
+                      <a:solidFill>
+                        <a:schemeClr val="tx1"/>
+                      </a:solidFill>
+                      <a:prstDash val="solid"/>
+                      <a:round/>
+                      <a:headEnd type="none" w="med" len="med"/>
+                      <a:tailEnd type="none" w="med" len="med"/>
+                    </a:lnR>
+                    <a:lnT w="12700" cap="flat" cmpd="sng" algn="ctr">
+                      <a:solidFill>
+                        <a:schemeClr val="tx1"/>
+                      </a:solidFill>
+                      <a:prstDash val="solid"/>
+                      <a:round/>
+                      <a:headEnd type="none" w="med" len="med"/>
+                      <a:tailEnd type="none" w="med" len="med"/>
+                    </a:lnT>
+                    <a:lnB w="12700" cap="flat" cmpd="sng" algn="ctr">
+                      <a:solidFill>
+                        <a:schemeClr val="tx1"/>
+                      </a:solidFill>
+                      <a:prstDash val="solid"/>
+                      <a:round/>
+                      <a:headEnd type="none" w="med" len="med"/>
+                      <a:tailEnd type="none" w="med" len="med"/>
+                    </a:lnB>
+                    <a:noFill/>
                   </a:tcPr>
                 </a:tc>
                 <a:tc>
@@ -16717,6 +17706,7 @@
                       <a:headEnd type="none" w="med" len="med"/>
                       <a:tailEnd type="none" w="med" len="med"/>
                     </a:lnB>
+                    <a:noFill/>
                   </a:tcPr>
                 </a:tc>
                 <a:tc>
@@ -16786,132 +17776,7 @@
                       <a:headEnd type="none" w="med" len="med"/>
                       <a:tailEnd type="none" w="med" len="med"/>
                     </a:lnB>
-                  </a:tcPr>
-                </a:tc>
-                <a:tc>
-                  <a:txBody>
-                    <a:bodyPr/>
-                    <a:lstStyle/>
-                    <a:p>
-                      <a:pPr algn="l" latinLnBrk="0">
-                        <a:lnSpc>
-                          <a:spcPct val="150000"/>
-                        </a:lnSpc>
-                      </a:pPr>
-                      <a:r>
-                        <a:rPr lang="en-US" sz="1600" b="0">
-                          <a:effectLst/>
-                          <a:latin typeface="+mn-lt"/>
-                          <a:cs typeface="Arial" panose="020B0604020202020204" pitchFamily="34" charset="0"/>
-                        </a:rPr>
-                        <a:t>Security</a:t>
-                      </a:r>
-                      <a:endParaRPr lang="en-US" sz="1600" b="0">
-                        <a:latin typeface="+mn-lt"/>
-                        <a:cs typeface="Arial" panose="020B0604020202020204" pitchFamily="34" charset="0"/>
-                      </a:endParaRPr>
-                    </a:p>
-                  </a:txBody>
-                  <a:tcPr marL="106700" marR="106700" marT="53350" marB="53350" anchor="ctr">
-                    <a:lnL w="12700" cap="flat" cmpd="sng" algn="ctr">
-                      <a:solidFill>
-                        <a:schemeClr val="tx1"/>
-                      </a:solidFill>
-                      <a:prstDash val="solid"/>
-                      <a:round/>
-                      <a:headEnd type="none" w="med" len="med"/>
-                      <a:tailEnd type="none" w="med" len="med"/>
-                    </a:lnL>
-                    <a:lnR w="12700" cap="flat" cmpd="sng" algn="ctr">
-                      <a:solidFill>
-                        <a:schemeClr val="tx1"/>
-                      </a:solidFill>
-                      <a:prstDash val="solid"/>
-                      <a:round/>
-                      <a:headEnd type="none" w="med" len="med"/>
-                      <a:tailEnd type="none" w="med" len="med"/>
-                    </a:lnR>
-                    <a:lnT w="12700" cap="flat" cmpd="sng" algn="ctr">
-                      <a:solidFill>
-                        <a:schemeClr val="tx1"/>
-                      </a:solidFill>
-                      <a:prstDash val="solid"/>
-                      <a:round/>
-                      <a:headEnd type="none" w="med" len="med"/>
-                      <a:tailEnd type="none" w="med" len="med"/>
-                    </a:lnT>
-                    <a:lnB w="12700" cap="flat" cmpd="sng" algn="ctr">
-                      <a:solidFill>
-                        <a:schemeClr val="tx1"/>
-                      </a:solidFill>
-                      <a:prstDash val="solid"/>
-                      <a:round/>
-                      <a:headEnd type="none" w="med" len="med"/>
-                      <a:tailEnd type="none" w="med" len="med"/>
-                    </a:lnB>
-                  </a:tcPr>
-                </a:tc>
-                <a:tc>
-                  <a:txBody>
-                    <a:bodyPr/>
-                    <a:lstStyle/>
-                    <a:p>
-                      <a:pPr algn="l" latinLnBrk="0">
-                        <a:lnSpc>
-                          <a:spcPct val="150000"/>
-                        </a:lnSpc>
-                      </a:pPr>
-                      <a:r>
-                        <a:rPr lang="en-US" sz="1600" b="0">
-                          <a:effectLst/>
-                          <a:latin typeface="+mn-lt"/>
-                          <a:cs typeface="Arial" panose="020B0604020202020204" pitchFamily="34" charset="0"/>
-                        </a:rPr>
-                        <a:t>High</a:t>
-                      </a:r>
-                      <a:endParaRPr lang="en-US" sz="1600" b="0">
-                        <a:latin typeface="+mn-lt"/>
-                        <a:cs typeface="Arial" panose="020B0604020202020204" pitchFamily="34" charset="0"/>
-                      </a:endParaRPr>
-                    </a:p>
-                  </a:txBody>
-                  <a:tcPr marL="106700" marR="106700" marT="53350" marB="53350" anchor="ctr">
-                    <a:lnL w="12700" cap="flat" cmpd="sng" algn="ctr">
-                      <a:solidFill>
-                        <a:schemeClr val="tx1"/>
-                      </a:solidFill>
-                      <a:prstDash val="solid"/>
-                      <a:round/>
-                      <a:headEnd type="none" w="med" len="med"/>
-                      <a:tailEnd type="none" w="med" len="med"/>
-                    </a:lnL>
-                    <a:lnR w="12700" cap="flat" cmpd="sng" algn="ctr">
-                      <a:solidFill>
-                        <a:schemeClr val="tx1"/>
-                      </a:solidFill>
-                      <a:prstDash val="solid"/>
-                      <a:round/>
-                      <a:headEnd type="none" w="med" len="med"/>
-                      <a:tailEnd type="none" w="med" len="med"/>
-                    </a:lnR>
-                    <a:lnT w="12700" cap="flat" cmpd="sng" algn="ctr">
-                      <a:solidFill>
-                        <a:schemeClr val="tx1"/>
-                      </a:solidFill>
-                      <a:prstDash val="solid"/>
-                      <a:round/>
-                      <a:headEnd type="none" w="med" len="med"/>
-                      <a:tailEnd type="none" w="med" len="med"/>
-                    </a:lnT>
-                    <a:lnB w="12700" cap="flat" cmpd="sng" algn="ctr">
-                      <a:solidFill>
-                        <a:schemeClr val="tx1"/>
-                      </a:solidFill>
-                      <a:prstDash val="solid"/>
-                      <a:round/>
-                      <a:headEnd type="none" w="med" len="med"/>
-                      <a:tailEnd type="none" w="med" len="med"/>
-                    </a:lnB>
+                    <a:noFill/>
                   </a:tcPr>
                 </a:tc>
                 <a:extLst>
@@ -16982,6 +17847,139 @@
                       <a:headEnd type="none" w="med" len="med"/>
                       <a:tailEnd type="none" w="med" len="med"/>
                     </a:lnB>
+                    <a:noFill/>
+                  </a:tcPr>
+                </a:tc>
+                <a:tc>
+                  <a:txBody>
+                    <a:bodyPr/>
+                    <a:lstStyle/>
+                    <a:p>
+                      <a:pPr marL="0" marR="0" indent="0" algn="l" defTabSz="914400" rtl="0" eaLnBrk="1" fontAlgn="auto" latinLnBrk="0" hangingPunct="1">
+                        <a:lnSpc>
+                          <a:spcPct val="150000"/>
+                        </a:lnSpc>
+                        <a:spcBef>
+                          <a:spcPts val="0"/>
+                        </a:spcBef>
+                        <a:spcAft>
+                          <a:spcPts val="0"/>
+                        </a:spcAft>
+                        <a:buClrTx/>
+                        <a:buSzTx/>
+                        <a:buFontTx/>
+                        <a:buNone/>
+                        <a:tabLst/>
+                        <a:defRPr/>
+                      </a:pPr>
+                      <a:r>
+                        <a:rPr lang="en-US" sz="1600" b="0">
+                          <a:effectLst/>
+                          <a:latin typeface="+mn-lt"/>
+                          <a:ea typeface="Malgun Gothic" panose="020B0503020000020004" pitchFamily="34" charset="-127"/>
+                          <a:cs typeface="Arial" panose="020B0604020202020204" pitchFamily="34" charset="0"/>
+                        </a:rPr>
+                        <a:t>Modifiability</a:t>
+                      </a:r>
+                    </a:p>
+                  </a:txBody>
+                  <a:tcPr marL="106700" marR="106700" marT="53350" marB="53350" anchor="ctr">
+                    <a:lnL w="12700" cap="flat" cmpd="sng" algn="ctr">
+                      <a:solidFill>
+                        <a:schemeClr val="tx1"/>
+                      </a:solidFill>
+                      <a:prstDash val="solid"/>
+                      <a:round/>
+                      <a:headEnd type="none" w="med" len="med"/>
+                      <a:tailEnd type="none" w="med" len="med"/>
+                    </a:lnL>
+                    <a:lnR w="12700" cap="flat" cmpd="sng" algn="ctr">
+                      <a:solidFill>
+                        <a:schemeClr val="tx1"/>
+                      </a:solidFill>
+                      <a:prstDash val="solid"/>
+                      <a:round/>
+                      <a:headEnd type="none" w="med" len="med"/>
+                      <a:tailEnd type="none" w="med" len="med"/>
+                    </a:lnR>
+                    <a:lnT w="12700" cap="flat" cmpd="sng" algn="ctr">
+                      <a:solidFill>
+                        <a:schemeClr val="tx1"/>
+                      </a:solidFill>
+                      <a:prstDash val="solid"/>
+                      <a:round/>
+                      <a:headEnd type="none" w="med" len="med"/>
+                      <a:tailEnd type="none" w="med" len="med"/>
+                    </a:lnT>
+                    <a:lnB w="12700" cap="flat" cmpd="sng" algn="ctr">
+                      <a:solidFill>
+                        <a:schemeClr val="tx1"/>
+                      </a:solidFill>
+                      <a:prstDash val="solid"/>
+                      <a:round/>
+                      <a:headEnd type="none" w="med" len="med"/>
+                      <a:tailEnd type="none" w="med" len="med"/>
+                    </a:lnB>
+                    <a:noFill/>
+                  </a:tcPr>
+                </a:tc>
+                <a:tc>
+                  <a:txBody>
+                    <a:bodyPr/>
+                    <a:lstStyle/>
+                    <a:p>
+                      <a:pPr algn="l" latinLnBrk="0">
+                        <a:lnSpc>
+                          <a:spcPct val="150000"/>
+                        </a:lnSpc>
+                      </a:pPr>
+                      <a:r>
+                        <a:rPr lang="en-US" sz="1600" b="0" dirty="0">
+                          <a:latin typeface="+mn-lt"/>
+                          <a:cs typeface="Arial" panose="020B0604020202020204" pitchFamily="34" charset="0"/>
+                        </a:rPr>
+                        <a:t>Medium</a:t>
+                      </a:r>
+                    </a:p>
+                  </a:txBody>
+                  <a:tcPr marL="106700" marR="106700" marT="53350" marB="53350" anchor="ctr">
+                    <a:lnL w="12700" cap="flat" cmpd="sng" algn="ctr">
+                      <a:solidFill>
+                        <a:schemeClr val="tx1"/>
+                      </a:solidFill>
+                      <a:prstDash val="solid"/>
+                      <a:round/>
+                      <a:headEnd type="none" w="med" len="med"/>
+                      <a:tailEnd type="none" w="med" len="med"/>
+                    </a:lnL>
+                    <a:lnR w="12700" cap="flat" cmpd="sng" algn="ctr">
+                      <a:solidFill>
+                        <a:schemeClr val="tx1"/>
+                      </a:solidFill>
+                      <a:prstDash val="solid"/>
+                      <a:round/>
+                      <a:headEnd type="none" w="med" len="med"/>
+                      <a:tailEnd type="none" w="med" len="med"/>
+                    </a:lnR>
+                    <a:lnT w="12700" cap="flat" cmpd="sng" algn="ctr">
+                      <a:solidFill>
+                        <a:schemeClr val="tx1"/>
+                      </a:solidFill>
+                      <a:prstDash val="solid"/>
+                      <a:round/>
+                      <a:headEnd type="none" w="med" len="med"/>
+                      <a:tailEnd type="none" w="med" len="med"/>
+                    </a:lnT>
+                    <a:lnB w="12700" cap="flat" cmpd="sng" algn="ctr">
+                      <a:solidFill>
+                        <a:schemeClr val="tx1"/>
+                      </a:solidFill>
+                      <a:prstDash val="solid"/>
+                      <a:round/>
+                      <a:headEnd type="none" w="med" len="med"/>
+                      <a:tailEnd type="none" w="med" len="med"/>
+                    </a:lnB>
+                    <a:noFill/>
                   </a:tcPr>
                 </a:tc>
                 <a:tc>
@@ -17051,6 +18049,7 @@
                       <a:headEnd type="none" w="med" len="med"/>
                       <a:tailEnd type="none" w="med" len="med"/>
                     </a:lnB>
+                    <a:noFill/>
                   </a:tcPr>
                 </a:tc>
                 <a:tc>
@@ -17154,136 +18153,7 @@
                       <a:headEnd type="none" w="med" len="med"/>
                       <a:tailEnd type="none" w="med" len="med"/>
                     </a:lnB>
-                  </a:tcPr>
-                </a:tc>
-                <a:tc>
-                  <a:txBody>
-                    <a:bodyPr/>
-                    <a:lstStyle/>
-                    <a:p>
-                      <a:pPr marL="0" marR="0" indent="0" algn="l" defTabSz="914400" rtl="0" eaLnBrk="1" fontAlgn="auto" latinLnBrk="0" hangingPunct="1">
-                        <a:lnSpc>
-                          <a:spcPct val="150000"/>
-                        </a:lnSpc>
-                        <a:spcBef>
-                          <a:spcPts val="0"/>
-                        </a:spcBef>
-                        <a:spcAft>
-                          <a:spcPts val="0"/>
-                        </a:spcAft>
-                        <a:buClrTx/>
-                        <a:buSzTx/>
-                        <a:buFontTx/>
-                        <a:buNone/>
-                        <a:tabLst/>
-                        <a:defRPr/>
-                      </a:pPr>
-                      <a:r>
-                        <a:rPr lang="en-US" sz="1600" b="0">
-                          <a:effectLst/>
-                          <a:latin typeface="+mn-lt"/>
-                          <a:ea typeface="Malgun Gothic" panose="020B0503020000020004" pitchFamily="34" charset="-127"/>
-                          <a:cs typeface="Arial" panose="020B0604020202020204" pitchFamily="34" charset="0"/>
-                        </a:rPr>
-                        <a:t>Modifiability</a:t>
-                      </a:r>
-                    </a:p>
-                  </a:txBody>
-                  <a:tcPr marL="106700" marR="106700" marT="53350" marB="53350" anchor="ctr">
-                    <a:lnL w="12700" cap="flat" cmpd="sng" algn="ctr">
-                      <a:solidFill>
-                        <a:schemeClr val="tx1"/>
-                      </a:solidFill>
-                      <a:prstDash val="solid"/>
-                      <a:round/>
-                      <a:headEnd type="none" w="med" len="med"/>
-                      <a:tailEnd type="none" w="med" len="med"/>
-                    </a:lnL>
-                    <a:lnR w="12700" cap="flat" cmpd="sng" algn="ctr">
-                      <a:solidFill>
-                        <a:schemeClr val="tx1"/>
-                      </a:solidFill>
-                      <a:prstDash val="solid"/>
-                      <a:round/>
-                      <a:headEnd type="none" w="med" len="med"/>
-                      <a:tailEnd type="none" w="med" len="med"/>
-                    </a:lnR>
-                    <a:lnT w="12700" cap="flat" cmpd="sng" algn="ctr">
-                      <a:solidFill>
-                        <a:schemeClr val="tx1"/>
-                      </a:solidFill>
-                      <a:prstDash val="solid"/>
-                      <a:round/>
-                      <a:headEnd type="none" w="med" len="med"/>
-                      <a:tailEnd type="none" w="med" len="med"/>
-                    </a:lnT>
-                    <a:lnB w="12700" cap="flat" cmpd="sng" algn="ctr">
-                      <a:solidFill>
-                        <a:schemeClr val="tx1"/>
-                      </a:solidFill>
-                      <a:prstDash val="solid"/>
-                      <a:round/>
-                      <a:headEnd type="none" w="med" len="med"/>
-                      <a:tailEnd type="none" w="med" len="med"/>
-                    </a:lnB>
-                  </a:tcPr>
-                </a:tc>
-                <a:tc>
-                  <a:txBody>
-                    <a:bodyPr/>
-                    <a:lstStyle/>
-                    <a:p>
-                      <a:pPr algn="l" latinLnBrk="0">
-                        <a:lnSpc>
-                          <a:spcPct val="150000"/>
-                        </a:lnSpc>
-                      </a:pPr>
-                      <a:r>
-                        <a:rPr lang="en-US" sz="1600" b="0" dirty="0">
-                          <a:latin typeface="+mn-lt"/>
-                          <a:cs typeface="Arial" panose="020B0604020202020204" pitchFamily="34" charset="0"/>
-                        </a:rPr>
-                        <a:t>Medium</a:t>
-                      </a:r>
-                    </a:p>
-                  </a:txBody>
-                  <a:tcPr marL="106700" marR="106700" marT="53350" marB="53350" anchor="ctr">
-                    <a:lnL w="12700" cap="flat" cmpd="sng" algn="ctr">
-                      <a:solidFill>
-                        <a:schemeClr val="tx1"/>
-                      </a:solidFill>
-                      <a:prstDash val="solid"/>
-                      <a:round/>
-                      <a:headEnd type="none" w="med" len="med"/>
-                      <a:tailEnd type="none" w="med" len="med"/>
-                    </a:lnL>
-                    <a:lnR w="12700" cap="flat" cmpd="sng" algn="ctr">
-                      <a:solidFill>
-                        <a:schemeClr val="tx1"/>
-                      </a:solidFill>
-                      <a:prstDash val="solid"/>
-                      <a:round/>
-                      <a:headEnd type="none" w="med" len="med"/>
-                      <a:tailEnd type="none" w="med" len="med"/>
-                    </a:lnR>
-                    <a:lnT w="12700" cap="flat" cmpd="sng" algn="ctr">
-                      <a:solidFill>
-                        <a:schemeClr val="tx1"/>
-                      </a:solidFill>
-                      <a:prstDash val="solid"/>
-                      <a:round/>
-                      <a:headEnd type="none" w="med" len="med"/>
-                      <a:tailEnd type="none" w="med" len="med"/>
-                    </a:lnT>
-                    <a:lnB w="12700" cap="flat" cmpd="sng" algn="ctr">
-                      <a:solidFill>
-                        <a:schemeClr val="tx1"/>
-                      </a:solidFill>
-                      <a:prstDash val="solid"/>
-                      <a:round/>
-                      <a:headEnd type="none" w="med" len="med"/>
-                      <a:tailEnd type="none" w="med" len="med"/>
-                    </a:lnB>
+                    <a:noFill/>
                   </a:tcPr>
                 </a:tc>
                 <a:extLst>
@@ -17354,6 +18224,139 @@
                       <a:headEnd type="none" w="med" len="med"/>
                       <a:tailEnd type="none" w="med" len="med"/>
                     </a:lnB>
+                    <a:noFill/>
+                  </a:tcPr>
+                </a:tc>
+                <a:tc>
+                  <a:txBody>
+                    <a:bodyPr/>
+                    <a:lstStyle/>
+                    <a:p>
+                      <a:pPr marL="0" marR="0" indent="0" algn="l" defTabSz="914400" rtl="0" eaLnBrk="1" fontAlgn="auto" latinLnBrk="0" hangingPunct="1">
+                        <a:lnSpc>
+                          <a:spcPct val="150000"/>
+                        </a:lnSpc>
+                        <a:spcBef>
+                          <a:spcPts val="0"/>
+                        </a:spcBef>
+                        <a:spcAft>
+                          <a:spcPts val="0"/>
+                        </a:spcAft>
+                        <a:buClrTx/>
+                        <a:buSzTx/>
+                        <a:buFontTx/>
+                        <a:buNone/>
+                        <a:tabLst/>
+                        <a:defRPr/>
+                      </a:pPr>
+                      <a:r>
+                        <a:rPr lang="en-US" sz="1600" b="0" dirty="0">
+                          <a:effectLst/>
+                          <a:latin typeface="+mn-lt"/>
+                          <a:ea typeface="Malgun Gothic" panose="020B0503020000020004" pitchFamily="34" charset="-127"/>
+                          <a:cs typeface="Arial" panose="020B0604020202020204" pitchFamily="34" charset="0"/>
+                        </a:rPr>
+                        <a:t>Maintainability</a:t>
+                      </a:r>
+                    </a:p>
+                  </a:txBody>
+                  <a:tcPr marL="106700" marR="106700" marT="53350" marB="53350" anchor="ctr">
+                    <a:lnL w="12700" cap="flat" cmpd="sng" algn="ctr">
+                      <a:solidFill>
+                        <a:schemeClr val="tx1"/>
+                      </a:solidFill>
+                      <a:prstDash val="solid"/>
+                      <a:round/>
+                      <a:headEnd type="none" w="med" len="med"/>
+                      <a:tailEnd type="none" w="med" len="med"/>
+                    </a:lnL>
+                    <a:lnR w="12700" cap="flat" cmpd="sng" algn="ctr">
+                      <a:solidFill>
+                        <a:schemeClr val="tx1"/>
+                      </a:solidFill>
+                      <a:prstDash val="solid"/>
+                      <a:round/>
+                      <a:headEnd type="none" w="med" len="med"/>
+                      <a:tailEnd type="none" w="med" len="med"/>
+                    </a:lnR>
+                    <a:lnT w="12700" cap="flat" cmpd="sng" algn="ctr">
+                      <a:solidFill>
+                        <a:schemeClr val="tx1"/>
+                      </a:solidFill>
+                      <a:prstDash val="solid"/>
+                      <a:round/>
+                      <a:headEnd type="none" w="med" len="med"/>
+                      <a:tailEnd type="none" w="med" len="med"/>
+                    </a:lnT>
+                    <a:lnB w="12700" cap="flat" cmpd="sng" algn="ctr">
+                      <a:solidFill>
+                        <a:schemeClr val="tx1"/>
+                      </a:solidFill>
+                      <a:prstDash val="solid"/>
+                      <a:round/>
+                      <a:headEnd type="none" w="med" len="med"/>
+                      <a:tailEnd type="none" w="med" len="med"/>
+                    </a:lnB>
+                    <a:noFill/>
+                  </a:tcPr>
+                </a:tc>
+                <a:tc>
+                  <a:txBody>
+                    <a:bodyPr/>
+                    <a:lstStyle/>
+                    <a:p>
+                      <a:pPr algn="l" latinLnBrk="0">
+                        <a:lnSpc>
+                          <a:spcPct val="150000"/>
+                        </a:lnSpc>
+                      </a:pPr>
+                      <a:r>
+                        <a:rPr lang="en-US" sz="1600" b="0" dirty="0">
+                          <a:latin typeface="+mn-lt"/>
+                          <a:cs typeface="Arial" panose="020B0604020202020204" pitchFamily="34" charset="0"/>
+                        </a:rPr>
+                        <a:t>Medium</a:t>
+                      </a:r>
+                    </a:p>
+                  </a:txBody>
+                  <a:tcPr marL="106700" marR="106700" marT="53350" marB="53350" anchor="ctr">
+                    <a:lnL w="12700" cap="flat" cmpd="sng" algn="ctr">
+                      <a:solidFill>
+                        <a:schemeClr val="tx1"/>
+                      </a:solidFill>
+                      <a:prstDash val="solid"/>
+                      <a:round/>
+                      <a:headEnd type="none" w="med" len="med"/>
+                      <a:tailEnd type="none" w="med" len="med"/>
+                    </a:lnL>
+                    <a:lnR w="12700" cap="flat" cmpd="sng" algn="ctr">
+                      <a:solidFill>
+                        <a:schemeClr val="tx1"/>
+                      </a:solidFill>
+                      <a:prstDash val="solid"/>
+                      <a:round/>
+                      <a:headEnd type="none" w="med" len="med"/>
+                      <a:tailEnd type="none" w="med" len="med"/>
+                    </a:lnR>
+                    <a:lnT w="12700" cap="flat" cmpd="sng" algn="ctr">
+                      <a:solidFill>
+                        <a:schemeClr val="tx1"/>
+                      </a:solidFill>
+                      <a:prstDash val="solid"/>
+                      <a:round/>
+                      <a:headEnd type="none" w="med" len="med"/>
+                      <a:tailEnd type="none" w="med" len="med"/>
+                    </a:lnT>
+                    <a:lnB w="12700" cap="flat" cmpd="sng" algn="ctr">
+                      <a:solidFill>
+                        <a:schemeClr val="tx1"/>
+                      </a:solidFill>
+                      <a:prstDash val="solid"/>
+                      <a:round/>
+                      <a:headEnd type="none" w="med" len="med"/>
+                      <a:tailEnd type="none" w="med" len="med"/>
+                    </a:lnB>
+                    <a:noFill/>
                   </a:tcPr>
                 </a:tc>
                 <a:tc>
@@ -17447,6 +18450,7 @@
                       <a:headEnd type="none" w="med" len="med"/>
                       <a:tailEnd type="none" w="med" len="med"/>
                     </a:lnB>
+                    <a:noFill/>
                   </a:tcPr>
                 </a:tc>
                 <a:tc>
@@ -17534,136 +18538,7 @@
                       <a:headEnd type="none" w="med" len="med"/>
                       <a:tailEnd type="none" w="med" len="med"/>
                     </a:lnB>
-                  </a:tcPr>
-                </a:tc>
-                <a:tc>
-                  <a:txBody>
-                    <a:bodyPr/>
-                    <a:lstStyle/>
-                    <a:p>
-                      <a:pPr marL="0" marR="0" indent="0" algn="l" defTabSz="914400" rtl="0" eaLnBrk="1" fontAlgn="auto" latinLnBrk="0" hangingPunct="1">
-                        <a:lnSpc>
-                          <a:spcPct val="150000"/>
-                        </a:lnSpc>
-                        <a:spcBef>
-                          <a:spcPts val="0"/>
-                        </a:spcBef>
-                        <a:spcAft>
-                          <a:spcPts val="0"/>
-                        </a:spcAft>
-                        <a:buClrTx/>
-                        <a:buSzTx/>
-                        <a:buFontTx/>
-                        <a:buNone/>
-                        <a:tabLst/>
-                        <a:defRPr/>
-                      </a:pPr>
-                      <a:r>
-                        <a:rPr lang="en-US" sz="1600" b="0" dirty="0">
-                          <a:effectLst/>
-                          <a:latin typeface="+mn-lt"/>
-                          <a:ea typeface="Malgun Gothic" panose="020B0503020000020004" pitchFamily="34" charset="-127"/>
-                          <a:cs typeface="Arial" panose="020B0604020202020204" pitchFamily="34" charset="0"/>
-                        </a:rPr>
-                        <a:t>Maintainability</a:t>
-                      </a:r>
-                    </a:p>
-                  </a:txBody>
-                  <a:tcPr marL="106700" marR="106700" marT="53350" marB="53350" anchor="ctr">
-                    <a:lnL w="12700" cap="flat" cmpd="sng" algn="ctr">
-                      <a:solidFill>
-                        <a:schemeClr val="tx1"/>
-                      </a:solidFill>
-                      <a:prstDash val="solid"/>
-                      <a:round/>
-                      <a:headEnd type="none" w="med" len="med"/>
-                      <a:tailEnd type="none" w="med" len="med"/>
-                    </a:lnL>
-                    <a:lnR w="12700" cap="flat" cmpd="sng" algn="ctr">
-                      <a:solidFill>
-                        <a:schemeClr val="tx1"/>
-                      </a:solidFill>
-                      <a:prstDash val="solid"/>
-                      <a:round/>
-                      <a:headEnd type="none" w="med" len="med"/>
-                      <a:tailEnd type="none" w="med" len="med"/>
-                    </a:lnR>
-                    <a:lnT w="12700" cap="flat" cmpd="sng" algn="ctr">
-                      <a:solidFill>
-                        <a:schemeClr val="tx1"/>
-                      </a:solidFill>
-                      <a:prstDash val="solid"/>
-                      <a:round/>
-                      <a:headEnd type="none" w="med" len="med"/>
-                      <a:tailEnd type="none" w="med" len="med"/>
-                    </a:lnT>
-                    <a:lnB w="12700" cap="flat" cmpd="sng" algn="ctr">
-                      <a:solidFill>
-                        <a:schemeClr val="tx1"/>
-                      </a:solidFill>
-                      <a:prstDash val="solid"/>
-                      <a:round/>
-                      <a:headEnd type="none" w="med" len="med"/>
-                      <a:tailEnd type="none" w="med" len="med"/>
-                    </a:lnB>
-                  </a:tcPr>
-                </a:tc>
-                <a:tc>
-                  <a:txBody>
-                    <a:bodyPr/>
-                    <a:lstStyle/>
-                    <a:p>
-                      <a:pPr algn="l" latinLnBrk="0">
-                        <a:lnSpc>
-                          <a:spcPct val="150000"/>
-                        </a:lnSpc>
-                      </a:pPr>
-                      <a:r>
-                        <a:rPr lang="en-US" sz="1600" b="0" dirty="0">
-                          <a:latin typeface="+mn-lt"/>
-                          <a:cs typeface="Arial" panose="020B0604020202020204" pitchFamily="34" charset="0"/>
-                        </a:rPr>
-                        <a:t>Medium</a:t>
-                      </a:r>
-                    </a:p>
-                  </a:txBody>
-                  <a:tcPr marL="106700" marR="106700" marT="53350" marB="53350" anchor="ctr">
-                    <a:lnL w="12700" cap="flat" cmpd="sng" algn="ctr">
-                      <a:solidFill>
-                        <a:schemeClr val="tx1"/>
-                      </a:solidFill>
-                      <a:prstDash val="solid"/>
-                      <a:round/>
-                      <a:headEnd type="none" w="med" len="med"/>
-                      <a:tailEnd type="none" w="med" len="med"/>
-                    </a:lnL>
-                    <a:lnR w="12700" cap="flat" cmpd="sng" algn="ctr">
-                      <a:solidFill>
-                        <a:schemeClr val="tx1"/>
-                      </a:solidFill>
-                      <a:prstDash val="solid"/>
-                      <a:round/>
-                      <a:headEnd type="none" w="med" len="med"/>
-                      <a:tailEnd type="none" w="med" len="med"/>
-                    </a:lnR>
-                    <a:lnT w="12700" cap="flat" cmpd="sng" algn="ctr">
-                      <a:solidFill>
-                        <a:schemeClr val="tx1"/>
-                      </a:solidFill>
-                      <a:prstDash val="solid"/>
-                      <a:round/>
-                      <a:headEnd type="none" w="med" len="med"/>
-                      <a:tailEnd type="none" w="med" len="med"/>
-                    </a:lnT>
-                    <a:lnB w="12700" cap="flat" cmpd="sng" algn="ctr">
-                      <a:solidFill>
-                        <a:schemeClr val="tx1"/>
-                      </a:solidFill>
-                      <a:prstDash val="solid"/>
-                      <a:round/>
-                      <a:headEnd type="none" w="med" len="med"/>
-                      <a:tailEnd type="none" w="med" len="med"/>
-                    </a:lnB>
+                    <a:noFill/>
                   </a:tcPr>
                 </a:tc>
                 <a:extLst>
@@ -17728,7 +18603,7 @@
           <p:nvPr/>
         </p:nvPicPr>
         <p:blipFill>
-          <a:blip r:embed="rId2"/>
+          <a:blip r:embed="rId3"/>
           <a:stretch>
             <a:fillRect/>
           </a:stretch>
@@ -17959,7 +18834,7 @@
           <p:nvPr/>
         </p:nvPicPr>
         <p:blipFill>
-          <a:blip r:embed="rId3"/>
+          <a:blip r:embed="rId4"/>
           <a:stretch>
             <a:fillRect/>
           </a:stretch>

--- a/design/FE_phi.vu_Design of Secure Remote Diag on Container Separation Architecture_final.pptx
+++ b/design/FE_phi.vu_Design of Secure Remote Diag on Container Separation Architecture_final.pptx
@@ -545,7 +545,11 @@
             </a:r>
             <a:r>
               <a:rPr lang="en-US" baseline="0" smtClean="0"/>
-              <a:t> bật mouse laser)</a:t>
+              <a:t> bật mouse laser</a:t>
+            </a:r>
+            <a:r>
+              <a:rPr lang="en-US" baseline="0" smtClean="0"/>
+              <a:t>) + Bật CAM</a:t>
             </a:r>
             <a:endParaRPr lang="en-US" smtClean="0"/>
           </a:p>
@@ -654,7 +658,38 @@
           <a:bodyPr/>
           <a:lstStyle/>
           <a:p>
-            <a:endParaRPr lang="en-US"/>
+            <a:r>
+              <a:rPr lang="en-US" smtClean="0"/>
+              <a:t>The last alternatives is</a:t>
+            </a:r>
+            <a:r>
+              <a:rPr lang="en-US" baseline="0" smtClean="0"/>
+              <a:t> Alternative C which is an update version of Alternative B:</a:t>
+            </a:r>
+          </a:p>
+          <a:p>
+            <a:r>
+              <a:rPr lang="en-US" baseline="0" smtClean="0"/>
+              <a:t>I still move RemoteDiag into Internal container</a:t>
+            </a:r>
+          </a:p>
+          <a:p>
+            <a:r>
+              <a:rPr lang="en-US" baseline="0" smtClean="0"/>
+              <a:t>And I add a new component in EP: RemoteDiagProxy, acting as a transparent proxy.</a:t>
+            </a:r>
+          </a:p>
+          <a:p>
+            <a:r>
+              <a:rPr lang="en-US" baseline="0" smtClean="0"/>
+              <a:t>RemoteDiagProxy keeps the existing interface to communicate with other modules in EP side</a:t>
+            </a:r>
+          </a:p>
+          <a:p>
+            <a:r>
+              <a:rPr lang="en-US" baseline="0" smtClean="0"/>
+              <a:t>And it forwards requests to RemoteDiag via UDS socket channel.</a:t>
+            </a:r>
           </a:p>
         </p:txBody>
       </p:sp>
@@ -738,7 +773,212 @@
           <a:bodyPr/>
           <a:lstStyle/>
           <a:p>
-            <a:endParaRPr lang="en-US"/>
+            <a:r>
+              <a:rPr lang="en-US" smtClean="0"/>
+              <a:t>This</a:t>
+            </a:r>
+            <a:r>
+              <a:rPr lang="en-US" baseline="0" smtClean="0"/>
+              <a:t> table describe about the comparison between design alternatives.</a:t>
+            </a:r>
+          </a:p>
+          <a:p>
+            <a:endParaRPr lang="en-US" baseline="0" smtClean="0"/>
+          </a:p>
+          <a:p>
+            <a:r>
+              <a:rPr lang="en-US" baseline="0" smtClean="0"/>
+              <a:t>For filtering diagnostic commands </a:t>
+            </a:r>
+          </a:p>
+          <a:p>
+            <a:r>
+              <a:rPr lang="en-US" baseline="0" smtClean="0"/>
+              <a:t>and keep communication path between RemoteDiag and MM ECU only routes in Internal container, all of the alternatives is satisfy.</a:t>
+            </a:r>
+            <a:endParaRPr lang="en-US" baseline="0"/>
+          </a:p>
+          <a:p>
+            <a:endParaRPr lang="en-US" baseline="0"/>
+          </a:p>
+          <a:p>
+            <a:r>
+              <a:rPr lang="en-US" baseline="0" smtClean="0"/>
+              <a:t>But Alternative A is not satisfy the Modifiability – QA-three. Because it causes RemoteDiag and OnBoardClient responsibilities be changed:</a:t>
+            </a:r>
+            <a:br>
+              <a:rPr lang="en-US" baseline="0" smtClean="0"/>
+            </a:br>
+            <a:r>
+              <a:rPr lang="en-US" baseline="0" smtClean="0"/>
+              <a:t>- Diagnostic priority control is moved to OnBoardClient</a:t>
+            </a:r>
+          </a:p>
+          <a:p>
+            <a:r>
+              <a:rPr lang="en-US" baseline="0" smtClean="0"/>
+              <a:t>- And Existing RemoteDiag responsibilities are distributed across two applications.</a:t>
+            </a:r>
+          </a:p>
+          <a:p>
+            <a:pPr marL="0" indent="0">
+              <a:buFontTx/>
+              <a:buNone/>
+            </a:pPr>
+            <a:r>
+              <a:rPr lang="en-US" baseline="0" smtClean="0"/>
+              <a:t>The other alternatives keeps the core responsibilities of RemoteDiag.</a:t>
+            </a:r>
+          </a:p>
+          <a:p>
+            <a:pPr marL="0" indent="0">
+              <a:buFontTx/>
+              <a:buNone/>
+            </a:pPr>
+            <a:endParaRPr lang="en-US" baseline="0" smtClean="0"/>
+          </a:p>
+          <a:p>
+            <a:pPr marL="0" indent="0">
+              <a:buFontTx/>
+              <a:buNone/>
+            </a:pPr>
+            <a:r>
+              <a:rPr lang="en-US" baseline="0" smtClean="0"/>
+              <a:t>For the Maintainability – QA-four, Alternative B is not satisfied. About TEN modules in EP side have to implement Unix Domain Socket server to communicate with RemoteDiag then integrate with their existing code. And also, fail-safe mechanism.</a:t>
+            </a:r>
+          </a:p>
+          <a:p>
+            <a:pPr marL="0" indent="0">
+              <a:buFontTx/>
+              <a:buNone/>
+            </a:pPr>
+            <a:r>
+              <a:rPr lang="en-US" baseline="0" smtClean="0"/>
+              <a:t>Alternative A has to modify OnBoardClient to implement UDS socket server and priority control.</a:t>
+            </a:r>
+          </a:p>
+          <a:p>
+            <a:pPr marL="0" marR="0" indent="0" algn="l" defTabSz="914400" rtl="0" eaLnBrk="1" fontAlgn="auto" latinLnBrk="0" hangingPunct="1">
+              <a:lnSpc>
+                <a:spcPct val="100000"/>
+              </a:lnSpc>
+              <a:spcBef>
+                <a:spcPts val="0"/>
+              </a:spcBef>
+              <a:spcAft>
+                <a:spcPts val="0"/>
+              </a:spcAft>
+              <a:buClrTx/>
+              <a:buSzTx/>
+              <a:buFontTx/>
+              <a:buNone/>
+              <a:tabLst/>
+              <a:defRPr/>
+            </a:pPr>
+            <a:r>
+              <a:rPr lang="en-US" baseline="0" smtClean="0"/>
+              <a:t>Alternative C has to implement RemoteDiagProxy.</a:t>
+            </a:r>
+          </a:p>
+          <a:p>
+            <a:pPr marL="0" marR="0" indent="0" algn="l" defTabSz="914400" rtl="0" eaLnBrk="1" fontAlgn="auto" latinLnBrk="0" hangingPunct="1">
+              <a:lnSpc>
+                <a:spcPct val="100000"/>
+              </a:lnSpc>
+              <a:spcBef>
+                <a:spcPts val="0"/>
+              </a:spcBef>
+              <a:spcAft>
+                <a:spcPts val="0"/>
+              </a:spcAft>
+              <a:buClrTx/>
+              <a:buSzTx/>
+              <a:buFontTx/>
+              <a:buNone/>
+              <a:tabLst/>
+              <a:defRPr/>
+            </a:pPr>
+            <a:r>
+              <a:rPr lang="en-US" baseline="0" smtClean="0"/>
+              <a:t>Both Alternative A and C are partially satisfy for Maintainability.</a:t>
+            </a:r>
+          </a:p>
+          <a:p>
+            <a:pPr marL="0" marR="0" indent="0" algn="l" defTabSz="914400" rtl="0" eaLnBrk="1" fontAlgn="auto" latinLnBrk="0" hangingPunct="1">
+              <a:lnSpc>
+                <a:spcPct val="100000"/>
+              </a:lnSpc>
+              <a:spcBef>
+                <a:spcPts val="0"/>
+              </a:spcBef>
+              <a:spcAft>
+                <a:spcPts val="0"/>
+              </a:spcAft>
+              <a:buClrTx/>
+              <a:buSzTx/>
+              <a:buFontTx/>
+              <a:buNone/>
+              <a:tabLst/>
+              <a:defRPr/>
+            </a:pPr>
+            <a:endParaRPr lang="en-US" baseline="0" smtClean="0"/>
+          </a:p>
+          <a:p>
+            <a:pPr marL="0" marR="0" indent="0" algn="l" defTabSz="914400" rtl="0" eaLnBrk="1" fontAlgn="auto" latinLnBrk="0" hangingPunct="1">
+              <a:lnSpc>
+                <a:spcPct val="100000"/>
+              </a:lnSpc>
+              <a:spcBef>
+                <a:spcPts val="0"/>
+              </a:spcBef>
+              <a:spcAft>
+                <a:spcPts val="0"/>
+              </a:spcAft>
+              <a:buClrTx/>
+              <a:buSzTx/>
+              <a:buFontTx/>
+              <a:buNone/>
+              <a:tabLst/>
+              <a:defRPr/>
+            </a:pPr>
+            <a:r>
+              <a:rPr lang="en-US" baseline="0" smtClean="0"/>
+              <a:t>So, with above comparison table, I chose Alternative C as it has highest score.</a:t>
+            </a:r>
+          </a:p>
+          <a:p>
+            <a:pPr marL="0" marR="0" indent="0" algn="l" defTabSz="914400" rtl="0" eaLnBrk="1" fontAlgn="auto" latinLnBrk="0" hangingPunct="1">
+              <a:lnSpc>
+                <a:spcPct val="100000"/>
+              </a:lnSpc>
+              <a:spcBef>
+                <a:spcPts val="0"/>
+              </a:spcBef>
+              <a:spcAft>
+                <a:spcPts val="0"/>
+              </a:spcAft>
+              <a:buClrTx/>
+              <a:buSzTx/>
+              <a:buFontTx/>
+              <a:buNone/>
+              <a:tabLst/>
+              <a:defRPr/>
+            </a:pPr>
+            <a:endParaRPr lang="en-US" baseline="0" smtClean="0"/>
+          </a:p>
+          <a:p>
+            <a:pPr marL="0" indent="0">
+              <a:buFontTx/>
+              <a:buNone/>
+            </a:pPr>
+            <a:endParaRPr lang="en-US" baseline="0" smtClean="0"/>
+          </a:p>
+          <a:p>
+            <a:pPr marL="171450" indent="-171450">
+              <a:buFontTx/>
+              <a:buChar char="-"/>
+            </a:pPr>
+            <a:endParaRPr lang="en-US" baseline="0" smtClean="0"/>
           </a:p>
         </p:txBody>
       </p:sp>
@@ -822,6 +1062,24 @@
           <a:bodyPr/>
           <a:lstStyle/>
           <a:p>
+            <a:r>
+              <a:rPr lang="en-US" smtClean="0"/>
+              <a:t>For detail design, I presents</a:t>
+            </a:r>
+            <a:r>
+              <a:rPr lang="en-US" baseline="0" smtClean="0"/>
+              <a:t> here the sequence diagrams when modules in EP sides want to send messages to RemoteDiag.</a:t>
+            </a:r>
+          </a:p>
+          <a:p>
+            <a:r>
+              <a:rPr lang="en-US" smtClean="0"/>
+              <a:t>The Proxy receives</a:t>
+            </a:r>
+            <a:r>
+              <a:rPr lang="en-US" baseline="0" smtClean="0"/>
+              <a:t> then forwards the messages via UnixSocketClient class, then RemoteDiag hanldes the messages after it received from UnixSocketServer class..</a:t>
+            </a:r>
             <a:endParaRPr lang="en-US"/>
           </a:p>
         </p:txBody>
@@ -853,6 +1111,297 @@
     <p:extLst>
       <p:ext uri="{BB962C8B-B14F-4D97-AF65-F5344CB8AC3E}">
         <p14:creationId xmlns:p14="http://schemas.microsoft.com/office/powerpoint/2010/main" val="3095113047"/>
+      </p:ext>
+    </p:extLst>
+  </p:cSld>
+  <p:clrMapOvr>
+    <a:masterClrMapping/>
+  </p:clrMapOvr>
+</p:notes>
+</file>
+
+<file path=ppt/notesSlides/notesSlide13.xml><?xml version="1.0" encoding="utf-8"?>
+<p:notes xmlns:a="http://schemas.openxmlformats.org/drawingml/2006/main" xmlns:r="http://schemas.openxmlformats.org/officeDocument/2006/relationships" xmlns:p="http://schemas.openxmlformats.org/presentationml/2006/main">
+  <p:cSld>
+    <p:spTree>
+      <p:nvGrpSpPr>
+        <p:cNvPr id="1" name=""/>
+        <p:cNvGrpSpPr/>
+        <p:nvPr/>
+      </p:nvGrpSpPr>
+      <p:grpSpPr>
+        <a:xfrm>
+          <a:off x="0" y="0"/>
+          <a:ext cx="0" cy="0"/>
+          <a:chOff x="0" y="0"/>
+          <a:chExt cx="0" cy="0"/>
+        </a:xfrm>
+      </p:grpSpPr>
+      <p:sp>
+        <p:nvSpPr>
+          <p:cNvPr id="2" name="Slide Image Placeholder 1"/>
+          <p:cNvSpPr>
+            <a:spLocks noGrp="1" noRot="1" noChangeAspect="1"/>
+          </p:cNvSpPr>
+          <p:nvPr>
+            <p:ph type="sldImg"/>
+          </p:nvPr>
+        </p:nvSpPr>
+        <p:spPr/>
+      </p:sp>
+      <p:sp>
+        <p:nvSpPr>
+          <p:cNvPr id="3" name="Notes Placeholder 2"/>
+          <p:cNvSpPr>
+            <a:spLocks noGrp="1"/>
+          </p:cNvSpPr>
+          <p:nvPr>
+            <p:ph type="body" idx="1"/>
+          </p:nvPr>
+        </p:nvSpPr>
+        <p:spPr/>
+        <p:txBody>
+          <a:bodyPr/>
+          <a:lstStyle/>
+          <a:p>
+            <a:r>
+              <a:rPr lang="en-US" smtClean="0"/>
+              <a:t>This is the filter scenarios</a:t>
+            </a:r>
+            <a:r>
+              <a:rPr lang="en-US" baseline="0" smtClean="0"/>
+              <a:t> when RemoteDiag received a direct diagnostic command.</a:t>
+            </a:r>
+            <a:br>
+              <a:rPr lang="en-US" baseline="0" smtClean="0"/>
+            </a:br>
+            <a:r>
+              <a:rPr lang="en-US" baseline="0" smtClean="0"/>
+              <a:t>It will validate the Service ID from diagnostic command before allowing it to be sent to Internal CAN bus.</a:t>
+            </a:r>
+            <a:endParaRPr lang="en-US"/>
+          </a:p>
+        </p:txBody>
+      </p:sp>
+      <p:sp>
+        <p:nvSpPr>
+          <p:cNvPr id="4" name="Slide Number Placeholder 3"/>
+          <p:cNvSpPr>
+            <a:spLocks noGrp="1"/>
+          </p:cNvSpPr>
+          <p:nvPr>
+            <p:ph type="sldNum" sz="quarter" idx="10"/>
+          </p:nvPr>
+        </p:nvSpPr>
+        <p:spPr/>
+        <p:txBody>
+          <a:bodyPr/>
+          <a:lstStyle/>
+          <a:p>
+            <a:fld id="{EF277405-33BD-42BD-B604-93760E4185DC}" type="slidenum">
+              <a:rPr lang="en-US" smtClean="0"/>
+              <a:t>13</a:t>
+            </a:fld>
+            <a:endParaRPr lang="en-US"/>
+          </a:p>
+        </p:txBody>
+      </p:sp>
+    </p:spTree>
+    <p:extLst>
+      <p:ext uri="{BB962C8B-B14F-4D97-AF65-F5344CB8AC3E}">
+        <p14:creationId xmlns:p14="http://schemas.microsoft.com/office/powerpoint/2010/main" val="2240593343"/>
+      </p:ext>
+    </p:extLst>
+  </p:cSld>
+  <p:clrMapOvr>
+    <a:masterClrMapping/>
+  </p:clrMapOvr>
+</p:notes>
+</file>
+
+<file path=ppt/notesSlides/notesSlide14.xml><?xml version="1.0" encoding="utf-8"?>
+<p:notes xmlns:a="http://schemas.openxmlformats.org/drawingml/2006/main" xmlns:r="http://schemas.openxmlformats.org/officeDocument/2006/relationships" xmlns:p="http://schemas.openxmlformats.org/presentationml/2006/main">
+  <p:cSld>
+    <p:spTree>
+      <p:nvGrpSpPr>
+        <p:cNvPr id="1" name=""/>
+        <p:cNvGrpSpPr/>
+        <p:nvPr/>
+      </p:nvGrpSpPr>
+      <p:grpSpPr>
+        <a:xfrm>
+          <a:off x="0" y="0"/>
+          <a:ext cx="0" cy="0"/>
+          <a:chOff x="0" y="0"/>
+          <a:chExt cx="0" cy="0"/>
+        </a:xfrm>
+      </p:grpSpPr>
+      <p:sp>
+        <p:nvSpPr>
+          <p:cNvPr id="2" name="Slide Image Placeholder 1"/>
+          <p:cNvSpPr>
+            <a:spLocks noGrp="1" noRot="1" noChangeAspect="1"/>
+          </p:cNvSpPr>
+          <p:nvPr>
+            <p:ph type="sldImg"/>
+          </p:nvPr>
+        </p:nvSpPr>
+        <p:spPr/>
+      </p:sp>
+      <p:sp>
+        <p:nvSpPr>
+          <p:cNvPr id="3" name="Notes Placeholder 2"/>
+          <p:cNvSpPr>
+            <a:spLocks noGrp="1"/>
+          </p:cNvSpPr>
+          <p:nvPr>
+            <p:ph type="body" idx="1"/>
+          </p:nvPr>
+        </p:nvSpPr>
+        <p:spPr/>
+        <p:txBody>
+          <a:bodyPr/>
+          <a:lstStyle/>
+          <a:p>
+            <a:endParaRPr lang="en-US"/>
+          </a:p>
+        </p:txBody>
+      </p:sp>
+      <p:sp>
+        <p:nvSpPr>
+          <p:cNvPr id="4" name="Slide Number Placeholder 3"/>
+          <p:cNvSpPr>
+            <a:spLocks noGrp="1"/>
+          </p:cNvSpPr>
+          <p:nvPr>
+            <p:ph type="sldNum" sz="quarter" idx="10"/>
+          </p:nvPr>
+        </p:nvSpPr>
+        <p:spPr/>
+        <p:txBody>
+          <a:bodyPr/>
+          <a:lstStyle/>
+          <a:p>
+            <a:fld id="{EF277405-33BD-42BD-B604-93760E4185DC}" type="slidenum">
+              <a:rPr lang="en-US" smtClean="0"/>
+              <a:t>14</a:t>
+            </a:fld>
+            <a:endParaRPr lang="en-US"/>
+          </a:p>
+        </p:txBody>
+      </p:sp>
+    </p:spTree>
+    <p:extLst>
+      <p:ext uri="{BB962C8B-B14F-4D97-AF65-F5344CB8AC3E}">
+        <p14:creationId xmlns:p14="http://schemas.microsoft.com/office/powerpoint/2010/main" val="2903109790"/>
+      </p:ext>
+    </p:extLst>
+  </p:cSld>
+  <p:clrMapOvr>
+    <a:masterClrMapping/>
+  </p:clrMapOvr>
+</p:notes>
+</file>
+
+<file path=ppt/notesSlides/notesSlide15.xml><?xml version="1.0" encoding="utf-8"?>
+<p:notes xmlns:a="http://schemas.openxmlformats.org/drawingml/2006/main" xmlns:r="http://schemas.openxmlformats.org/officeDocument/2006/relationships" xmlns:p="http://schemas.openxmlformats.org/presentationml/2006/main">
+  <p:cSld>
+    <p:spTree>
+      <p:nvGrpSpPr>
+        <p:cNvPr id="1" name=""/>
+        <p:cNvGrpSpPr/>
+        <p:nvPr/>
+      </p:nvGrpSpPr>
+      <p:grpSpPr>
+        <a:xfrm>
+          <a:off x="0" y="0"/>
+          <a:ext cx="0" cy="0"/>
+          <a:chOff x="0" y="0"/>
+          <a:chExt cx="0" cy="0"/>
+        </a:xfrm>
+      </p:grpSpPr>
+      <p:sp>
+        <p:nvSpPr>
+          <p:cNvPr id="2" name="Slide Image Placeholder 1"/>
+          <p:cNvSpPr>
+            <a:spLocks noGrp="1" noRot="1" noChangeAspect="1"/>
+          </p:cNvSpPr>
+          <p:nvPr>
+            <p:ph type="sldImg"/>
+          </p:nvPr>
+        </p:nvSpPr>
+        <p:spPr/>
+      </p:sp>
+      <p:sp>
+        <p:nvSpPr>
+          <p:cNvPr id="3" name="Notes Placeholder 2"/>
+          <p:cNvSpPr>
+            <a:spLocks noGrp="1"/>
+          </p:cNvSpPr>
+          <p:nvPr>
+            <p:ph type="body" idx="1"/>
+          </p:nvPr>
+        </p:nvSpPr>
+        <p:spPr/>
+        <p:txBody>
+          <a:bodyPr/>
+          <a:lstStyle/>
+          <a:p>
+            <a:r>
+              <a:rPr lang="en-US" smtClean="0"/>
+              <a:t>That’s all.</a:t>
+            </a:r>
+            <a:r>
+              <a:rPr lang="en-US" baseline="0" smtClean="0"/>
+              <a:t> If you have any question please tellme</a:t>
+            </a:r>
+          </a:p>
+          <a:p>
+            <a:endParaRPr lang="en-US" baseline="0" smtClean="0"/>
+          </a:p>
+          <a:p>
+            <a:r>
+              <a:rPr lang="en-US" baseline="0" smtClean="0"/>
+              <a:t>I would like to say Thank you to the judges for listening for my FE presentation</a:t>
+            </a:r>
+            <a:br>
+              <a:rPr lang="en-US" baseline="0" smtClean="0"/>
+            </a:br>
+            <a:r>
+              <a:rPr lang="en-US" baseline="0" smtClean="0"/>
+              <a:t>and I appreciate the support from my mentors Mr. Bu yong kim.</a:t>
+            </a:r>
+            <a:endParaRPr lang="en-US"/>
+          </a:p>
+        </p:txBody>
+      </p:sp>
+      <p:sp>
+        <p:nvSpPr>
+          <p:cNvPr id="4" name="Slide Number Placeholder 3"/>
+          <p:cNvSpPr>
+            <a:spLocks noGrp="1"/>
+          </p:cNvSpPr>
+          <p:nvPr>
+            <p:ph type="sldNum" sz="quarter" idx="10"/>
+          </p:nvPr>
+        </p:nvSpPr>
+        <p:spPr/>
+        <p:txBody>
+          <a:bodyPr/>
+          <a:lstStyle/>
+          <a:p>
+            <a:fld id="{EF277405-33BD-42BD-B604-93760E4185DC}" type="slidenum">
+              <a:rPr lang="en-US" smtClean="0"/>
+              <a:t>16</a:t>
+            </a:fld>
+            <a:endParaRPr lang="en-US"/>
+          </a:p>
+        </p:txBody>
+      </p:sp>
+    </p:spTree>
+    <p:extLst>
+      <p:ext uri="{BB962C8B-B14F-4D97-AF65-F5344CB8AC3E}">
+        <p14:creationId xmlns:p14="http://schemas.microsoft.com/office/powerpoint/2010/main" val="621375840"/>
       </p:ext>
     </p:extLst>
   </p:cSld>
@@ -920,8 +1469,13 @@
             </a:r>
             <a:r>
               <a:rPr lang="en-US" baseline="0" smtClean="0"/>
-              <a:t> sections as you can see in the monitor.</a:t>
-            </a:r>
+              <a:t> sections as you can see in the </a:t>
+            </a:r>
+            <a:r>
+              <a:rPr lang="en-US" baseline="0" smtClean="0"/>
+              <a:t>slide.</a:t>
+            </a:r>
+            <a:endParaRPr lang="en-US" baseline="0" smtClean="0"/>
           </a:p>
           <a:p>
             <a:r>
@@ -976,7 +1530,7 @@
         <p:cNvPr id="1" name="">
           <a:extLst>
             <a:ext uri="{FF2B5EF4-FFF2-40B4-BE49-F238E27FC236}">
-              <a16:creationId xmlns:a16="http://schemas.microsoft.com/office/drawing/2014/main" xmlns="" id="{7871B573-D46B-DD18-A2C4-C4082199D6A7}"/>
+              <a16:creationId xmlns="" xmlns:a16="http://schemas.microsoft.com/office/drawing/2014/main" id="{7871B573-D46B-DD18-A2C4-C4082199D6A7}"/>
             </a:ext>
           </a:extLst>
         </p:cNvPr>
@@ -996,7 +1550,7 @@
           <p:cNvPr id="2" name="Slide Image Placeholder 1">
             <a:extLst>
               <a:ext uri="{FF2B5EF4-FFF2-40B4-BE49-F238E27FC236}">
-                <a16:creationId xmlns:a16="http://schemas.microsoft.com/office/drawing/2014/main" xmlns="" id="{F16CD46A-A877-3DE1-9984-1B961658209F}"/>
+                <a16:creationId xmlns="" xmlns:a16="http://schemas.microsoft.com/office/drawing/2014/main" id="{F16CD46A-A877-3DE1-9984-1B961658209F}"/>
               </a:ext>
             </a:extLst>
           </p:cNvPr>
@@ -1014,7 +1568,7 @@
           <p:cNvPr id="3" name="Notes Placeholder 2">
             <a:extLst>
               <a:ext uri="{FF2B5EF4-FFF2-40B4-BE49-F238E27FC236}">
-                <a16:creationId xmlns:a16="http://schemas.microsoft.com/office/drawing/2014/main" xmlns="" id="{3CAC9709-5C79-D782-6C8E-2BC9A65C8D0F}"/>
+                <a16:creationId xmlns="" xmlns:a16="http://schemas.microsoft.com/office/drawing/2014/main" id="{3CAC9709-5C79-D782-6C8E-2BC9A65C8D0F}"/>
               </a:ext>
             </a:extLst>
           </p:cNvPr>
@@ -1074,7 +1628,7 @@
           <p:cNvPr id="4" name="Slide Number Placeholder 3">
             <a:extLst>
               <a:ext uri="{FF2B5EF4-FFF2-40B4-BE49-F238E27FC236}">
-                <a16:creationId xmlns:a16="http://schemas.microsoft.com/office/drawing/2014/main" xmlns="" id="{CA1C9B43-13E9-E1D6-156A-5CB894C64FDE}"/>
+                <a16:creationId xmlns="" xmlns:a16="http://schemas.microsoft.com/office/drawing/2014/main" id="{CA1C9B43-13E9-E1D6-156A-5CB894C64FDE}"/>
               </a:ext>
             </a:extLst>
           </p:cNvPr>
@@ -1287,8 +1841,29 @@
                 <a:ea typeface="+mn-ea"/>
                 <a:cs typeface="+mn-cs"/>
               </a:rPr>
-              <a:t> up with a solution: Separate the DCM architecture into two partitions using LXC containers:</a:t>
-            </a:r>
+              <a:t> up with a solution: Separate the DCM architecture into two partitions using </a:t>
+            </a:r>
+            <a:r>
+              <a:rPr lang="en-US" sz="1200" b="0" i="0" kern="1200" baseline="0" smtClean="0">
+                <a:solidFill>
+                  <a:schemeClr val="tx1"/>
+                </a:solidFill>
+                <a:effectLst/>
+                <a:latin typeface="+mn-lt"/>
+                <a:ea typeface="+mn-ea"/>
+                <a:cs typeface="+mn-cs"/>
+              </a:rPr>
+              <a:t>Linux container technology:</a:t>
+            </a:r>
+            <a:endParaRPr lang="en-US" sz="1200" b="0" i="0" kern="1200" baseline="0" smtClean="0">
+              <a:solidFill>
+                <a:schemeClr val="tx1"/>
+              </a:solidFill>
+              <a:effectLst/>
+              <a:latin typeface="+mn-lt"/>
+              <a:ea typeface="+mn-ea"/>
+              <a:cs typeface="+mn-cs"/>
+            </a:endParaRPr>
           </a:p>
           <a:p>
             <a:pPr marL="171450" indent="-171450">
@@ -1452,13 +2027,31 @@
           <a:p>
             <a:r>
               <a:rPr lang="en-US" baseline="0" smtClean="0"/>
-              <a:t>And The other one with the MM ECU (the pink flow), for OTA updates.</a:t>
-            </a:r>
+              <a:t>And The other one with the MM ECU (the pink flow), for OTA updates</a:t>
+            </a:r>
+            <a:r>
+              <a:rPr lang="en-US" baseline="0" smtClean="0"/>
+              <a:t>.</a:t>
+            </a:r>
+          </a:p>
+          <a:p>
+            <a:r>
+              <a:rPr lang="en-US" baseline="0" smtClean="0"/>
+              <a:t>Then, the diagnostic commands will be sent to OnBoardClient then go to Internal CAN bus.</a:t>
+            </a:r>
+            <a:endParaRPr lang="en-US" baseline="0" smtClean="0"/>
+          </a:p>
+          <a:p>
+            <a:endParaRPr lang="en-US" smtClean="0"/>
           </a:p>
           <a:p>
             <a:r>
               <a:rPr lang="en-US" smtClean="0"/>
-              <a:t>However,</a:t>
+              <a:t>However</a:t>
+            </a:r>
+            <a:r>
+              <a:rPr lang="en-US" smtClean="0"/>
+              <a:t>,</a:t>
             </a:r>
             <a:r>
               <a:rPr lang="en-US" baseline="0" smtClean="0"/>
@@ -1726,8 +2319,20 @@
             </a:r>
             <a:r>
               <a:rPr lang="en-US" baseline="0" smtClean="0"/>
-              <a:t> is the quality attribute table which I’m concerning.</a:t>
-            </a:r>
+              <a:t> is the quality attribute table which I’m concerning</a:t>
+            </a:r>
+            <a:r>
+              <a:rPr lang="en-US" baseline="0" smtClean="0"/>
+              <a:t>.</a:t>
+            </a:r>
+            <a:br>
+              <a:rPr lang="en-US" baseline="0" smtClean="0"/>
+            </a:br>
+            <a:r>
+              <a:rPr lang="en-US" baseline="0" smtClean="0"/>
+              <a:t>The table describes about QA scenarios and their measurement</a:t>
+            </a:r>
+            <a:endParaRPr lang="en-US" baseline="0" smtClean="0"/>
           </a:p>
           <a:p>
             <a:r>
@@ -1818,6 +2423,79 @@
           <a:bodyPr/>
           <a:lstStyle/>
           <a:p>
+            <a:r>
+              <a:rPr lang="en-US" smtClean="0"/>
+              <a:t>To satisfy</a:t>
+            </a:r>
+            <a:r>
+              <a:rPr lang="en-US" baseline="0" smtClean="0"/>
+              <a:t> OEM security requirements, </a:t>
+            </a:r>
+            <a:r>
+              <a:rPr lang="en-US" smtClean="0"/>
+              <a:t>I</a:t>
+            </a:r>
+            <a:r>
+              <a:rPr lang="en-US" baseline="0" smtClean="0"/>
+              <a:t> will come up with 3 design alternatives.</a:t>
+            </a:r>
+          </a:p>
+          <a:p>
+            <a:r>
+              <a:rPr lang="en-US" baseline="0" smtClean="0"/>
+              <a:t>As shown in the slide, this is the first alternatives: Alternative A: Split RemoteDiag.</a:t>
+            </a:r>
+          </a:p>
+          <a:p>
+            <a:endParaRPr lang="en-US" baseline="0" smtClean="0"/>
+          </a:p>
+          <a:p>
+            <a:r>
+              <a:rPr lang="en-US" baseline="0" smtClean="0"/>
+              <a:t>This design will separate RemoteDiag responsibilities into 2 applications:</a:t>
+            </a:r>
+            <a:br>
+              <a:rPr lang="en-US" baseline="0" smtClean="0"/>
+            </a:br>
+            <a:r>
+              <a:rPr lang="en-US" baseline="0" smtClean="0"/>
+              <a:t>- RemoteDiag locates in EP container to handle diagnostic commands from OEM server.</a:t>
+            </a:r>
+          </a:p>
+          <a:p>
+            <a:r>
+              <a:rPr lang="en-US" baseline="0" smtClean="0"/>
+              <a:t>- RemoteOTA locates in Internal container to handle OTA commands from MM ECU.</a:t>
+            </a:r>
+          </a:p>
+          <a:p>
+            <a:pPr marL="0" indent="0">
+              <a:buFontTx/>
+              <a:buNone/>
+            </a:pPr>
+            <a:r>
+              <a:rPr lang="en-US" baseline="0" smtClean="0"/>
+              <a:t>- As a result, OnBoardClient is responsible for filtering the reprogramming messages and diagnostic priority control</a:t>
+            </a:r>
+          </a:p>
+          <a:p>
+            <a:endParaRPr lang="en-US" smtClean="0"/>
+          </a:p>
+          <a:p>
+            <a:r>
+              <a:rPr lang="en-US" smtClean="0"/>
+              <a:t>The RemoteOTA</a:t>
+            </a:r>
+            <a:r>
+              <a:rPr lang="en-US" baseline="0" smtClean="0"/>
+              <a:t> stay in the same Internal container with OnBoardClient, then they can keep the communication path like RemoteDiag before via binder.</a:t>
+            </a:r>
+          </a:p>
+          <a:p>
+            <a:r>
+              <a:rPr lang="en-US" baseline="0" smtClean="0"/>
+              <a:t>But for RemoteDiag, it will have to create an Unix Domain Socket communication for cross container.</a:t>
+            </a:r>
             <a:endParaRPr lang="en-US"/>
           </a:p>
         </p:txBody>
@@ -1902,45 +2580,31 @@
           <a:bodyPr/>
           <a:lstStyle/>
           <a:p>
-            <a:pPr fontAlgn="t"/>
-            <a:r>
-              <a:rPr lang="en-US" sz="1200" b="1" i="0" kern="1200">
-                <a:solidFill>
-                  <a:schemeClr val="tx1"/>
-                </a:solidFill>
-                <a:effectLst/>
-                <a:latin typeface="+mn-lt"/>
-                <a:ea typeface="+mn-ea"/>
-                <a:cs typeface="+mn-cs"/>
-              </a:rPr>
-              <a:t>Trade-offs</a:t>
-            </a:r>
-          </a:p>
-          <a:p>
-            <a:pPr fontAlgn="t"/>
-            <a:r>
-              <a:rPr lang="en-US" sz="1200" b="1" i="0" kern="1200">
-                <a:solidFill>
-                  <a:schemeClr val="tx1"/>
-                </a:solidFill>
-                <a:effectLst/>
-                <a:latin typeface="+mn-lt"/>
-                <a:ea typeface="+mn-ea"/>
-                <a:cs typeface="+mn-cs"/>
-              </a:rPr>
-              <a:t>Maintainability:</a:t>
-            </a:r>
-            <a:r>
-              <a:rPr lang="en-US" sz="1200" b="0" i="0" kern="1200">
-                <a:solidFill>
-                  <a:schemeClr val="tx1"/>
-                </a:solidFill>
-                <a:effectLst/>
-                <a:latin typeface="+mn-lt"/>
-                <a:ea typeface="+mn-ea"/>
-                <a:cs typeface="+mn-cs"/>
-              </a:rPr>
-              <a:t> All EP modules require cross-container IPC support, increasing implementation effort and code-change scope.</a:t>
+            <a:r>
+              <a:rPr lang="en-US" smtClean="0"/>
+              <a:t>The</a:t>
+            </a:r>
+            <a:r>
+              <a:rPr lang="en-US" baseline="0" smtClean="0"/>
+              <a:t> next is Alternative B: Move RemoteDiag</a:t>
+            </a:r>
+          </a:p>
+          <a:p>
+            <a:r>
+              <a:rPr lang="en-US" baseline="0" smtClean="0"/>
+              <a:t>With this design, I move the RemoteDiag into Internal container.</a:t>
+            </a:r>
+          </a:p>
+          <a:p>
+            <a:r>
+              <a:rPr lang="en-US" baseline="0" smtClean="0"/>
+              <a:t>To communicate with Other modules in EP sides, I have to create UDS socket connection between RemoteDiag and those modules.</a:t>
+            </a:r>
+          </a:p>
+          <a:p>
+            <a:r>
+              <a:rPr lang="en-US" baseline="0" smtClean="0"/>
+              <a:t>This requires other modules in EP sides to change to implement UDS socket server.</a:t>
             </a:r>
           </a:p>
           <a:p>
@@ -2706,7 +3370,7 @@
           <p:cNvPr id="7" name="그림 5" descr="백색바탕.png">
             <a:extLst>
               <a:ext uri="{FF2B5EF4-FFF2-40B4-BE49-F238E27FC236}">
-                <a16:creationId xmlns:a16="http://schemas.microsoft.com/office/drawing/2014/main" xmlns="" id="{28873918-42A2-05FA-4A84-F17869DE34CF}"/>
+                <a16:creationId xmlns="" xmlns:a16="http://schemas.microsoft.com/office/drawing/2014/main" id="{28873918-42A2-05FA-4A84-F17869DE34CF}"/>
               </a:ext>
             </a:extLst>
           </p:cNvPr>
@@ -4590,7 +5254,7 @@
           <p:cNvPr id="8" name="TextBox 7">
             <a:extLst>
               <a:ext uri="{FF2B5EF4-FFF2-40B4-BE49-F238E27FC236}">
-                <a16:creationId xmlns:a16="http://schemas.microsoft.com/office/drawing/2014/main" xmlns="" id="{7DC87BF5-B759-FAAB-FE6D-F0E5F640800D}"/>
+                <a16:creationId xmlns="" xmlns:a16="http://schemas.microsoft.com/office/drawing/2014/main" id="{7DC87BF5-B759-FAAB-FE6D-F0E5F640800D}"/>
               </a:ext>
             </a:extLst>
           </p:cNvPr>
@@ -4598,7 +5262,7 @@
           <p:nvPr userDrawn="1">
             <p:extLst>
               <p:ext uri="{1162E1C5-73C7-4A58-AE30-91384D911F3F}">
-                <p184:classification xmlns:p184="http://schemas.microsoft.com/office/powerpoint/2018/4/main" xmlns="" val="hdr"/>
+                <p184:classification xmlns="" xmlns:p184="http://schemas.microsoft.com/office/powerpoint/2018/4/main" val="hdr"/>
               </p:ext>
             </p:extLst>
           </p:nvPr>
@@ -5021,7 +5685,19 @@
           <a:p>
             <a:r>
               <a:rPr lang="en-US"/>
-              <a:t>LGEDV – September 2026</a:t>
+              <a:t>LGEDV – </a:t>
+            </a:r>
+            <a:r>
+              <a:rPr lang="en-US" smtClean="0"/>
+              <a:t>October</a:t>
+            </a:r>
+            <a:r>
+              <a:rPr lang="en-US" smtClean="0"/>
+              <a:t> </a:t>
+            </a:r>
+            <a:r>
+              <a:rPr lang="en-US"/>
+              <a:t>2026</a:t>
             </a:r>
           </a:p>
           <a:p>
@@ -5063,7 +5739,7 @@
         <p:cNvPr id="1" name="">
           <a:extLst>
             <a:ext uri="{FF2B5EF4-FFF2-40B4-BE49-F238E27FC236}">
-              <a16:creationId xmlns:a16="http://schemas.microsoft.com/office/drawing/2014/main" xmlns="" id="{7A3A9F39-394E-5437-993F-29D2F2093B00}"/>
+              <a16:creationId xmlns="" xmlns:a16="http://schemas.microsoft.com/office/drawing/2014/main" id="{7A3A9F39-394E-5437-993F-29D2F2093B00}"/>
             </a:ext>
           </a:extLst>
         </p:cNvPr>
@@ -5083,7 +5759,7 @@
           <p:cNvPr id="13" name="Picture 12">
             <a:extLst>
               <a:ext uri="{FF2B5EF4-FFF2-40B4-BE49-F238E27FC236}">
-                <a16:creationId xmlns:a16="http://schemas.microsoft.com/office/drawing/2014/main" xmlns="" id="{D51D2743-5B87-CC81-8D97-271314E9E8B1}"/>
+                <a16:creationId xmlns="" xmlns:a16="http://schemas.microsoft.com/office/drawing/2014/main" id="{D51D2743-5B87-CC81-8D97-271314E9E8B1}"/>
               </a:ext>
             </a:extLst>
           </p:cNvPr>
@@ -5113,7 +5789,7 @@
           <p:cNvPr id="2" name="Title 1">
             <a:extLst>
               <a:ext uri="{FF2B5EF4-FFF2-40B4-BE49-F238E27FC236}">
-                <a16:creationId xmlns:a16="http://schemas.microsoft.com/office/drawing/2014/main" xmlns="" id="{554F77EA-2B30-AFDC-1349-3C58C2AB9061}"/>
+                <a16:creationId xmlns="" xmlns:a16="http://schemas.microsoft.com/office/drawing/2014/main" id="{554F77EA-2B30-AFDC-1349-3C58C2AB9061}"/>
               </a:ext>
             </a:extLst>
           </p:cNvPr>
@@ -5149,7 +5825,7 @@
           <p:cNvPr id="3" name="Content Placeholder 2">
             <a:extLst>
               <a:ext uri="{FF2B5EF4-FFF2-40B4-BE49-F238E27FC236}">
-                <a16:creationId xmlns:a16="http://schemas.microsoft.com/office/drawing/2014/main" xmlns="" id="{64FB7A4A-CF56-C0BD-9AB9-923B2D043291}"/>
+                <a16:creationId xmlns="" xmlns:a16="http://schemas.microsoft.com/office/drawing/2014/main" id="{64FB7A4A-CF56-C0BD-9AB9-923B2D043291}"/>
               </a:ext>
             </a:extLst>
           </p:cNvPr>
@@ -5182,7 +5858,19 @@
             </a:r>
             <a:r>
               <a:rPr lang="en-US" sz="1800" dirty="0"/>
-              <a:t> into the IP container.</a:t>
+              <a:t> into </a:t>
+            </a:r>
+            <a:r>
+              <a:rPr lang="en-US" sz="1800"/>
+              <a:t>the </a:t>
+            </a:r>
+            <a:r>
+              <a:rPr lang="en-US" sz="1800" smtClean="0"/>
+              <a:t>Internal </a:t>
+            </a:r>
+            <a:r>
+              <a:rPr lang="en-US" sz="1800" dirty="0"/>
+              <a:t>container.</a:t>
             </a:r>
           </a:p>
           <a:p>
@@ -5223,8 +5911,16 @@
           </a:p>
           <a:p>
             <a:r>
+              <a:rPr lang="en-US" sz="1800" b="1"/>
+              <a:t>RemoteDiagProxy </a:t>
+            </a:r>
+            <a:r>
+              <a:rPr lang="en-US" sz="1800" smtClean="0"/>
+              <a:t>forwards </a:t>
+            </a:r>
+            <a:r>
               <a:rPr lang="en-US" sz="1800" dirty="0"/>
-              <a:t>RDP forwards requests to </a:t>
+              <a:t>requests to </a:t>
             </a:r>
             <a:r>
               <a:rPr lang="en-US" sz="1800" dirty="0" err="1"/>
@@ -5246,7 +5942,7 @@
           <p:cNvPr id="11" name="Picture 10">
             <a:extLst>
               <a:ext uri="{FF2B5EF4-FFF2-40B4-BE49-F238E27FC236}">
-                <a16:creationId xmlns:a16="http://schemas.microsoft.com/office/drawing/2014/main" xmlns="" id="{B0A483E6-6ECF-F5F2-5FFC-55A9FD629F07}"/>
+                <a16:creationId xmlns="" xmlns:a16="http://schemas.microsoft.com/office/drawing/2014/main" id="{B0A483E6-6ECF-F5F2-5FFC-55A9FD629F07}"/>
               </a:ext>
             </a:extLst>
           </p:cNvPr>
@@ -5276,7 +5972,7 @@
           <p:cNvPr id="15" name="TextBox 14">
             <a:extLst>
               <a:ext uri="{FF2B5EF4-FFF2-40B4-BE49-F238E27FC236}">
-                <a16:creationId xmlns:a16="http://schemas.microsoft.com/office/drawing/2014/main" xmlns="" id="{12425196-F6FB-6F05-9DFF-490CE43C23AD}"/>
+                <a16:creationId xmlns="" xmlns:a16="http://schemas.microsoft.com/office/drawing/2014/main" id="{12425196-F6FB-6F05-9DFF-490CE43C23AD}"/>
               </a:ext>
             </a:extLst>
           </p:cNvPr>
@@ -5418,7 +6114,7 @@
           <p:cNvPr id="7" name="Table 6">
             <a:extLst>
               <a:ext uri="{FF2B5EF4-FFF2-40B4-BE49-F238E27FC236}">
-                <a16:creationId xmlns:a16="http://schemas.microsoft.com/office/drawing/2014/main" xmlns="" id="{6C8AAA51-C203-CD8B-4B02-DE7401134C21}"/>
+                <a16:creationId xmlns="" xmlns:a16="http://schemas.microsoft.com/office/drawing/2014/main" id="{6C8AAA51-C203-CD8B-4B02-DE7401134C21}"/>
               </a:ext>
             </a:extLst>
           </p:cNvPr>
@@ -5447,28 +6143,28 @@
                 <a:gridCol w="1149790">
                   <a:extLst>
                     <a:ext uri="{9D8B030D-6E8A-4147-A177-3AD203B41FA5}">
-                      <a16:colId xmlns:a16="http://schemas.microsoft.com/office/drawing/2014/main" xmlns="" val="20000"/>
+                      <a16:colId xmlns="" xmlns:a16="http://schemas.microsoft.com/office/drawing/2014/main" val="20000"/>
                     </a:ext>
                   </a:extLst>
                 </a:gridCol>
                 <a:gridCol w="3648546">
                   <a:extLst>
                     <a:ext uri="{9D8B030D-6E8A-4147-A177-3AD203B41FA5}">
-                      <a16:colId xmlns:a16="http://schemas.microsoft.com/office/drawing/2014/main" xmlns="" val="20001"/>
+                      <a16:colId xmlns="" xmlns:a16="http://schemas.microsoft.com/office/drawing/2014/main" val="20001"/>
                     </a:ext>
                   </a:extLst>
                 </a:gridCol>
                 <a:gridCol w="3440317">
                   <a:extLst>
                     <a:ext uri="{9D8B030D-6E8A-4147-A177-3AD203B41FA5}">
-                      <a16:colId xmlns:a16="http://schemas.microsoft.com/office/drawing/2014/main" xmlns="" val="2530683369"/>
+                      <a16:colId xmlns="" xmlns:a16="http://schemas.microsoft.com/office/drawing/2014/main" val="2530683369"/>
                     </a:ext>
                   </a:extLst>
                 </a:gridCol>
                 <a:gridCol w="3811508">
                   <a:extLst>
                     <a:ext uri="{9D8B030D-6E8A-4147-A177-3AD203B41FA5}">
-                      <a16:colId xmlns:a16="http://schemas.microsoft.com/office/drawing/2014/main" xmlns="" val="20002"/>
+                      <a16:colId xmlns="" xmlns:a16="http://schemas.microsoft.com/office/drawing/2014/main" val="20002"/>
                     </a:ext>
                   </a:extLst>
                 </a:gridCol>
@@ -5807,7 +6503,7 @@
                 </a:tc>
                 <a:extLst>
                   <a:ext uri="{0D108BD9-81ED-4DB2-BD59-A6C34878D82A}">
-                    <a16:rowId xmlns:a16="http://schemas.microsoft.com/office/drawing/2014/main" xmlns="" val="10000"/>
+                    <a16:rowId xmlns="" xmlns:a16="http://schemas.microsoft.com/office/drawing/2014/main" val="10000"/>
                   </a:ext>
                 </a:extLst>
               </a:tr>
@@ -6262,7 +6958,7 @@
                 </a:tc>
                 <a:extLst>
                   <a:ext uri="{0D108BD9-81ED-4DB2-BD59-A6C34878D82A}">
-                    <a16:rowId xmlns:a16="http://schemas.microsoft.com/office/drawing/2014/main" xmlns="" val="10001"/>
+                    <a16:rowId xmlns="" xmlns:a16="http://schemas.microsoft.com/office/drawing/2014/main" val="10001"/>
                   </a:ext>
                 </a:extLst>
               </a:tr>
@@ -6711,7 +7407,7 @@
                 </a:tc>
                 <a:extLst>
                   <a:ext uri="{0D108BD9-81ED-4DB2-BD59-A6C34878D82A}">
-                    <a16:rowId xmlns:a16="http://schemas.microsoft.com/office/drawing/2014/main" xmlns="" val="10002"/>
+                    <a16:rowId xmlns="" xmlns:a16="http://schemas.microsoft.com/office/drawing/2014/main" val="10002"/>
                   </a:ext>
                 </a:extLst>
               </a:tr>
@@ -7300,7 +7996,7 @@
                 </a:tc>
                 <a:extLst>
                   <a:ext uri="{0D108BD9-81ED-4DB2-BD59-A6C34878D82A}">
-                    <a16:rowId xmlns:a16="http://schemas.microsoft.com/office/drawing/2014/main" xmlns="" val="10003"/>
+                    <a16:rowId xmlns="" xmlns:a16="http://schemas.microsoft.com/office/drawing/2014/main" val="10003"/>
                   </a:ext>
                 </a:extLst>
               </a:tr>
@@ -7834,7 +8530,7 @@
                 </a:tc>
                 <a:extLst>
                   <a:ext uri="{0D108BD9-81ED-4DB2-BD59-A6C34878D82A}">
-                    <a16:rowId xmlns:a16="http://schemas.microsoft.com/office/drawing/2014/main" xmlns="" val="10004"/>
+                    <a16:rowId xmlns="" xmlns:a16="http://schemas.microsoft.com/office/drawing/2014/main" val="10004"/>
                   </a:ext>
                 </a:extLst>
               </a:tr>
@@ -8110,7 +8806,7 @@
                 </a:tc>
                 <a:extLst>
                   <a:ext uri="{0D108BD9-81ED-4DB2-BD59-A6C34878D82A}">
-                    <a16:rowId xmlns:a16="http://schemas.microsoft.com/office/drawing/2014/main" xmlns="" val="10006"/>
+                    <a16:rowId xmlns="" xmlns:a16="http://schemas.microsoft.com/office/drawing/2014/main" val="10006"/>
                   </a:ext>
                 </a:extLst>
               </a:tr>
@@ -8193,7 +8889,7 @@
           <p:cNvPr id="9" name="Picture 2" descr="체크 표시 클립 아트. 무료 다운로드. | Creazilla">
             <a:extLst>
               <a:ext uri="{FF2B5EF4-FFF2-40B4-BE49-F238E27FC236}">
-                <a16:creationId xmlns:a16="http://schemas.microsoft.com/office/drawing/2014/main" xmlns="" id="{07DB846E-8DD2-9BB2-88FF-8A7E0BD6CA84}"/>
+                <a16:creationId xmlns="" xmlns:a16="http://schemas.microsoft.com/office/drawing/2014/main" id="{07DB846E-8DD2-9BB2-88FF-8A7E0BD6CA84}"/>
               </a:ext>
             </a:extLst>
           </p:cNvPr>
@@ -8277,7 +8973,7 @@
           <p:cNvPr id="2" name="Title 1">
             <a:extLst>
               <a:ext uri="{FF2B5EF4-FFF2-40B4-BE49-F238E27FC236}">
-                <a16:creationId xmlns:a16="http://schemas.microsoft.com/office/drawing/2014/main" xmlns="" id="{4CA99A5D-DD39-1919-FD58-65B06FAFDE0F}"/>
+                <a16:creationId xmlns="" xmlns:a16="http://schemas.microsoft.com/office/drawing/2014/main" id="{4CA99A5D-DD39-1919-FD58-65B06FAFDE0F}"/>
               </a:ext>
             </a:extLst>
           </p:cNvPr>
@@ -8373,6 +9069,53 @@
           </a:prstGeom>
         </p:spPr>
       </p:pic>
+      <p:sp>
+        <p:nvSpPr>
+          <p:cNvPr id="3" name="Rectangle 2"/>
+          <p:cNvSpPr/>
+          <p:nvPr/>
+        </p:nvSpPr>
+        <p:spPr>
+          <a:xfrm>
+            <a:off x="4789714" y="3820886"/>
+            <a:ext cx="2906486" cy="381000"/>
+          </a:xfrm>
+          <a:prstGeom prst="rect">
+            <a:avLst/>
+          </a:prstGeom>
+          <a:noFill/>
+          <a:ln w="28575">
+            <a:solidFill>
+              <a:srgbClr val="FF0000"/>
+            </a:solidFill>
+            <a:prstDash val="dash"/>
+          </a:ln>
+        </p:spPr>
+        <p:style>
+          <a:lnRef idx="2">
+            <a:schemeClr val="accent1">
+              <a:shade val="50000"/>
+            </a:schemeClr>
+          </a:lnRef>
+          <a:fillRef idx="1">
+            <a:schemeClr val="accent1"/>
+          </a:fillRef>
+          <a:effectRef idx="0">
+            <a:schemeClr val="accent1"/>
+          </a:effectRef>
+          <a:fontRef idx="minor">
+            <a:schemeClr val="lt1"/>
+          </a:fontRef>
+        </p:style>
+        <p:txBody>
+          <a:bodyPr rtlCol="0" anchor="ctr"/>
+          <a:lstStyle/>
+          <a:p>
+            <a:pPr algn="ctr"/>
+            <a:endParaRPr lang="en-US"/>
+          </a:p>
+        </p:txBody>
+      </p:sp>
     </p:spTree>
     <p:extLst>
       <p:ext uri="{BB962C8B-B14F-4D97-AF65-F5344CB8AC3E}">
@@ -8415,7 +9158,7 @@
           <p:cNvPr id="2" name="Title 1">
             <a:extLst>
               <a:ext uri="{FF2B5EF4-FFF2-40B4-BE49-F238E27FC236}">
-                <a16:creationId xmlns:a16="http://schemas.microsoft.com/office/drawing/2014/main" xmlns="" id="{B643E24B-1160-F6BA-5A0C-DB3B3DD9CD8A}"/>
+                <a16:creationId xmlns="" xmlns:a16="http://schemas.microsoft.com/office/drawing/2014/main" id="{B643E24B-1160-F6BA-5A0C-DB3B3DD9CD8A}"/>
               </a:ext>
             </a:extLst>
           </p:cNvPr>
@@ -8461,7 +9204,7 @@
           </p:nvPr>
         </p:nvPicPr>
         <p:blipFill>
-          <a:blip r:embed="rId2">
+          <a:blip r:embed="rId3">
             <a:extLst>
               <a:ext uri="{28A0092B-C50C-407E-A947-70E740481C1C}">
                 <a14:useLocalDpi xmlns:a14="http://schemas.microsoft.com/office/drawing/2010/main" val="0"/>
@@ -8488,7 +9231,7 @@
           <p:nvPr/>
         </p:nvPicPr>
         <p:blipFill>
-          <a:blip r:embed="rId3"/>
+          <a:blip r:embed="rId4"/>
           <a:stretch>
             <a:fillRect/>
           </a:stretch>
@@ -8571,7 +9314,7 @@
           <p:nvPr/>
         </p:nvPicPr>
         <p:blipFill>
-          <a:blip r:embed="rId2"/>
+          <a:blip r:embed="rId3"/>
           <a:stretch>
             <a:fillRect/>
           </a:stretch>
@@ -8968,7 +9711,7 @@
           <p:cNvPr id="2" name="Title 1">
             <a:extLst>
               <a:ext uri="{FF2B5EF4-FFF2-40B4-BE49-F238E27FC236}">
-                <a16:creationId xmlns:a16="http://schemas.microsoft.com/office/drawing/2014/main" xmlns="" id="{65C86E6E-BE59-7A7B-6BE9-16A0A094C3D6}"/>
+                <a16:creationId xmlns="" xmlns:a16="http://schemas.microsoft.com/office/drawing/2014/main" id="{65C86E6E-BE59-7A7B-6BE9-16A0A094C3D6}"/>
               </a:ext>
             </a:extLst>
           </p:cNvPr>
@@ -8996,7 +9739,7 @@
           <p:cNvPr id="7" name="Content Placeholder 6">
             <a:extLst>
               <a:ext uri="{FF2B5EF4-FFF2-40B4-BE49-F238E27FC236}">
-                <a16:creationId xmlns:a16="http://schemas.microsoft.com/office/drawing/2014/main" xmlns="" id="{AD4A4EC6-9BB8-2849-8D75-05C44DE9A384}"/>
+                <a16:creationId xmlns="" xmlns:a16="http://schemas.microsoft.com/office/drawing/2014/main" id="{AD4A4EC6-9BB8-2849-8D75-05C44DE9A384}"/>
               </a:ext>
             </a:extLst>
           </p:cNvPr>
@@ -9028,7 +9771,7 @@
           <p:cNvPr id="9" name="Picture 8">
             <a:extLst>
               <a:ext uri="{FF2B5EF4-FFF2-40B4-BE49-F238E27FC236}">
-                <a16:creationId xmlns:a16="http://schemas.microsoft.com/office/drawing/2014/main" xmlns="" id="{C985C62C-76E5-84A1-DEF1-FC486F2BF179}"/>
+                <a16:creationId xmlns="" xmlns:a16="http://schemas.microsoft.com/office/drawing/2014/main" id="{C985C62C-76E5-84A1-DEF1-FC486F2BF179}"/>
               </a:ext>
             </a:extLst>
           </p:cNvPr>
@@ -14826,7 +15569,7 @@
         <p:cNvPr id="1" name="">
           <a:extLst>
             <a:ext uri="{FF2B5EF4-FFF2-40B4-BE49-F238E27FC236}">
-              <a16:creationId xmlns:a16="http://schemas.microsoft.com/office/drawing/2014/main" xmlns="" id="{498DF60D-9815-C72C-E039-867021DB81A5}"/>
+              <a16:creationId xmlns="" xmlns:a16="http://schemas.microsoft.com/office/drawing/2014/main" id="{498DF60D-9815-C72C-E039-867021DB81A5}"/>
             </a:ext>
           </a:extLst>
         </p:cNvPr>
@@ -14846,7 +15589,7 @@
           <p:cNvPr id="2" name="Title 1">
             <a:extLst>
               <a:ext uri="{FF2B5EF4-FFF2-40B4-BE49-F238E27FC236}">
-                <a16:creationId xmlns:a16="http://schemas.microsoft.com/office/drawing/2014/main" xmlns="" id="{ED5429F4-17DA-8C65-E10D-772D18EA9959}"/>
+                <a16:creationId xmlns="" xmlns:a16="http://schemas.microsoft.com/office/drawing/2014/main" id="{ED5429F4-17DA-8C65-E10D-772D18EA9959}"/>
               </a:ext>
             </a:extLst>
           </p:cNvPr>
@@ -14881,7 +15624,7 @@
           <p:cNvPr id="7" name="Content Placeholder 6">
             <a:extLst>
               <a:ext uri="{FF2B5EF4-FFF2-40B4-BE49-F238E27FC236}">
-                <a16:creationId xmlns:a16="http://schemas.microsoft.com/office/drawing/2014/main" xmlns="" id="{C9BB87FF-FFF5-432F-99E1-3CFA176F711C}"/>
+                <a16:creationId xmlns="" xmlns:a16="http://schemas.microsoft.com/office/drawing/2014/main" id="{C9BB87FF-FFF5-432F-99E1-3CFA176F711C}"/>
               </a:ext>
             </a:extLst>
           </p:cNvPr>
@@ -14948,7 +15691,7 @@
           <p:cNvPr id="3" name="Picture 2">
             <a:extLst>
               <a:ext uri="{FF2B5EF4-FFF2-40B4-BE49-F238E27FC236}">
-                <a16:creationId xmlns:a16="http://schemas.microsoft.com/office/drawing/2014/main" xmlns="" id="{E28FFDEC-FAE3-F715-C17D-E64EBFEF57E2}"/>
+                <a16:creationId xmlns="" xmlns:a16="http://schemas.microsoft.com/office/drawing/2014/main" id="{E28FFDEC-FAE3-F715-C17D-E64EBFEF57E2}"/>
               </a:ext>
             </a:extLst>
           </p:cNvPr>
@@ -14978,7 +15721,7 @@
           <p:cNvPr id="10" name="TextBox 9">
             <a:extLst>
               <a:ext uri="{FF2B5EF4-FFF2-40B4-BE49-F238E27FC236}">
-                <a16:creationId xmlns:a16="http://schemas.microsoft.com/office/drawing/2014/main" xmlns="" id="{E5AD2A0C-B319-E101-9513-01BAFF04FFE6}"/>
+                <a16:creationId xmlns="" xmlns:a16="http://schemas.microsoft.com/office/drawing/2014/main" id="{E5AD2A0C-B319-E101-9513-01BAFF04FFE6}"/>
               </a:ext>
             </a:extLst>
           </p:cNvPr>
@@ -15013,7 +15756,7 @@
           <p:cNvPr id="12" name="Picture 11">
             <a:extLst>
               <a:ext uri="{FF2B5EF4-FFF2-40B4-BE49-F238E27FC236}">
-                <a16:creationId xmlns:a16="http://schemas.microsoft.com/office/drawing/2014/main" xmlns="" id="{52CEA5CE-1C3F-5BA0-00F6-DC7933C7618E}"/>
+                <a16:creationId xmlns="" xmlns:a16="http://schemas.microsoft.com/office/drawing/2014/main" id="{52CEA5CE-1C3F-5BA0-00F6-DC7933C7618E}"/>
               </a:ext>
             </a:extLst>
           </p:cNvPr>
@@ -15113,7 +15856,7 @@
           <p:cNvPr id="2" name="Title 1">
             <a:extLst>
               <a:ext uri="{FF2B5EF4-FFF2-40B4-BE49-F238E27FC236}">
-                <a16:creationId xmlns:a16="http://schemas.microsoft.com/office/drawing/2014/main" xmlns="" id="{F11C1235-51B4-A8A0-3A61-9C767F437001}"/>
+                <a16:creationId xmlns="" xmlns:a16="http://schemas.microsoft.com/office/drawing/2014/main" id="{F11C1235-51B4-A8A0-3A61-9C767F437001}"/>
               </a:ext>
             </a:extLst>
           </p:cNvPr>
@@ -15148,7 +15891,7 @@
           <p:cNvPr id="7" name="Content Placeholder 6">
             <a:extLst>
               <a:ext uri="{FF2B5EF4-FFF2-40B4-BE49-F238E27FC236}">
-                <a16:creationId xmlns:a16="http://schemas.microsoft.com/office/drawing/2014/main" xmlns="" id="{4A0E7BDD-2CF4-321B-0637-D9AF63CAB0BF}"/>
+                <a16:creationId xmlns="" xmlns:a16="http://schemas.microsoft.com/office/drawing/2014/main" id="{4A0E7BDD-2CF4-321B-0637-D9AF63CAB0BF}"/>
               </a:ext>
             </a:extLst>
           </p:cNvPr>
@@ -15377,7 +16120,7 @@
           <p:cNvPr id="15" name="Picture 14">
             <a:extLst>
               <a:ext uri="{FF2B5EF4-FFF2-40B4-BE49-F238E27FC236}">
-                <a16:creationId xmlns:a16="http://schemas.microsoft.com/office/drawing/2014/main" xmlns="" id="{82300E94-D641-5E7E-D410-1F95BB0C9A9B}"/>
+                <a16:creationId xmlns="" xmlns:a16="http://schemas.microsoft.com/office/drawing/2014/main" id="{82300E94-D641-5E7E-D410-1F95BB0C9A9B}"/>
               </a:ext>
             </a:extLst>
           </p:cNvPr>
@@ -15407,7 +16150,7 @@
           <p:cNvPr id="18" name="Picture 17">
             <a:extLst>
               <a:ext uri="{FF2B5EF4-FFF2-40B4-BE49-F238E27FC236}">
-                <a16:creationId xmlns:a16="http://schemas.microsoft.com/office/drawing/2014/main" xmlns="" id="{55A41CDD-7CE6-4D63-F256-F3E90D329D71}"/>
+                <a16:creationId xmlns="" xmlns:a16="http://schemas.microsoft.com/office/drawing/2014/main" id="{55A41CDD-7CE6-4D63-F256-F3E90D329D71}"/>
               </a:ext>
             </a:extLst>
           </p:cNvPr>
@@ -15474,7 +16217,7 @@
           <p:cNvPr id="10" name="Picture 9">
             <a:extLst>
               <a:ext uri="{FF2B5EF4-FFF2-40B4-BE49-F238E27FC236}">
-                <a16:creationId xmlns:a16="http://schemas.microsoft.com/office/drawing/2014/main" xmlns="" id="{20FEF80F-391D-5C0D-3E70-1754E47CE21A}"/>
+                <a16:creationId xmlns="" xmlns:a16="http://schemas.microsoft.com/office/drawing/2014/main" id="{20FEF80F-391D-5C0D-3E70-1754E47CE21A}"/>
               </a:ext>
             </a:extLst>
           </p:cNvPr>
@@ -15653,7 +16396,7 @@
           <p:cNvPr id="2" name="Title 1">
             <a:extLst>
               <a:ext uri="{FF2B5EF4-FFF2-40B4-BE49-F238E27FC236}">
-                <a16:creationId xmlns:a16="http://schemas.microsoft.com/office/drawing/2014/main" xmlns="" id="{C3585339-B774-DFDC-4DB4-D02F5083DD3E}"/>
+                <a16:creationId xmlns="" xmlns:a16="http://schemas.microsoft.com/office/drawing/2014/main" id="{C3585339-B774-DFDC-4DB4-D02F5083DD3E}"/>
               </a:ext>
             </a:extLst>
           </p:cNvPr>
@@ -15695,7 +16438,7 @@
             <p:cNvPr id="15" name="TextBox 14">
               <a:extLst>
                 <a:ext uri="{FF2B5EF4-FFF2-40B4-BE49-F238E27FC236}">
-                  <a16:creationId xmlns:a16="http://schemas.microsoft.com/office/drawing/2014/main" xmlns="" id="{2477AED6-8D6F-D505-6D7B-78460A03A2E8}"/>
+                  <a16:creationId xmlns="" xmlns:a16="http://schemas.microsoft.com/office/drawing/2014/main" id="{2477AED6-8D6F-D505-6D7B-78460A03A2E8}"/>
                 </a:ext>
               </a:extLst>
             </p:cNvPr>
@@ -15800,7 +16543,7 @@
           <p:cNvPr id="5" name="Picture 4">
             <a:extLst>
               <a:ext uri="{FF2B5EF4-FFF2-40B4-BE49-F238E27FC236}">
-                <a16:creationId xmlns:a16="http://schemas.microsoft.com/office/drawing/2014/main" xmlns="" id="{8B985467-A9DA-DE11-1910-E778EDD530AB}"/>
+                <a16:creationId xmlns="" xmlns:a16="http://schemas.microsoft.com/office/drawing/2014/main" id="{8B985467-A9DA-DE11-1910-E778EDD530AB}"/>
               </a:ext>
             </a:extLst>
           </p:cNvPr>
@@ -15889,7 +16632,7 @@
           <p:cNvPr id="4" name="Content Placeholder 3">
             <a:extLst>
               <a:ext uri="{FF2B5EF4-FFF2-40B4-BE49-F238E27FC236}">
-                <a16:creationId xmlns:a16="http://schemas.microsoft.com/office/drawing/2014/main" xmlns="" id="{E5625E47-EFA5-9C35-32C7-F793664192AF}"/>
+                <a16:creationId xmlns="" xmlns:a16="http://schemas.microsoft.com/office/drawing/2014/main" id="{E5625E47-EFA5-9C35-32C7-F793664192AF}"/>
               </a:ext>
             </a:extLst>
           </p:cNvPr>
@@ -15924,7 +16667,7 @@
           <p:cNvPr id="10" name="Table 9">
             <a:extLst>
               <a:ext uri="{FF2B5EF4-FFF2-40B4-BE49-F238E27FC236}">
-                <a16:creationId xmlns:a16="http://schemas.microsoft.com/office/drawing/2014/main" xmlns="" id="{658A328F-ADBC-7C5F-15DF-73E4DC21B209}"/>
+                <a16:creationId xmlns="" xmlns:a16="http://schemas.microsoft.com/office/drawing/2014/main" id="{658A328F-ADBC-7C5F-15DF-73E4DC21B209}"/>
               </a:ext>
             </a:extLst>
           </p:cNvPr>
@@ -15953,14 +16696,14 @@
                 <a:gridCol w="1298801">
                   <a:extLst>
                     <a:ext uri="{9D8B030D-6E8A-4147-A177-3AD203B41FA5}">
-                      <a16:colId xmlns:a16="http://schemas.microsoft.com/office/drawing/2014/main" xmlns="" val="20000"/>
+                      <a16:colId xmlns="" xmlns:a16="http://schemas.microsoft.com/office/drawing/2014/main" val="20000"/>
                     </a:ext>
                   </a:extLst>
                 </a:gridCol>
                 <a:gridCol w="10483653">
                   <a:extLst>
                     <a:ext uri="{9D8B030D-6E8A-4147-A177-3AD203B41FA5}">
-                      <a16:colId xmlns:a16="http://schemas.microsoft.com/office/drawing/2014/main" xmlns="" val="20001"/>
+                      <a16:colId xmlns="" xmlns:a16="http://schemas.microsoft.com/office/drawing/2014/main" val="20001"/>
                     </a:ext>
                   </a:extLst>
                 </a:gridCol>
@@ -16099,7 +16842,7 @@
                 </a:tc>
                 <a:extLst>
                   <a:ext uri="{0D108BD9-81ED-4DB2-BD59-A6C34878D82A}">
-                    <a16:rowId xmlns:a16="http://schemas.microsoft.com/office/drawing/2014/main" xmlns="" val="10000"/>
+                    <a16:rowId xmlns="" xmlns:a16="http://schemas.microsoft.com/office/drawing/2014/main" val="10000"/>
                   </a:ext>
                 </a:extLst>
               </a:tr>
@@ -16237,7 +16980,7 @@
                 </a:tc>
                 <a:extLst>
                   <a:ext uri="{0D108BD9-81ED-4DB2-BD59-A6C34878D82A}">
-                    <a16:rowId xmlns:a16="http://schemas.microsoft.com/office/drawing/2014/main" xmlns="" val="10001"/>
+                    <a16:rowId xmlns="" xmlns:a16="http://schemas.microsoft.com/office/drawing/2014/main" val="10001"/>
                   </a:ext>
                 </a:extLst>
               </a:tr>
@@ -16387,7 +17130,7 @@
                 </a:tc>
                 <a:extLst>
                   <a:ext uri="{0D108BD9-81ED-4DB2-BD59-A6C34878D82A}">
-                    <a16:rowId xmlns:a16="http://schemas.microsoft.com/office/drawing/2014/main" xmlns="" val="10002"/>
+                    <a16:rowId xmlns="" xmlns:a16="http://schemas.microsoft.com/office/drawing/2014/main" val="10002"/>
                   </a:ext>
                 </a:extLst>
               </a:tr>
@@ -16423,7 +17166,7 @@
         <p:cNvPr id="1" name="">
           <a:extLst>
             <a:ext uri="{FF2B5EF4-FFF2-40B4-BE49-F238E27FC236}">
-              <a16:creationId xmlns:a16="http://schemas.microsoft.com/office/drawing/2014/main" xmlns="" id="{C0816B88-86B3-799E-3A3E-FA919E3E0922}"/>
+              <a16:creationId xmlns="" xmlns:a16="http://schemas.microsoft.com/office/drawing/2014/main" id="{C0816B88-86B3-799E-3A3E-FA919E3E0922}"/>
             </a:ext>
           </a:extLst>
         </p:cNvPr>
@@ -16443,7 +17186,7 @@
           <p:cNvPr id="2" name="Title 1">
             <a:extLst>
               <a:ext uri="{FF2B5EF4-FFF2-40B4-BE49-F238E27FC236}">
-                <a16:creationId xmlns:a16="http://schemas.microsoft.com/office/drawing/2014/main" xmlns="" id="{C36E5815-73D6-DA66-29AA-3BE061A3E84B}"/>
+                <a16:creationId xmlns="" xmlns:a16="http://schemas.microsoft.com/office/drawing/2014/main" id="{C36E5815-73D6-DA66-29AA-3BE061A3E84B}"/>
               </a:ext>
             </a:extLst>
           </p:cNvPr>
@@ -16471,7 +17214,7 @@
           <p:cNvPr id="11" name="Content Placeholder 3">
             <a:extLst>
               <a:ext uri="{FF2B5EF4-FFF2-40B4-BE49-F238E27FC236}">
-                <a16:creationId xmlns:a16="http://schemas.microsoft.com/office/drawing/2014/main" xmlns="" id="{6010EF79-766B-D3A2-10CE-882C40A1E836}"/>
+                <a16:creationId xmlns="" xmlns:a16="http://schemas.microsoft.com/office/drawing/2014/main" id="{6010EF79-766B-D3A2-10CE-882C40A1E836}"/>
               </a:ext>
             </a:extLst>
           </p:cNvPr>
@@ -16667,7 +17410,7 @@
           <p:cNvPr id="3" name="Table 2">
             <a:extLst>
               <a:ext uri="{FF2B5EF4-FFF2-40B4-BE49-F238E27FC236}">
-                <a16:creationId xmlns:a16="http://schemas.microsoft.com/office/drawing/2014/main" xmlns="" id="{6C8AAA51-C203-CD8B-4B02-DE7401134C21}"/>
+                <a16:creationId xmlns="" xmlns:a16="http://schemas.microsoft.com/office/drawing/2014/main" id="{6C8AAA51-C203-CD8B-4B02-DE7401134C21}"/>
               </a:ext>
             </a:extLst>
           </p:cNvPr>
@@ -16696,7 +17439,7 @@
                 <a:gridCol w="811057">
                   <a:extLst>
                     <a:ext uri="{9D8B030D-6E8A-4147-A177-3AD203B41FA5}">
-                      <a16:colId xmlns:a16="http://schemas.microsoft.com/office/drawing/2014/main" xmlns="" val="20000"/>
+                      <a16:colId xmlns="" xmlns:a16="http://schemas.microsoft.com/office/drawing/2014/main" val="20000"/>
                     </a:ext>
                   </a:extLst>
                 </a:gridCol>
@@ -16705,14 +17448,14 @@
                 <a:gridCol w="4324350">
                   <a:extLst>
                     <a:ext uri="{9D8B030D-6E8A-4147-A177-3AD203B41FA5}">
-                      <a16:colId xmlns:a16="http://schemas.microsoft.com/office/drawing/2014/main" xmlns="" val="20001"/>
+                      <a16:colId xmlns="" xmlns:a16="http://schemas.microsoft.com/office/drawing/2014/main" val="20001"/>
                     </a:ext>
                   </a:extLst>
                 </a:gridCol>
                 <a:gridCol w="4324350">
                   <a:extLst>
                     <a:ext uri="{9D8B030D-6E8A-4147-A177-3AD203B41FA5}">
-                      <a16:colId xmlns:a16="http://schemas.microsoft.com/office/drawing/2014/main" xmlns="" val="2530683369"/>
+                      <a16:colId xmlns="" xmlns:a16="http://schemas.microsoft.com/office/drawing/2014/main" val="2530683369"/>
                     </a:ext>
                   </a:extLst>
                 </a:gridCol>
@@ -17072,7 +17815,7 @@
                 </a:tc>
                 <a:extLst>
                   <a:ext uri="{0D108BD9-81ED-4DB2-BD59-A6C34878D82A}">
-                    <a16:rowId xmlns:a16="http://schemas.microsoft.com/office/drawing/2014/main" xmlns="" val="10000"/>
+                    <a16:rowId xmlns="" xmlns:a16="http://schemas.microsoft.com/office/drawing/2014/main" val="10000"/>
                   </a:ext>
                 </a:extLst>
               </a:tr>
@@ -17409,7 +18152,7 @@
                 </a:tc>
                 <a:extLst>
                   <a:ext uri="{0D108BD9-81ED-4DB2-BD59-A6C34878D82A}">
-                    <a16:rowId xmlns:a16="http://schemas.microsoft.com/office/drawing/2014/main" xmlns="" val="10001"/>
+                    <a16:rowId xmlns="" xmlns:a16="http://schemas.microsoft.com/office/drawing/2014/main" val="10001"/>
                   </a:ext>
                 </a:extLst>
               </a:tr>
@@ -17781,7 +18524,7 @@
                 </a:tc>
                 <a:extLst>
                   <a:ext uri="{0D108BD9-81ED-4DB2-BD59-A6C34878D82A}">
-                    <a16:rowId xmlns:a16="http://schemas.microsoft.com/office/drawing/2014/main" xmlns="" val="10002"/>
+                    <a16:rowId xmlns="" xmlns:a16="http://schemas.microsoft.com/office/drawing/2014/main" val="10002"/>
                   </a:ext>
                 </a:extLst>
               </a:tr>
@@ -18158,7 +18901,7 @@
                 </a:tc>
                 <a:extLst>
                   <a:ext uri="{0D108BD9-81ED-4DB2-BD59-A6C34878D82A}">
-                    <a16:rowId xmlns:a16="http://schemas.microsoft.com/office/drawing/2014/main" xmlns="" val="10003"/>
+                    <a16:rowId xmlns="" xmlns:a16="http://schemas.microsoft.com/office/drawing/2014/main" val="10003"/>
                   </a:ext>
                 </a:extLst>
               </a:tr>
@@ -18543,7 +19286,7 @@
                 </a:tc>
                 <a:extLst>
                   <a:ext uri="{0D108BD9-81ED-4DB2-BD59-A6C34878D82A}">
-                    <a16:rowId xmlns:a16="http://schemas.microsoft.com/office/drawing/2014/main" xmlns="" val="10004"/>
+                    <a16:rowId xmlns="" xmlns:a16="http://schemas.microsoft.com/office/drawing/2014/main" val="10004"/>
                   </a:ext>
                 </a:extLst>
               </a:tr>
@@ -18593,7 +19336,7 @@
           <p:cNvPr id="14" name="Picture 13">
             <a:extLst>
               <a:ext uri="{FF2B5EF4-FFF2-40B4-BE49-F238E27FC236}">
-                <a16:creationId xmlns:a16="http://schemas.microsoft.com/office/drawing/2014/main" xmlns="" id="{79F3C30A-9B01-61F0-056C-27C80301C91F}"/>
+                <a16:creationId xmlns="" xmlns:a16="http://schemas.microsoft.com/office/drawing/2014/main" id="{79F3C30A-9B01-61F0-056C-27C80301C91F}"/>
               </a:ext>
             </a:extLst>
           </p:cNvPr>
@@ -18824,7 +19567,7 @@
           <p:cNvPr id="10" name="Picture 9">
             <a:extLst>
               <a:ext uri="{FF2B5EF4-FFF2-40B4-BE49-F238E27FC236}">
-                <a16:creationId xmlns:a16="http://schemas.microsoft.com/office/drawing/2014/main" xmlns="" id="{09AB2A3E-4A5A-80E7-6BD7-3F4F73E5CF93}"/>
+                <a16:creationId xmlns="" xmlns:a16="http://schemas.microsoft.com/office/drawing/2014/main" id="{09AB2A3E-4A5A-80E7-6BD7-3F4F73E5CF93}"/>
               </a:ext>
             </a:extLst>
           </p:cNvPr>
@@ -18891,7 +19634,7 @@
           <p:cNvPr id="12" name="Picture 11">
             <a:extLst>
               <a:ext uri="{FF2B5EF4-FFF2-40B4-BE49-F238E27FC236}">
-                <a16:creationId xmlns:a16="http://schemas.microsoft.com/office/drawing/2014/main" xmlns="" id="{1687716E-3FC0-6720-F07D-6C24184342FD}"/>
+                <a16:creationId xmlns="" xmlns:a16="http://schemas.microsoft.com/office/drawing/2014/main" id="{1687716E-3FC0-6720-F07D-6C24184342FD}"/>
               </a:ext>
             </a:extLst>
           </p:cNvPr>
@@ -18974,7 +19717,15 @@
             </a:pPr>
             <a:r>
               <a:rPr lang="en-US"/>
-              <a:t>Move RemoteDiag into the IP container.</a:t>
+              <a:t>Move RemoteDiag into the </a:t>
+            </a:r>
+            <a:r>
+              <a:rPr lang="en-US" smtClean="0"/>
+              <a:t>Internal </a:t>
+            </a:r>
+            <a:r>
+              <a:rPr lang="en-US"/>
+              <a:t>container.</a:t>
             </a:r>
           </a:p>
           <a:p>
@@ -19022,7 +19773,7 @@
           <p:cNvPr id="9" name="Picture 8">
             <a:extLst>
               <a:ext uri="{FF2B5EF4-FFF2-40B4-BE49-F238E27FC236}">
-                <a16:creationId xmlns:a16="http://schemas.microsoft.com/office/drawing/2014/main" xmlns="" id="{33B21BAC-9E9C-F667-EB81-43F48A0E1E40}"/>
+                <a16:creationId xmlns="" xmlns:a16="http://schemas.microsoft.com/office/drawing/2014/main" id="{33B21BAC-9E9C-F667-EB81-43F48A0E1E40}"/>
               </a:ext>
             </a:extLst>
           </p:cNvPr>
@@ -19052,7 +19803,7 @@
           <p:cNvPr id="14" name="TextBox 13">
             <a:extLst>
               <a:ext uri="{FF2B5EF4-FFF2-40B4-BE49-F238E27FC236}">
-                <a16:creationId xmlns:a16="http://schemas.microsoft.com/office/drawing/2014/main" xmlns="" id="{2AAE2910-7B87-F3B5-8408-E04FE9F21D42}"/>
+                <a16:creationId xmlns="" xmlns:a16="http://schemas.microsoft.com/office/drawing/2014/main" id="{2AAE2910-7B87-F3B5-8408-E04FE9F21D42}"/>
               </a:ext>
             </a:extLst>
           </p:cNvPr>

--- a/design/FE_phi.vu_Design of Secure Remote Diag on Container Separation Architecture_final.pptx
+++ b/design/FE_phi.vu_Design of Secure Remote Diag on Container Separation Architecture_final.pptx
@@ -540,41 +540,65 @@
           <a:lstStyle/>
           <a:p>
             <a:r>
-              <a:rPr lang="en-US" smtClean="0"/>
-              <a:t>(Nhớ</a:t>
-            </a:r>
-            <a:r>
-              <a:rPr lang="en-US" baseline="0" smtClean="0"/>
-              <a:t> bật mouse laser</a:t>
-            </a:r>
-            <a:r>
-              <a:rPr lang="en-US" baseline="0" smtClean="0"/>
-              <a:t>) + Bật CAM</a:t>
-            </a:r>
-            <a:endParaRPr lang="en-US" smtClean="0"/>
-          </a:p>
-          <a:p>
-            <a:endParaRPr lang="en-US" smtClean="0"/>
-          </a:p>
-          <a:p>
-            <a:r>
-              <a:rPr lang="en-US" smtClean="0"/>
+              <a:rPr lang="en-US" dirty="0"/>
+              <a:t>(</a:t>
+            </a:r>
+            <a:r>
+              <a:rPr lang="en-US" dirty="0" err="1"/>
+              <a:t>Nhớ</a:t>
+            </a:r>
+            <a:r>
+              <a:rPr lang="en-US" baseline="0" dirty="0"/>
+              <a:t> </a:t>
+            </a:r>
+            <a:r>
+              <a:rPr lang="en-US" baseline="0" dirty="0" err="1"/>
+              <a:t>bật</a:t>
+            </a:r>
+            <a:r>
+              <a:rPr lang="en-US" baseline="0" dirty="0"/>
+              <a:t> mouse laser) + </a:t>
+            </a:r>
+            <a:r>
+              <a:rPr lang="en-US" baseline="0" dirty="0" err="1"/>
+              <a:t>Bật</a:t>
+            </a:r>
+            <a:r>
+              <a:rPr lang="en-US" baseline="0" dirty="0"/>
+              <a:t> CAM </a:t>
+            </a:r>
+            <a:endParaRPr lang="en-US" dirty="0"/>
+          </a:p>
+          <a:p>
+            <a:endParaRPr lang="en-US" dirty="0"/>
+          </a:p>
+          <a:p>
+            <a:r>
+              <a:rPr lang="en-US" dirty="0"/>
               <a:t>Hello</a:t>
             </a:r>
             <a:r>
-              <a:rPr lang="en-US" baseline="0" smtClean="0"/>
+              <a:rPr lang="en-US" baseline="0" dirty="0"/>
               <a:t> everyone, my name is Phi, from Software Engineering part.</a:t>
             </a:r>
           </a:p>
           <a:p>
-            <a:endParaRPr lang="en-US" baseline="0" smtClean="0"/>
-          </a:p>
-          <a:p>
-            <a:r>
-              <a:rPr lang="en-US" baseline="0" smtClean="0"/>
-              <a:t>Today, I will present about the topic: Design of Secure Remote Diag on Container Separation Architecture</a:t>
-            </a:r>
-            <a:endParaRPr lang="en-US"/>
+            <a:endParaRPr lang="en-US" baseline="0" dirty="0"/>
+          </a:p>
+          <a:p>
+            <a:r>
+              <a:rPr lang="en-US" baseline="0" dirty="0"/>
+              <a:t>Today, I will present about the topic: Design of Secure Remote </a:t>
+            </a:r>
+            <a:r>
+              <a:rPr lang="en-US" baseline="0" dirty="0" err="1"/>
+              <a:t>Diag</a:t>
+            </a:r>
+            <a:r>
+              <a:rPr lang="en-US" baseline="0" dirty="0"/>
+              <a:t> on Container Separation Architecture</a:t>
+            </a:r>
+            <a:endParaRPr lang="en-US" dirty="0"/>
           </a:p>
         </p:txBody>
       </p:sp>
@@ -659,35 +683,35 @@
           <a:lstStyle/>
           <a:p>
             <a:r>
-              <a:rPr lang="en-US" smtClean="0"/>
+              <a:rPr lang="en-US"/>
               <a:t>The last alternatives is</a:t>
             </a:r>
             <a:r>
-              <a:rPr lang="en-US" baseline="0" smtClean="0"/>
+              <a:rPr lang="en-US" baseline="0"/>
               <a:t> Alternative C which is an update version of Alternative B:</a:t>
             </a:r>
           </a:p>
           <a:p>
             <a:r>
-              <a:rPr lang="en-US" baseline="0" smtClean="0"/>
+              <a:rPr lang="en-US" baseline="0"/>
               <a:t>I still move RemoteDiag into Internal container</a:t>
             </a:r>
           </a:p>
           <a:p>
             <a:r>
-              <a:rPr lang="en-US" baseline="0" smtClean="0"/>
+              <a:rPr lang="en-US" baseline="0"/>
               <a:t>And I add a new component in EP: RemoteDiagProxy, acting as a transparent proxy.</a:t>
             </a:r>
           </a:p>
           <a:p>
             <a:r>
-              <a:rPr lang="en-US" baseline="0" smtClean="0"/>
+              <a:rPr lang="en-US" baseline="0"/>
               <a:t>RemoteDiagProxy keeps the existing interface to communicate with other modules in EP side</a:t>
             </a:r>
           </a:p>
           <a:p>
             <a:r>
-              <a:rPr lang="en-US" baseline="0" smtClean="0"/>
+              <a:rPr lang="en-US" baseline="0"/>
               <a:t>And it forwards requests to RemoteDiag via UDS socket channel.</a:t>
             </a:r>
           </a:p>
@@ -774,49 +798,48 @@
           <a:lstStyle/>
           <a:p>
             <a:r>
-              <a:rPr lang="en-US" smtClean="0"/>
+              <a:rPr lang="en-US"/>
               <a:t>This</a:t>
             </a:r>
             <a:r>
-              <a:rPr lang="en-US" baseline="0" smtClean="0"/>
+              <a:rPr lang="en-US" baseline="0"/>
               <a:t> table describe about the comparison between design alternatives.</a:t>
             </a:r>
           </a:p>
           <a:p>
-            <a:endParaRPr lang="en-US" baseline="0" smtClean="0"/>
-          </a:p>
-          <a:p>
-            <a:r>
-              <a:rPr lang="en-US" baseline="0" smtClean="0"/>
+            <a:endParaRPr lang="en-US" baseline="0"/>
+          </a:p>
+          <a:p>
+            <a:r>
+              <a:rPr lang="en-US" baseline="0"/>
               <a:t>For filtering diagnostic commands </a:t>
             </a:r>
           </a:p>
           <a:p>
             <a:r>
-              <a:rPr lang="en-US" baseline="0" smtClean="0"/>
+              <a:rPr lang="en-US" baseline="0"/>
               <a:t>and keep communication path between RemoteDiag and MM ECU only routes in Internal container, all of the alternatives is satisfy.</a:t>
             </a:r>
+          </a:p>
+          <a:p>
             <a:endParaRPr lang="en-US" baseline="0"/>
           </a:p>
           <a:p>
-            <a:endParaRPr lang="en-US" baseline="0"/>
-          </a:p>
-          <a:p>
-            <a:r>
-              <a:rPr lang="en-US" baseline="0" smtClean="0"/>
+            <a:r>
+              <a:rPr lang="en-US" baseline="0"/>
               <a:t>But Alternative A is not satisfy the Modifiability – QA-three. Because it causes RemoteDiag and OnBoardClient responsibilities be changed:</a:t>
             </a:r>
             <a:br>
-              <a:rPr lang="en-US" baseline="0" smtClean="0"/>
+              <a:rPr lang="en-US" baseline="0"/>
             </a:br>
             <a:r>
-              <a:rPr lang="en-US" baseline="0" smtClean="0"/>
+              <a:rPr lang="en-US" baseline="0"/>
               <a:t>- Diagnostic priority control is moved to OnBoardClient</a:t>
             </a:r>
           </a:p>
           <a:p>
             <a:r>
-              <a:rPr lang="en-US" baseline="0" smtClean="0"/>
+              <a:rPr lang="en-US" baseline="0"/>
               <a:t>- And Existing RemoteDiag responsibilities are distributed across two applications.</a:t>
             </a:r>
           </a:p>
@@ -826,7 +849,7 @@
               <a:buNone/>
             </a:pPr>
             <a:r>
-              <a:rPr lang="en-US" baseline="0" smtClean="0"/>
+              <a:rPr lang="en-US" baseline="0"/>
               <a:t>The other alternatives keeps the core responsibilities of RemoteDiag.</a:t>
             </a:r>
           </a:p>
@@ -835,7 +858,7 @@
               <a:buFontTx/>
               <a:buNone/>
             </a:pPr>
-            <a:endParaRPr lang="en-US" baseline="0" smtClean="0"/>
+            <a:endParaRPr lang="en-US" baseline="0"/>
           </a:p>
           <a:p>
             <a:pPr marL="0" indent="0">
@@ -843,7 +866,7 @@
               <a:buNone/>
             </a:pPr>
             <a:r>
-              <a:rPr lang="en-US" baseline="0" smtClean="0"/>
+              <a:rPr lang="en-US" baseline="0"/>
               <a:t>For the Maintainability – QA-four, Alternative B is not satisfied. About TEN modules in EP side have to implement Unix Domain Socket server to communicate with RemoteDiag then integrate with their existing code. And also, fail-safe mechanism.</a:t>
             </a:r>
           </a:p>
@@ -853,7 +876,7 @@
               <a:buNone/>
             </a:pPr>
             <a:r>
-              <a:rPr lang="en-US" baseline="0" smtClean="0"/>
+              <a:rPr lang="en-US" baseline="0"/>
               <a:t>Alternative A has to modify OnBoardClient to implement UDS socket server and priority control.</a:t>
             </a:r>
           </a:p>
@@ -876,7 +899,7 @@
               <a:defRPr/>
             </a:pPr>
             <a:r>
-              <a:rPr lang="en-US" baseline="0" smtClean="0"/>
+              <a:rPr lang="en-US" baseline="0"/>
               <a:t>Alternative C has to implement RemoteDiagProxy.</a:t>
             </a:r>
           </a:p>
@@ -899,7 +922,7 @@
               <a:defRPr/>
             </a:pPr>
             <a:r>
-              <a:rPr lang="en-US" baseline="0" smtClean="0"/>
+              <a:rPr lang="en-US" baseline="0"/>
               <a:t>Both Alternative A and C are partially satisfy for Maintainability.</a:t>
             </a:r>
           </a:p>
@@ -921,7 +944,7 @@
               <a:tabLst/>
               <a:defRPr/>
             </a:pPr>
-            <a:endParaRPr lang="en-US" baseline="0" smtClean="0"/>
+            <a:endParaRPr lang="en-US" baseline="0"/>
           </a:p>
           <a:p>
             <a:pPr marL="0" marR="0" indent="0" algn="l" defTabSz="914400" rtl="0" eaLnBrk="1" fontAlgn="auto" latinLnBrk="0" hangingPunct="1">
@@ -942,7 +965,7 @@
               <a:defRPr/>
             </a:pPr>
             <a:r>
-              <a:rPr lang="en-US" baseline="0" smtClean="0"/>
+              <a:rPr lang="en-US" baseline="0"/>
               <a:t>So, with above comparison table, I chose Alternative C as it has highest score.</a:t>
             </a:r>
           </a:p>
@@ -964,21 +987,21 @@
               <a:tabLst/>
               <a:defRPr/>
             </a:pPr>
-            <a:endParaRPr lang="en-US" baseline="0" smtClean="0"/>
+            <a:endParaRPr lang="en-US" baseline="0"/>
           </a:p>
           <a:p>
             <a:pPr marL="0" indent="0">
               <a:buFontTx/>
               <a:buNone/>
             </a:pPr>
-            <a:endParaRPr lang="en-US" baseline="0" smtClean="0"/>
+            <a:endParaRPr lang="en-US" baseline="0"/>
           </a:p>
           <a:p>
             <a:pPr marL="171450" indent="-171450">
               <a:buFontTx/>
               <a:buChar char="-"/>
             </a:pPr>
-            <a:endParaRPr lang="en-US" baseline="0" smtClean="0"/>
+            <a:endParaRPr lang="en-US" baseline="0"/>
           </a:p>
         </p:txBody>
       </p:sp>
@@ -1063,21 +1086,21 @@
           <a:lstStyle/>
           <a:p>
             <a:r>
-              <a:rPr lang="en-US" smtClean="0"/>
+              <a:rPr lang="en-US"/>
               <a:t>For detail design, I presents</a:t>
             </a:r>
             <a:r>
-              <a:rPr lang="en-US" baseline="0" smtClean="0"/>
+              <a:rPr lang="en-US" baseline="0"/>
               <a:t> here the sequence diagrams when modules in EP sides want to send messages to RemoteDiag.</a:t>
             </a:r>
           </a:p>
           <a:p>
             <a:r>
-              <a:rPr lang="en-US" smtClean="0"/>
+              <a:rPr lang="en-US"/>
               <a:t>The Proxy receives</a:t>
             </a:r>
             <a:r>
-              <a:rPr lang="en-US" baseline="0" smtClean="0"/>
+              <a:rPr lang="en-US" baseline="0"/>
               <a:t> then forwards the messages via UnixSocketClient class, then RemoteDiag hanldes the messages after it received from UnixSocketServer class..</a:t>
             </a:r>
             <a:endParaRPr lang="en-US"/>
@@ -1165,18 +1188,18 @@
           <a:lstStyle/>
           <a:p>
             <a:r>
-              <a:rPr lang="en-US" smtClean="0"/>
+              <a:rPr lang="en-US"/>
               <a:t>This is the filter scenarios</a:t>
             </a:r>
             <a:r>
-              <a:rPr lang="en-US" baseline="0" smtClean="0"/>
+              <a:rPr lang="en-US" baseline="0"/>
               <a:t> when RemoteDiag received a direct diagnostic command.</a:t>
             </a:r>
             <a:br>
-              <a:rPr lang="en-US" baseline="0" smtClean="0"/>
+              <a:rPr lang="en-US" baseline="0"/>
             </a:br>
             <a:r>
-              <a:rPr lang="en-US" baseline="0" smtClean="0"/>
+              <a:rPr lang="en-US" baseline="0"/>
               <a:t>It will validate the Service ID from diagnostic command before allowing it to be sent to Internal CAN bus.</a:t>
             </a:r>
             <a:endParaRPr lang="en-US"/>
@@ -1263,7 +1286,16 @@
           <a:bodyPr/>
           <a:lstStyle/>
           <a:p>
-            <a:endParaRPr lang="en-US"/>
+            <a:r>
+              <a:rPr lang="en-US" dirty="0"/>
+              <a:t>For Implementation and Verification status,</a:t>
+            </a:r>
+          </a:p>
+          <a:p>
+            <a:r>
+              <a:rPr lang="en-US" dirty="0"/>
+              <a:t>Currently, we implemented the Sid filter</a:t>
+            </a:r>
           </a:p>
         </p:txBody>
       </p:sp>
@@ -1348,27 +1380,27 @@
           <a:lstStyle/>
           <a:p>
             <a:r>
-              <a:rPr lang="en-US" smtClean="0"/>
+              <a:rPr lang="en-US"/>
               <a:t>That’s all.</a:t>
             </a:r>
             <a:r>
-              <a:rPr lang="en-US" baseline="0" smtClean="0"/>
+              <a:rPr lang="en-US" baseline="0"/>
               <a:t> If you have any question please tellme</a:t>
             </a:r>
           </a:p>
           <a:p>
-            <a:endParaRPr lang="en-US" baseline="0" smtClean="0"/>
-          </a:p>
-          <a:p>
-            <a:r>
-              <a:rPr lang="en-US" baseline="0" smtClean="0"/>
+            <a:endParaRPr lang="en-US" baseline="0"/>
+          </a:p>
+          <a:p>
+            <a:r>
+              <a:rPr lang="en-US" baseline="0"/>
               <a:t>I would like to say Thank you to the judges for listening for my FE presentation</a:t>
             </a:r>
             <a:br>
-              <a:rPr lang="en-US" baseline="0" smtClean="0"/>
+              <a:rPr lang="en-US" baseline="0"/>
             </a:br>
             <a:r>
-              <a:rPr lang="en-US" baseline="0" smtClean="0"/>
+              <a:rPr lang="en-US" baseline="0"/>
               <a:t>and I appreciate the support from my mentors Mr. Bu yong kim.</a:t>
             </a:r>
             <a:endParaRPr lang="en-US"/>
@@ -1456,30 +1488,25 @@
           <a:lstStyle/>
           <a:p>
             <a:r>
-              <a:rPr lang="en-US" smtClean="0"/>
+              <a:rPr lang="en-US"/>
               <a:t>For the topic</a:t>
             </a:r>
             <a:r>
-              <a:rPr lang="en-US" baseline="0" smtClean="0"/>
+              <a:rPr lang="en-US" baseline="0"/>
               <a:t> presentation, </a:t>
             </a:r>
             <a:r>
-              <a:rPr lang="en-US" smtClean="0"/>
+              <a:rPr lang="en-US"/>
               <a:t>I will go through six</a:t>
             </a:r>
             <a:r>
-              <a:rPr lang="en-US" baseline="0" smtClean="0"/>
-              <a:t> sections as you can see in the </a:t>
-            </a:r>
-            <a:r>
-              <a:rPr lang="en-US" baseline="0" smtClean="0"/>
-              <a:t>slide.</a:t>
-            </a:r>
-            <a:endParaRPr lang="en-US" baseline="0" smtClean="0"/>
-          </a:p>
-          <a:p>
-            <a:r>
-              <a:rPr lang="en-US" baseline="0" smtClean="0"/>
+              <a:rPr lang="en-US" baseline="0"/>
+              <a:t> sections as you can see in the slide.</a:t>
+            </a:r>
+          </a:p>
+          <a:p>
+            <a:r>
+              <a:rPr lang="en-US" baseline="0"/>
               <a:t>First one is Context of my Function Expert topic.</a:t>
             </a:r>
             <a:endParaRPr lang="en-US"/>
@@ -1530,7 +1557,7 @@
         <p:cNvPr id="1" name="">
           <a:extLst>
             <a:ext uri="{FF2B5EF4-FFF2-40B4-BE49-F238E27FC236}">
-              <a16:creationId xmlns="" xmlns:a16="http://schemas.microsoft.com/office/drawing/2014/main" id="{7871B573-D46B-DD18-A2C4-C4082199D6A7}"/>
+              <a16:creationId xmlns:a16="http://schemas.microsoft.com/office/drawing/2014/main" id="{7871B573-D46B-DD18-A2C4-C4082199D6A7}"/>
             </a:ext>
           </a:extLst>
         </p:cNvPr>
@@ -1550,7 +1577,7 @@
           <p:cNvPr id="2" name="Slide Image Placeholder 1">
             <a:extLst>
               <a:ext uri="{FF2B5EF4-FFF2-40B4-BE49-F238E27FC236}">
-                <a16:creationId xmlns="" xmlns:a16="http://schemas.microsoft.com/office/drawing/2014/main" id="{F16CD46A-A877-3DE1-9984-1B961658209F}"/>
+                <a16:creationId xmlns:a16="http://schemas.microsoft.com/office/drawing/2014/main" id="{F16CD46A-A877-3DE1-9984-1B961658209F}"/>
               </a:ext>
             </a:extLst>
           </p:cNvPr>
@@ -1568,7 +1595,7 @@
           <p:cNvPr id="3" name="Notes Placeholder 2">
             <a:extLst>
               <a:ext uri="{FF2B5EF4-FFF2-40B4-BE49-F238E27FC236}">
-                <a16:creationId xmlns="" xmlns:a16="http://schemas.microsoft.com/office/drawing/2014/main" id="{3CAC9709-5C79-D782-6C8E-2BC9A65C8D0F}"/>
+                <a16:creationId xmlns:a16="http://schemas.microsoft.com/office/drawing/2014/main" id="{3CAC9709-5C79-D782-6C8E-2BC9A65C8D0F}"/>
               </a:ext>
             </a:extLst>
           </p:cNvPr>
@@ -1585,38 +1612,38 @@
           <a:lstStyle/>
           <a:p>
             <a:r>
-              <a:rPr lang="en-US" smtClean="0"/>
+              <a:rPr lang="en-US"/>
               <a:t>The Toyota DCM is a telematics platform</a:t>
             </a:r>
             <a:r>
-              <a:rPr lang="en-US" baseline="0" smtClean="0"/>
+              <a:rPr lang="en-US" baseline="0"/>
               <a:t> which provides services that allows vehicles to connect to the network, including the remote diagnostics from OEM server.</a:t>
             </a:r>
           </a:p>
           <a:p>
-            <a:endParaRPr lang="en-US" baseline="0" smtClean="0"/>
-          </a:p>
-          <a:p>
-            <a:r>
-              <a:rPr lang="en-US" baseline="0" smtClean="0"/>
+            <a:endParaRPr lang="en-US" baseline="0"/>
+          </a:p>
+          <a:p>
+            <a:r>
+              <a:rPr lang="en-US" baseline="0"/>
               <a:t>and It also supports diagnostic communication and OTA update feature, through Internal CAN bus … and the MM ECU which acts as OTA Master.</a:t>
             </a:r>
           </a:p>
           <a:p>
-            <a:endParaRPr lang="en-US" baseline="0" smtClean="0"/>
-          </a:p>
-          <a:p>
-            <a:r>
-              <a:rPr lang="en-US" baseline="0" smtClean="0"/>
+            <a:endParaRPr lang="en-US" baseline="0"/>
+          </a:p>
+          <a:p>
+            <a:r>
+              <a:rPr lang="en-US" baseline="0"/>
               <a:t>As you can see in the diagram, the Current architecture is monolithic, with all components running in a single partition.</a:t>
             </a:r>
           </a:p>
           <a:p>
-            <a:endParaRPr lang="en-US" baseline="0" smtClean="0"/>
-          </a:p>
-          <a:p>
-            <a:r>
-              <a:rPr lang="en-US" baseline="0" smtClean="0"/>
+            <a:endParaRPr lang="en-US" baseline="0"/>
+          </a:p>
+          <a:p>
+            <a:r>
+              <a:rPr lang="en-US" baseline="0"/>
               <a:t>On next slide, we will talk about the architecture migration.</a:t>
             </a:r>
             <a:endParaRPr lang="en-US"/>
@@ -1628,7 +1655,7 @@
           <p:cNvPr id="4" name="Slide Number Placeholder 3">
             <a:extLst>
               <a:ext uri="{FF2B5EF4-FFF2-40B4-BE49-F238E27FC236}">
-                <a16:creationId xmlns="" xmlns:a16="http://schemas.microsoft.com/office/drawing/2014/main" id="{CA1C9B43-13E9-E1D6-156A-5CB894C64FDE}"/>
+                <a16:creationId xmlns:a16="http://schemas.microsoft.com/office/drawing/2014/main" id="{CA1C9B43-13E9-E1D6-156A-5CB894C64FDE}"/>
               </a:ext>
             </a:extLst>
           </p:cNvPr>
@@ -1710,7 +1737,7 @@
           <a:lstStyle/>
           <a:p>
             <a:r>
-              <a:rPr lang="en-US" sz="1200" b="0" i="0" kern="1200" smtClean="0">
+              <a:rPr lang="en-US" sz="1200" b="0" i="0" kern="1200">
                 <a:solidFill>
                   <a:schemeClr val="tx1"/>
                 </a:solidFill>
@@ -1723,7 +1750,7 @@
             </a:r>
           </a:p>
           <a:p>
-            <a:endParaRPr lang="en-US" sz="1200" b="0" i="0" kern="1200" smtClean="0">
+            <a:endParaRPr lang="en-US" sz="1200" b="0" i="0" kern="1200">
               <a:solidFill>
                 <a:schemeClr val="tx1"/>
               </a:solidFill>
@@ -1735,7 +1762,7 @@
           </a:p>
           <a:p>
             <a:r>
-              <a:rPr lang="en-US" sz="1200" b="0" i="0" kern="1200" smtClean="0">
+              <a:rPr lang="en-US" sz="1200" b="0" i="0" kern="1200">
                 <a:solidFill>
                   <a:schemeClr val="tx1"/>
                 </a:solidFill>
@@ -1747,7 +1774,7 @@
               <a:t>To address the</a:t>
             </a:r>
             <a:r>
-              <a:rPr lang="en-US" sz="1200" b="0" i="0" kern="1200" baseline="0" smtClean="0">
+              <a:rPr lang="en-US" sz="1200" b="0" i="0" kern="1200" baseline="0">
                 <a:solidFill>
                   <a:schemeClr val="tx1"/>
                 </a:solidFill>
@@ -1759,7 +1786,7 @@
               <a:t> security</a:t>
             </a:r>
             <a:r>
-              <a:rPr lang="en-US" sz="1200" b="0" i="0" kern="1200" smtClean="0">
+              <a:rPr lang="en-US" sz="1200" b="0" i="0" kern="1200">
                 <a:solidFill>
                   <a:schemeClr val="tx1"/>
                 </a:solidFill>
@@ -1771,7 +1798,7 @@
               <a:t> risk, OEM proposed the security requirements to </a:t>
             </a:r>
             <a:r>
-              <a:rPr lang="en-US" sz="1200" b="1" i="0" kern="1200" smtClean="0">
+              <a:rPr lang="en-US" sz="1200" b="1" i="0" kern="1200">
                 <a:solidFill>
                   <a:schemeClr val="tx1"/>
                 </a:solidFill>
@@ -1783,7 +1810,7 @@
               <a:t>limit</a:t>
             </a:r>
             <a:r>
-              <a:rPr lang="en-US" sz="1200" b="0" i="0" kern="1200" smtClean="0">
+              <a:rPr lang="en-US" sz="1200" b="0" i="0" kern="1200">
                 <a:solidFill>
                   <a:schemeClr val="tx1"/>
                 </a:solidFill>
@@ -1796,20 +1823,8 @@
             </a:r>
           </a:p>
           <a:p>
-            <a:r>
-              <a:rPr lang="en-US" sz="1200" b="0" i="0" kern="1200" smtClean="0">
-                <a:solidFill>
-                  <a:schemeClr val="tx1"/>
-                </a:solidFill>
-                <a:effectLst/>
-                <a:latin typeface="+mn-lt"/>
-                <a:ea typeface="+mn-ea"/>
-                <a:cs typeface="+mn-cs"/>
-              </a:rPr>
-              <a:t/>
-            </a:r>
             <a:br>
-              <a:rPr lang="en-US" sz="1200" b="0" i="0" kern="1200" smtClean="0">
+              <a:rPr lang="en-US" sz="1200" b="0" i="0" kern="1200">
                 <a:solidFill>
                   <a:schemeClr val="tx1"/>
                 </a:solidFill>
@@ -1820,7 +1835,7 @@
               </a:rPr>
             </a:br>
             <a:r>
-              <a:rPr lang="en-US" sz="1200" b="0" i="0" kern="1200" smtClean="0">
+              <a:rPr lang="en-US" sz="1200" b="0" i="0" kern="1200">
                 <a:solidFill>
                   <a:schemeClr val="tx1"/>
                 </a:solidFill>
@@ -1832,7 +1847,7 @@
               <a:t>Then, to achieve this, LGE came</a:t>
             </a:r>
             <a:r>
-              <a:rPr lang="en-US" sz="1200" b="0" i="0" kern="1200" baseline="0" smtClean="0">
+              <a:rPr lang="en-US" sz="1200" b="0" i="0" kern="1200" baseline="0">
                 <a:solidFill>
                   <a:schemeClr val="tx1"/>
                 </a:solidFill>
@@ -1841,29 +1856,8 @@
                 <a:ea typeface="+mn-ea"/>
                 <a:cs typeface="+mn-cs"/>
               </a:rPr>
-              <a:t> up with a solution: Separate the DCM architecture into two partitions using </a:t>
-            </a:r>
-            <a:r>
-              <a:rPr lang="en-US" sz="1200" b="0" i="0" kern="1200" baseline="0" smtClean="0">
-                <a:solidFill>
-                  <a:schemeClr val="tx1"/>
-                </a:solidFill>
-                <a:effectLst/>
-                <a:latin typeface="+mn-lt"/>
-                <a:ea typeface="+mn-ea"/>
-                <a:cs typeface="+mn-cs"/>
-              </a:rPr>
-              <a:t>Linux container technology:</a:t>
-            </a:r>
-            <a:endParaRPr lang="en-US" sz="1200" b="0" i="0" kern="1200" baseline="0" smtClean="0">
-              <a:solidFill>
-                <a:schemeClr val="tx1"/>
-              </a:solidFill>
-              <a:effectLst/>
-              <a:latin typeface="+mn-lt"/>
-              <a:ea typeface="+mn-ea"/>
-              <a:cs typeface="+mn-cs"/>
-            </a:endParaRPr>
+              <a:t> up with a solution: Separate the DCM architecture into two partitions using Linux container technology:</a:t>
+            </a:r>
           </a:p>
           <a:p>
             <a:pPr marL="171450" indent="-171450">
@@ -1871,7 +1865,7 @@
               <a:buChar char="-"/>
             </a:pPr>
             <a:r>
-              <a:rPr lang="en-US" sz="1200" b="0" i="0" kern="1200" baseline="0" smtClean="0">
+              <a:rPr lang="en-US" sz="1200" b="0" i="0" kern="1200" baseline="0">
                 <a:solidFill>
                   <a:schemeClr val="tx1"/>
                 </a:solidFill>
@@ -1889,7 +1883,7 @@
               <a:buChar char="-"/>
             </a:pPr>
             <a:r>
-              <a:rPr lang="en-US" sz="1200" b="0" i="0" kern="1200" baseline="0" smtClean="0">
+              <a:rPr lang="en-US" sz="1200" b="0" i="0" kern="1200" baseline="0">
                 <a:solidFill>
                   <a:schemeClr val="tx1"/>
                 </a:solidFill>
@@ -1900,18 +1894,9 @@
               </a:rPr>
               <a:t>And The Internal container will hosts the components which require access to the CAN bus.</a:t>
             </a:r>
+          </a:p>
+          <a:p>
             <a:endParaRPr lang="en-US" sz="1200" b="0" i="0" kern="1200" baseline="0">
-              <a:solidFill>
-                <a:schemeClr val="tx1"/>
-              </a:solidFill>
-              <a:effectLst/>
-              <a:latin typeface="+mn-lt"/>
-              <a:ea typeface="+mn-ea"/>
-              <a:cs typeface="+mn-cs"/>
-            </a:endParaRPr>
-          </a:p>
-          <a:p>
-            <a:endParaRPr lang="en-US" sz="1200" b="0" i="0" kern="1200" baseline="0" smtClean="0">
               <a:solidFill>
                 <a:schemeClr val="tx1"/>
               </a:solidFill>
@@ -2004,57 +1989,48 @@
           <a:lstStyle/>
           <a:p>
             <a:r>
-              <a:rPr lang="en-US" smtClean="0"/>
+              <a:rPr lang="en-US"/>
               <a:t>RemoteDiag</a:t>
             </a:r>
             <a:r>
-              <a:rPr lang="en-US" baseline="0" smtClean="0"/>
+              <a:rPr lang="en-US" baseline="0"/>
               <a:t> is responsible for processing diagnotics for each ECU and uploading diagnostic data to the OEM server</a:t>
             </a:r>
           </a:p>
           <a:p>
             <a:r>
-              <a:rPr lang="en-US" baseline="0" smtClean="0"/>
+              <a:rPr lang="en-US" baseline="0"/>
               <a:t>Currently, RemoteDiag has two main communication paths: </a:t>
             </a:r>
           </a:p>
           <a:p>
             <a:r>
-              <a:rPr lang="en-US" baseline="0" smtClean="0"/>
+              <a:rPr lang="en-US" baseline="0"/>
               <a:t>One with the OEM server (the red flow), for direct diagnostic commands.</a:t>
             </a:r>
           </a:p>
           <a:p>
             <a:r>
-              <a:rPr lang="en-US" baseline="0" smtClean="0"/>
-              <a:t>And The other one with the MM ECU (the pink flow), for OTA updates</a:t>
-            </a:r>
-            <a:r>
-              <a:rPr lang="en-US" baseline="0" smtClean="0"/>
-              <a:t>.</a:t>
-            </a:r>
-          </a:p>
-          <a:p>
-            <a:r>
-              <a:rPr lang="en-US" baseline="0" smtClean="0"/>
+              <a:rPr lang="en-US" baseline="0"/>
+              <a:t>And The other one with the MM ECU (the pink flow), for OTA updates.</a:t>
+            </a:r>
+          </a:p>
+          <a:p>
+            <a:r>
+              <a:rPr lang="en-US" baseline="0"/>
               <a:t>Then, the diagnostic commands will be sent to OnBoardClient then go to Internal CAN bus.</a:t>
             </a:r>
-            <a:endParaRPr lang="en-US" baseline="0" smtClean="0"/>
-          </a:p>
-          <a:p>
-            <a:endParaRPr lang="en-US" smtClean="0"/>
-          </a:p>
-          <a:p>
-            <a:r>
-              <a:rPr lang="en-US" smtClean="0"/>
-              <a:t>However</a:t>
-            </a:r>
-            <a:r>
-              <a:rPr lang="en-US" smtClean="0"/>
-              <a:t>,</a:t>
-            </a:r>
-            <a:r>
-              <a:rPr lang="en-US" baseline="0" smtClean="0"/>
+          </a:p>
+          <a:p>
+            <a:endParaRPr lang="en-US"/>
+          </a:p>
+          <a:p>
+            <a:r>
+              <a:rPr lang="en-US"/>
+              <a:t>However,</a:t>
+            </a:r>
+            <a:r>
+              <a:rPr lang="en-US" baseline="0"/>
               <a:t> there are security risks in the current design:</a:t>
             </a:r>
           </a:p>
@@ -2064,7 +2040,7 @@
               <a:buChar char="-"/>
             </a:pPr>
             <a:r>
-              <a:rPr lang="en-US" baseline="0" smtClean="0"/>
+              <a:rPr lang="en-US" baseline="0"/>
               <a:t>The communication path between RemoteDiag and the MM ECU routes in the EP container. If the EP container is compromised, this communication could be exposed to an attacker.</a:t>
             </a:r>
           </a:p>
@@ -2074,11 +2050,11 @@
               <a:buChar char="-"/>
             </a:pPr>
             <a:r>
-              <a:rPr lang="en-US" baseline="0" smtClean="0"/>
+              <a:rPr lang="en-US" baseline="0"/>
               <a:t>And, OEM also requests that </a:t>
             </a:r>
             <a:r>
-              <a:rPr lang="en-US" sz="1200" b="1" smtClean="0"/>
+              <a:rPr lang="en-US" sz="1200" b="1"/>
               <a:t>unauthorized reprogramming requests should be filtered</a:t>
             </a:r>
           </a:p>
@@ -2087,7 +2063,7 @@
               <a:buFontTx/>
               <a:buNone/>
             </a:pPr>
-            <a:endParaRPr lang="en-US" sz="1200" b="1" baseline="0" smtClean="0"/>
+            <a:endParaRPr lang="en-US" sz="1200" b="1" baseline="0"/>
           </a:p>
           <a:p>
             <a:pPr marL="0" indent="0">
@@ -2095,7 +2071,7 @@
               <a:buNone/>
             </a:pPr>
             <a:r>
-              <a:rPr lang="en-US" sz="1200" b="0" i="0" kern="1200" smtClean="0">
+              <a:rPr lang="en-US" sz="1200" b="0" i="0" kern="1200">
                 <a:solidFill>
                   <a:schemeClr val="tx1"/>
                 </a:solidFill>
@@ -2107,7 +2083,7 @@
               <a:t>As a result, the internal architecture of</a:t>
             </a:r>
             <a:r>
-              <a:rPr lang="en-US" sz="1200" b="0" i="0" kern="1200" baseline="0" smtClean="0">
+              <a:rPr lang="en-US" sz="1200" b="0" i="0" kern="1200" baseline="0">
                 <a:solidFill>
                   <a:schemeClr val="tx1"/>
                 </a:solidFill>
@@ -2119,7 +2095,7 @@
               <a:t> RemoteDiag</a:t>
             </a:r>
             <a:r>
-              <a:rPr lang="en-US" sz="1200" b="0" i="0" kern="1200" smtClean="0">
+              <a:rPr lang="en-US" sz="1200" b="0" i="0" kern="1200">
                 <a:solidFill>
                   <a:schemeClr val="tx1"/>
                 </a:solidFill>
@@ -2130,7 +2106,7 @@
               </a:rPr>
               <a:t> and communication flow need to be redesigned so that they are aligned with the new container architecture.”</a:t>
             </a:r>
-            <a:endParaRPr lang="en-US" b="0" baseline="0" smtClean="0"/>
+            <a:endParaRPr lang="en-US" b="0" baseline="0"/>
           </a:p>
           <a:p>
             <a:pPr marL="171450" indent="-171450">
@@ -2222,11 +2198,11 @@
           <a:lstStyle/>
           <a:p>
             <a:r>
-              <a:rPr lang="en-US" smtClean="0"/>
+              <a:rPr lang="en-US"/>
               <a:t>Base on OEM requirements</a:t>
             </a:r>
             <a:r>
-              <a:rPr lang="en-US" baseline="0" smtClean="0"/>
+              <a:rPr lang="en-US" baseline="0"/>
               <a:t> and security perspective, I extract the functional requirements as shown in the table.</a:t>
             </a:r>
             <a:endParaRPr lang="en-US"/>
@@ -2314,29 +2290,24 @@
           <a:lstStyle/>
           <a:p>
             <a:r>
-              <a:rPr lang="en-US" smtClean="0"/>
+              <a:rPr lang="en-US"/>
               <a:t>Here</a:t>
             </a:r>
             <a:r>
-              <a:rPr lang="en-US" baseline="0" smtClean="0"/>
-              <a:t> is the quality attribute table which I’m concerning</a:t>
-            </a:r>
-            <a:r>
-              <a:rPr lang="en-US" baseline="0" smtClean="0"/>
-              <a:t>.</a:t>
+              <a:rPr lang="en-US" baseline="0"/>
+              <a:t> is the quality attribute table which I’m concerning.</a:t>
             </a:r>
             <a:br>
-              <a:rPr lang="en-US" baseline="0" smtClean="0"/>
+              <a:rPr lang="en-US" baseline="0"/>
             </a:br>
             <a:r>
-              <a:rPr lang="en-US" baseline="0" smtClean="0"/>
+              <a:rPr lang="en-US" baseline="0"/>
               <a:t>The table describes about QA scenarios and their measurement</a:t>
             </a:r>
-            <a:endParaRPr lang="en-US" baseline="0" smtClean="0"/>
-          </a:p>
-          <a:p>
-            <a:r>
-              <a:rPr lang="en-US" baseline="0" smtClean="0"/>
+          </a:p>
+          <a:p>
+            <a:r>
+              <a:rPr lang="en-US" baseline="0"/>
               <a:t>Basically, I focus on Security attributes. Then, Modifiability and Maintainability.</a:t>
             </a:r>
             <a:endParaRPr lang="en-US"/>
@@ -2424,48 +2395,80 @@
           <a:lstStyle/>
           <a:p>
             <a:r>
-              <a:rPr lang="en-US" smtClean="0"/>
+              <a:rPr lang="en-US" dirty="0"/>
               <a:t>To satisfy</a:t>
             </a:r>
             <a:r>
-              <a:rPr lang="en-US" baseline="0" smtClean="0"/>
+              <a:rPr lang="en-US" baseline="0" dirty="0"/>
               <a:t> OEM security requirements, </a:t>
             </a:r>
             <a:r>
-              <a:rPr lang="en-US" smtClean="0"/>
+              <a:rPr lang="en-US" dirty="0"/>
               <a:t>I</a:t>
             </a:r>
             <a:r>
-              <a:rPr lang="en-US" baseline="0" smtClean="0"/>
+              <a:rPr lang="en-US" baseline="0" dirty="0"/>
               <a:t> will come up with 3 design alternatives.</a:t>
             </a:r>
           </a:p>
           <a:p>
             <a:r>
-              <a:rPr lang="en-US" baseline="0" smtClean="0"/>
-              <a:t>As shown in the slide, this is the first alternatives: Alternative A: Split RemoteDiag.</a:t>
-            </a:r>
-          </a:p>
-          <a:p>
-            <a:endParaRPr lang="en-US" baseline="0" smtClean="0"/>
-          </a:p>
-          <a:p>
-            <a:r>
-              <a:rPr lang="en-US" baseline="0" smtClean="0"/>
-              <a:t>This design will separate RemoteDiag responsibilities into 2 applications:</a:t>
+              <a:rPr lang="en-US" baseline="0" dirty="0"/>
+              <a:t>As shown in the slide, this is the first alternatives: Alternative A: Split </a:t>
+            </a:r>
+            <a:r>
+              <a:rPr lang="en-US" baseline="0" dirty="0" err="1"/>
+              <a:t>RemoteDiag</a:t>
+            </a:r>
+            <a:r>
+              <a:rPr lang="en-US" baseline="0" dirty="0"/>
+              <a:t>.</a:t>
+            </a:r>
+          </a:p>
+          <a:p>
+            <a:endParaRPr lang="en-US" baseline="0" dirty="0"/>
+          </a:p>
+          <a:p>
+            <a:r>
+              <a:rPr lang="en-US" baseline="0" dirty="0"/>
+              <a:t>This design will separate </a:t>
+            </a:r>
+            <a:r>
+              <a:rPr lang="en-US" baseline="0" dirty="0" err="1"/>
+              <a:t>RemoteDiag</a:t>
+            </a:r>
+            <a:r>
+              <a:rPr lang="en-US" baseline="0" dirty="0"/>
+              <a:t> responsibilities into 2 applications:</a:t>
             </a:r>
             <a:br>
-              <a:rPr lang="en-US" baseline="0" smtClean="0"/>
+              <a:rPr lang="en-US" baseline="0" dirty="0"/>
             </a:br>
             <a:r>
-              <a:rPr lang="en-US" baseline="0" smtClean="0"/>
-              <a:t>- RemoteDiag locates in EP container to handle diagnostic commands from OEM server.</a:t>
-            </a:r>
-          </a:p>
-          <a:p>
-            <a:r>
-              <a:rPr lang="en-US" baseline="0" smtClean="0"/>
-              <a:t>- RemoteOTA locates in Internal container to handle OTA commands from MM ECU.</a:t>
+              <a:rPr lang="en-US" baseline="0" dirty="0"/>
+              <a:t>- </a:t>
+            </a:r>
+            <a:r>
+              <a:rPr lang="en-US" baseline="0" dirty="0" err="1"/>
+              <a:t>RemoteDiag</a:t>
+            </a:r>
+            <a:r>
+              <a:rPr lang="en-US" baseline="0" dirty="0"/>
+              <a:t> locates in EP container to handle diagnostic commands from OEM server.</a:t>
+            </a:r>
+          </a:p>
+          <a:p>
+            <a:r>
+              <a:rPr lang="en-US" baseline="0" dirty="0"/>
+              <a:t>- </a:t>
+            </a:r>
+            <a:r>
+              <a:rPr lang="en-US" baseline="0" dirty="0" err="1"/>
+              <a:t>RemoteOTA</a:t>
+            </a:r>
+            <a:r>
+              <a:rPr lang="en-US" baseline="0" dirty="0"/>
+              <a:t> locates in Internal container to handle OTA commands from MM ECU.</a:t>
             </a:r>
           </a:p>
           <a:p>
@@ -2474,29 +2477,65 @@
               <a:buNone/>
             </a:pPr>
             <a:r>
-              <a:rPr lang="en-US" baseline="0" smtClean="0"/>
-              <a:t>- As a result, OnBoardClient is responsible for filtering the reprogramming messages and diagnostic priority control</a:t>
-            </a:r>
-          </a:p>
-          <a:p>
-            <a:endParaRPr lang="en-US" smtClean="0"/>
-          </a:p>
-          <a:p>
-            <a:r>
-              <a:rPr lang="en-US" smtClean="0"/>
-              <a:t>The RemoteOTA</a:t>
-            </a:r>
-            <a:r>
-              <a:rPr lang="en-US" baseline="0" smtClean="0"/>
-              <a:t> stay in the same Internal container with OnBoardClient, then they can keep the communication path like RemoteDiag before via binder.</a:t>
-            </a:r>
-          </a:p>
-          <a:p>
-            <a:r>
-              <a:rPr lang="en-US" baseline="0" smtClean="0"/>
-              <a:t>But for RemoteDiag, it will have to create an Unix Domain Socket communication for cross container.</a:t>
-            </a:r>
-            <a:endParaRPr lang="en-US"/>
+              <a:rPr lang="en-US" baseline="0" dirty="0"/>
+              <a:t>- As a result, </a:t>
+            </a:r>
+            <a:r>
+              <a:rPr lang="en-US" baseline="0" dirty="0" err="1"/>
+              <a:t>OnBoardClient</a:t>
+            </a:r>
+            <a:r>
+              <a:rPr lang="en-US" baseline="0" dirty="0"/>
+              <a:t> is responsible for filtering the reprogramming messages and diagnostic priority control</a:t>
+            </a:r>
+          </a:p>
+          <a:p>
+            <a:endParaRPr lang="en-US" dirty="0"/>
+          </a:p>
+          <a:p>
+            <a:r>
+              <a:rPr lang="en-US" dirty="0"/>
+              <a:t>The </a:t>
+            </a:r>
+            <a:r>
+              <a:rPr lang="en-US" dirty="0" err="1"/>
+              <a:t>RemoteOTA</a:t>
+            </a:r>
+            <a:r>
+              <a:rPr lang="en-US" baseline="0" dirty="0"/>
+              <a:t> stay in the same Internal container with </a:t>
+            </a:r>
+            <a:r>
+              <a:rPr lang="en-US" baseline="0" dirty="0" err="1"/>
+              <a:t>OnBoardClient</a:t>
+            </a:r>
+            <a:r>
+              <a:rPr lang="en-US" baseline="0" dirty="0"/>
+              <a:t>, then they can keep the communication path like </a:t>
+            </a:r>
+            <a:r>
+              <a:rPr lang="en-US" baseline="0" dirty="0" err="1"/>
+              <a:t>RemoteDiag</a:t>
+            </a:r>
+            <a:r>
+              <a:rPr lang="en-US" baseline="0" dirty="0"/>
+              <a:t> before via binder.</a:t>
+            </a:r>
+          </a:p>
+          <a:p>
+            <a:r>
+              <a:rPr lang="en-US" baseline="0" dirty="0"/>
+              <a:t>But for </a:t>
+            </a:r>
+            <a:r>
+              <a:rPr lang="en-US" baseline="0" dirty="0" err="1"/>
+              <a:t>RemoteDiag</a:t>
+            </a:r>
+            <a:r>
+              <a:rPr lang="en-US" baseline="0" dirty="0"/>
+              <a:t>, it will have to create an Unix Domain Socket communication for cross container.</a:t>
+            </a:r>
+            <a:endParaRPr lang="en-US" dirty="0"/>
           </a:p>
         </p:txBody>
       </p:sp>
@@ -2581,29 +2620,29 @@
           <a:lstStyle/>
           <a:p>
             <a:r>
-              <a:rPr lang="en-US" smtClean="0"/>
+              <a:rPr lang="en-US"/>
               <a:t>The</a:t>
             </a:r>
             <a:r>
-              <a:rPr lang="en-US" baseline="0" smtClean="0"/>
+              <a:rPr lang="en-US" baseline="0"/>
               <a:t> next is Alternative B: Move RemoteDiag</a:t>
             </a:r>
           </a:p>
           <a:p>
             <a:r>
-              <a:rPr lang="en-US" baseline="0" smtClean="0"/>
+              <a:rPr lang="en-US" baseline="0"/>
               <a:t>With this design, I move the RemoteDiag into Internal container.</a:t>
             </a:r>
           </a:p>
           <a:p>
             <a:r>
-              <a:rPr lang="en-US" baseline="0" smtClean="0"/>
+              <a:rPr lang="en-US" baseline="0"/>
               <a:t>To communicate with Other modules in EP sides, I have to create UDS socket connection between RemoteDiag and those modules.</a:t>
             </a:r>
           </a:p>
           <a:p>
             <a:r>
-              <a:rPr lang="en-US" baseline="0" smtClean="0"/>
+              <a:rPr lang="en-US" baseline="0"/>
               <a:t>This requires other modules in EP sides to change to implement UDS socket server.</a:t>
             </a:r>
           </a:p>
@@ -3370,7 +3409,7 @@
           <p:cNvPr id="7" name="그림 5" descr="백색바탕.png">
             <a:extLst>
               <a:ext uri="{FF2B5EF4-FFF2-40B4-BE49-F238E27FC236}">
-                <a16:creationId xmlns="" xmlns:a16="http://schemas.microsoft.com/office/drawing/2014/main" id="{28873918-42A2-05FA-4A84-F17869DE34CF}"/>
+                <a16:creationId xmlns:a16="http://schemas.microsoft.com/office/drawing/2014/main" id="{28873918-42A2-05FA-4A84-F17869DE34CF}"/>
               </a:ext>
             </a:extLst>
           </p:cNvPr>
@@ -5254,7 +5293,7 @@
           <p:cNvPr id="8" name="TextBox 7">
             <a:extLst>
               <a:ext uri="{FF2B5EF4-FFF2-40B4-BE49-F238E27FC236}">
-                <a16:creationId xmlns="" xmlns:a16="http://schemas.microsoft.com/office/drawing/2014/main" id="{7DC87BF5-B759-FAAB-FE6D-F0E5F640800D}"/>
+                <a16:creationId xmlns:a16="http://schemas.microsoft.com/office/drawing/2014/main" id="{7DC87BF5-B759-FAAB-FE6D-F0E5F640800D}"/>
               </a:ext>
             </a:extLst>
           </p:cNvPr>
@@ -5262,7 +5301,7 @@
           <p:nvPr userDrawn="1">
             <p:extLst>
               <p:ext uri="{1162E1C5-73C7-4A58-AE30-91384D911F3F}">
-                <p184:classification xmlns="" xmlns:p184="http://schemas.microsoft.com/office/powerpoint/2018/4/main" val="hdr"/>
+                <p184:classification xmlns:p184="http://schemas.microsoft.com/office/powerpoint/2018/4/main" val="hdr"/>
               </p:ext>
             </p:extLst>
           </p:nvPr>
@@ -5685,19 +5724,7 @@
           <a:p>
             <a:r>
               <a:rPr lang="en-US"/>
-              <a:t>LGEDV – </a:t>
-            </a:r>
-            <a:r>
-              <a:rPr lang="en-US" smtClean="0"/>
-              <a:t>October</a:t>
-            </a:r>
-            <a:r>
-              <a:rPr lang="en-US" smtClean="0"/>
-              <a:t> </a:t>
-            </a:r>
-            <a:r>
-              <a:rPr lang="en-US"/>
-              <a:t>2026</a:t>
+              <a:t>LGEDV – October 2026</a:t>
             </a:r>
           </a:p>
           <a:p>
@@ -5721,13 +5748,6 @@
   <p:clrMapOvr>
     <a:masterClrMapping/>
   </p:clrMapOvr>
-  <p:timing>
-    <p:tnLst>
-      <p:par>
-        <p:cTn id="1" dur="indefinite" restart="never" nodeType="tmRoot"/>
-      </p:par>
-    </p:tnLst>
-  </p:timing>
 </p:sld>
 </file>
 
@@ -5739,7 +5759,7 @@
         <p:cNvPr id="1" name="">
           <a:extLst>
             <a:ext uri="{FF2B5EF4-FFF2-40B4-BE49-F238E27FC236}">
-              <a16:creationId xmlns="" xmlns:a16="http://schemas.microsoft.com/office/drawing/2014/main" id="{7A3A9F39-394E-5437-993F-29D2F2093B00}"/>
+              <a16:creationId xmlns:a16="http://schemas.microsoft.com/office/drawing/2014/main" id="{7A3A9F39-394E-5437-993F-29D2F2093B00}"/>
             </a:ext>
           </a:extLst>
         </p:cNvPr>
@@ -5759,7 +5779,7 @@
           <p:cNvPr id="13" name="Picture 12">
             <a:extLst>
               <a:ext uri="{FF2B5EF4-FFF2-40B4-BE49-F238E27FC236}">
-                <a16:creationId xmlns="" xmlns:a16="http://schemas.microsoft.com/office/drawing/2014/main" id="{D51D2743-5B87-CC81-8D97-271314E9E8B1}"/>
+                <a16:creationId xmlns:a16="http://schemas.microsoft.com/office/drawing/2014/main" id="{D51D2743-5B87-CC81-8D97-271314E9E8B1}"/>
               </a:ext>
             </a:extLst>
           </p:cNvPr>
@@ -5789,7 +5809,7 @@
           <p:cNvPr id="2" name="Title 1">
             <a:extLst>
               <a:ext uri="{FF2B5EF4-FFF2-40B4-BE49-F238E27FC236}">
-                <a16:creationId xmlns="" xmlns:a16="http://schemas.microsoft.com/office/drawing/2014/main" id="{554F77EA-2B30-AFDC-1349-3C58C2AB9061}"/>
+                <a16:creationId xmlns:a16="http://schemas.microsoft.com/office/drawing/2014/main" id="{554F77EA-2B30-AFDC-1349-3C58C2AB9061}"/>
               </a:ext>
             </a:extLst>
           </p:cNvPr>
@@ -5825,7 +5845,7 @@
           <p:cNvPr id="3" name="Content Placeholder 2">
             <a:extLst>
               <a:ext uri="{FF2B5EF4-FFF2-40B4-BE49-F238E27FC236}">
-                <a16:creationId xmlns="" xmlns:a16="http://schemas.microsoft.com/office/drawing/2014/main" id="{64FB7A4A-CF56-C0BD-9AB9-923B2D043291}"/>
+                <a16:creationId xmlns:a16="http://schemas.microsoft.com/office/drawing/2014/main" id="{64FB7A4A-CF56-C0BD-9AB9-923B2D043291}"/>
               </a:ext>
             </a:extLst>
           </p:cNvPr>
@@ -5862,11 +5882,7 @@
             </a:r>
             <a:r>
               <a:rPr lang="en-US" sz="1800"/>
-              <a:t>the </a:t>
-            </a:r>
-            <a:r>
-              <a:rPr lang="en-US" sz="1800" smtClean="0"/>
-              <a:t>Internal </a:t>
+              <a:t>the Internal </a:t>
             </a:r>
             <a:r>
               <a:rPr lang="en-US" sz="1800" dirty="0"/>
@@ -5915,7 +5931,7 @@
               <a:t>RemoteDiagProxy </a:t>
             </a:r>
             <a:r>
-              <a:rPr lang="en-US" sz="1800" smtClean="0"/>
+              <a:rPr lang="en-US" sz="1800"/>
               <a:t>forwards </a:t>
             </a:r>
             <a:r>
@@ -5942,7 +5958,7 @@
           <p:cNvPr id="11" name="Picture 10">
             <a:extLst>
               <a:ext uri="{FF2B5EF4-FFF2-40B4-BE49-F238E27FC236}">
-                <a16:creationId xmlns="" xmlns:a16="http://schemas.microsoft.com/office/drawing/2014/main" id="{B0A483E6-6ECF-F5F2-5FFC-55A9FD629F07}"/>
+                <a16:creationId xmlns:a16="http://schemas.microsoft.com/office/drawing/2014/main" id="{B0A483E6-6ECF-F5F2-5FFC-55A9FD629F07}"/>
               </a:ext>
             </a:extLst>
           </p:cNvPr>
@@ -5972,7 +5988,7 @@
           <p:cNvPr id="15" name="TextBox 14">
             <a:extLst>
               <a:ext uri="{FF2B5EF4-FFF2-40B4-BE49-F238E27FC236}">
-                <a16:creationId xmlns="" xmlns:a16="http://schemas.microsoft.com/office/drawing/2014/main" id="{12425196-F6FB-6F05-9DFF-490CE43C23AD}"/>
+                <a16:creationId xmlns:a16="http://schemas.microsoft.com/office/drawing/2014/main" id="{12425196-F6FB-6F05-9DFF-490CE43C23AD}"/>
               </a:ext>
             </a:extLst>
           </p:cNvPr>
@@ -6012,13 +6028,6 @@
   <p:clrMapOvr>
     <a:masterClrMapping/>
   </p:clrMapOvr>
-  <p:timing>
-    <p:tnLst>
-      <p:par>
-        <p:cTn id="1" dur="indefinite" restart="never" nodeType="tmRoot"/>
-      </p:par>
-    </p:tnLst>
-  </p:timing>
 </p:sld>
 </file>
 
@@ -6114,7 +6123,7 @@
           <p:cNvPr id="7" name="Table 6">
             <a:extLst>
               <a:ext uri="{FF2B5EF4-FFF2-40B4-BE49-F238E27FC236}">
-                <a16:creationId xmlns="" xmlns:a16="http://schemas.microsoft.com/office/drawing/2014/main" id="{6C8AAA51-C203-CD8B-4B02-DE7401134C21}"/>
+                <a16:creationId xmlns:a16="http://schemas.microsoft.com/office/drawing/2014/main" id="{6C8AAA51-C203-CD8B-4B02-DE7401134C21}"/>
               </a:ext>
             </a:extLst>
           </p:cNvPr>
@@ -6131,7 +6140,7 @@
         </p:nvGraphicFramePr>
         <p:xfrm>
           <a:off x="72428" y="625771"/>
-          <a:ext cx="12050161" cy="5307684"/>
+          <a:ext cx="12050161" cy="5233897"/>
         </p:xfrm>
         <a:graphic>
           <a:graphicData uri="http://schemas.openxmlformats.org/drawingml/2006/table">
@@ -6143,28 +6152,28 @@
                 <a:gridCol w="1149790">
                   <a:extLst>
                     <a:ext uri="{9D8B030D-6E8A-4147-A177-3AD203B41FA5}">
-                      <a16:colId xmlns="" xmlns:a16="http://schemas.microsoft.com/office/drawing/2014/main" val="20000"/>
+                      <a16:colId xmlns:a16="http://schemas.microsoft.com/office/drawing/2014/main" val="20000"/>
                     </a:ext>
                   </a:extLst>
                 </a:gridCol>
                 <a:gridCol w="3648546">
                   <a:extLst>
                     <a:ext uri="{9D8B030D-6E8A-4147-A177-3AD203B41FA5}">
-                      <a16:colId xmlns="" xmlns:a16="http://schemas.microsoft.com/office/drawing/2014/main" val="20001"/>
+                      <a16:colId xmlns:a16="http://schemas.microsoft.com/office/drawing/2014/main" val="20001"/>
                     </a:ext>
                   </a:extLst>
                 </a:gridCol>
                 <a:gridCol w="3440317">
                   <a:extLst>
                     <a:ext uri="{9D8B030D-6E8A-4147-A177-3AD203B41FA5}">
-                      <a16:colId xmlns="" xmlns:a16="http://schemas.microsoft.com/office/drawing/2014/main" val="2530683369"/>
+                      <a16:colId xmlns:a16="http://schemas.microsoft.com/office/drawing/2014/main" val="2530683369"/>
                     </a:ext>
                   </a:extLst>
                 </a:gridCol>
                 <a:gridCol w="3811508">
                   <a:extLst>
                     <a:ext uri="{9D8B030D-6E8A-4147-A177-3AD203B41FA5}">
-                      <a16:colId xmlns="" xmlns:a16="http://schemas.microsoft.com/office/drawing/2014/main" val="20002"/>
+                      <a16:colId xmlns:a16="http://schemas.microsoft.com/office/drawing/2014/main" val="20002"/>
                     </a:ext>
                   </a:extLst>
                 </a:gridCol>
@@ -6503,7 +6512,7 @@
                 </a:tc>
                 <a:extLst>
                   <a:ext uri="{0D108BD9-81ED-4DB2-BD59-A6C34878D82A}">
-                    <a16:rowId xmlns="" xmlns:a16="http://schemas.microsoft.com/office/drawing/2014/main" val="10000"/>
+                    <a16:rowId xmlns:a16="http://schemas.microsoft.com/office/drawing/2014/main" val="10000"/>
                   </a:ext>
                 </a:extLst>
               </a:tr>
@@ -6958,7 +6967,7 @@
                 </a:tc>
                 <a:extLst>
                   <a:ext uri="{0D108BD9-81ED-4DB2-BD59-A6C34878D82A}">
-                    <a16:rowId xmlns="" xmlns:a16="http://schemas.microsoft.com/office/drawing/2014/main" val="10001"/>
+                    <a16:rowId xmlns:a16="http://schemas.microsoft.com/office/drawing/2014/main" val="10001"/>
                   </a:ext>
                 </a:extLst>
               </a:tr>
@@ -7407,7 +7416,7 @@
                 </a:tc>
                 <a:extLst>
                   <a:ext uri="{0D108BD9-81ED-4DB2-BD59-A6C34878D82A}">
-                    <a16:rowId xmlns="" xmlns:a16="http://schemas.microsoft.com/office/drawing/2014/main" val="10002"/>
+                    <a16:rowId xmlns:a16="http://schemas.microsoft.com/office/drawing/2014/main" val="10002"/>
                   </a:ext>
                 </a:extLst>
               </a:tr>
@@ -7996,7 +8005,7 @@
                 </a:tc>
                 <a:extLst>
                   <a:ext uri="{0D108BD9-81ED-4DB2-BD59-A6C34878D82A}">
-                    <a16:rowId xmlns="" xmlns:a16="http://schemas.microsoft.com/office/drawing/2014/main" val="10003"/>
+                    <a16:rowId xmlns:a16="http://schemas.microsoft.com/office/drawing/2014/main" val="10003"/>
                   </a:ext>
                 </a:extLst>
               </a:tr>
@@ -8394,7 +8403,7 @@
                         </a:lnSpc>
                       </a:pPr>
                       <a:r>
-                        <a:rPr kumimoji="0" lang="en-US" sz="1300" b="1" i="0" u="none" strike="noStrike" kern="1200" cap="none" spc="0" normalizeH="0" baseline="0" noProof="0" smtClean="0">
+                        <a:rPr kumimoji="0" lang="en-US" sz="1300" b="1" i="0" u="none" strike="noStrike" kern="1200" cap="none" spc="0" normalizeH="0" baseline="0" noProof="0">
                           <a:ln>
                             <a:noFill/>
                           </a:ln>
@@ -8438,24 +8447,17 @@
                           <a:latin typeface="+mn-lt"/>
                           <a:cs typeface="Arial" panose="020B0604020202020204" pitchFamily="34" charset="0"/>
                         </a:rPr>
-                        <a:t>existing </a:t>
+                        <a:t>existing modules but a </a:t>
                       </a:r>
                       <a:r>
-                        <a:rPr lang="en-US" sz="1300" b="0" baseline="0" smtClean="0">
-                          <a:latin typeface="+mn-lt"/>
-                          <a:cs typeface="Arial" panose="020B0604020202020204" pitchFamily="34" charset="0"/>
-                        </a:rPr>
-                        <a:t>modules but a </a:t>
-                      </a:r>
-                      <a:r>
-                        <a:rPr lang="en-US" sz="1300" b="1" baseline="0" smtClean="0">
+                        <a:rPr lang="en-US" sz="1300" b="1" baseline="0">
                           <a:latin typeface="+mn-lt"/>
                           <a:cs typeface="Arial" panose="020B0604020202020204" pitchFamily="34" charset="0"/>
                         </a:rPr>
                         <a:t>new module</a:t>
                       </a:r>
                       <a:r>
-                        <a:rPr lang="en-US" sz="1300" b="0" baseline="0" smtClean="0">
+                        <a:rPr lang="en-US" sz="1300" b="0" baseline="0">
                           <a:latin typeface="+mn-lt"/>
                           <a:cs typeface="Arial" panose="020B0604020202020204" pitchFamily="34" charset="0"/>
                         </a:rPr>
@@ -8473,14 +8475,7 @@
                           <a:latin typeface="+mn-lt"/>
                           <a:cs typeface="Arial" panose="020B0604020202020204" pitchFamily="34" charset="0"/>
                         </a:rPr>
-                        <a:t>binder </a:t>
-                      </a:r>
-                      <a:r>
-                        <a:rPr lang="en-US" sz="1300" b="0" baseline="0" smtClean="0">
-                          <a:latin typeface="+mn-lt"/>
-                          <a:cs typeface="Arial" panose="020B0604020202020204" pitchFamily="34" charset="0"/>
-                        </a:rPr>
-                        <a:t>interface. </a:t>
+                        <a:t>binder interface. </a:t>
                       </a:r>
                       <a:endParaRPr lang="en-US" sz="1300" b="0" baseline="0" dirty="0">
                         <a:latin typeface="+mn-lt"/>
@@ -8530,7 +8525,7 @@
                 </a:tc>
                 <a:extLst>
                   <a:ext uri="{0D108BD9-81ED-4DB2-BD59-A6C34878D82A}">
-                    <a16:rowId xmlns="" xmlns:a16="http://schemas.microsoft.com/office/drawing/2014/main" val="10004"/>
+                    <a16:rowId xmlns:a16="http://schemas.microsoft.com/office/drawing/2014/main" val="10004"/>
                   </a:ext>
                 </a:extLst>
               </a:tr>
@@ -8806,7 +8801,7 @@
                 </a:tc>
                 <a:extLst>
                   <a:ext uri="{0D108BD9-81ED-4DB2-BD59-A6C34878D82A}">
-                    <a16:rowId xmlns="" xmlns:a16="http://schemas.microsoft.com/office/drawing/2014/main" val="10006"/>
+                    <a16:rowId xmlns:a16="http://schemas.microsoft.com/office/drawing/2014/main" val="10006"/>
                   </a:ext>
                 </a:extLst>
               </a:tr>
@@ -8889,7 +8884,7 @@
           <p:cNvPr id="9" name="Picture 2" descr="체크 표시 클립 아트. 무료 다운로드. | Creazilla">
             <a:extLst>
               <a:ext uri="{FF2B5EF4-FFF2-40B4-BE49-F238E27FC236}">
-                <a16:creationId xmlns="" xmlns:a16="http://schemas.microsoft.com/office/drawing/2014/main" id="{07DB846E-8DD2-9BB2-88FF-8A7E0BD6CA84}"/>
+                <a16:creationId xmlns:a16="http://schemas.microsoft.com/office/drawing/2014/main" id="{07DB846E-8DD2-9BB2-88FF-8A7E0BD6CA84}"/>
               </a:ext>
             </a:extLst>
           </p:cNvPr>
@@ -8941,13 +8936,6 @@
   <p:clrMapOvr>
     <a:masterClrMapping/>
   </p:clrMapOvr>
-  <p:timing>
-    <p:tnLst>
-      <p:par>
-        <p:cTn id="1" dur="indefinite" restart="never" nodeType="tmRoot"/>
-      </p:par>
-    </p:tnLst>
-  </p:timing>
 </p:sld>
 </file>
 
@@ -8973,7 +8961,7 @@
           <p:cNvPr id="2" name="Title 1">
             <a:extLst>
               <a:ext uri="{FF2B5EF4-FFF2-40B4-BE49-F238E27FC236}">
-                <a16:creationId xmlns="" xmlns:a16="http://schemas.microsoft.com/office/drawing/2014/main" id="{4CA99A5D-DD39-1919-FD58-65B06FAFDE0F}"/>
+                <a16:creationId xmlns:a16="http://schemas.microsoft.com/office/drawing/2014/main" id="{4CA99A5D-DD39-1919-FD58-65B06FAFDE0F}"/>
               </a:ext>
             </a:extLst>
           </p:cNvPr>
@@ -8991,15 +8979,7 @@
           <a:p>
             <a:r>
               <a:rPr lang="en-US"/>
-              <a:t>Detail </a:t>
-            </a:r>
-            <a:r>
-              <a:rPr lang="en-US" smtClean="0"/>
-              <a:t>design Alt-C: </a:t>
-            </a:r>
-            <a:r>
-              <a:rPr lang="en-US"/>
-              <a:t>Forward </a:t>
+              <a:t>Detail design Alt-C: Forward </a:t>
             </a:r>
             <a:r>
               <a:rPr lang="en-US" dirty="0"/>
@@ -9126,13 +9106,6 @@
   <p:clrMapOvr>
     <a:masterClrMapping/>
   </p:clrMapOvr>
-  <p:timing>
-    <p:tnLst>
-      <p:par>
-        <p:cTn id="1" dur="indefinite" restart="never" nodeType="tmRoot"/>
-      </p:par>
-    </p:tnLst>
-  </p:timing>
 </p:sld>
 </file>
 
@@ -9158,7 +9131,7 @@
           <p:cNvPr id="2" name="Title 1">
             <a:extLst>
               <a:ext uri="{FF2B5EF4-FFF2-40B4-BE49-F238E27FC236}">
-                <a16:creationId xmlns="" xmlns:a16="http://schemas.microsoft.com/office/drawing/2014/main" id="{B643E24B-1160-F6BA-5A0C-DB3B3DD9CD8A}"/>
+                <a16:creationId xmlns:a16="http://schemas.microsoft.com/office/drawing/2014/main" id="{B643E24B-1160-F6BA-5A0C-DB3B3DD9CD8A}"/>
               </a:ext>
             </a:extLst>
           </p:cNvPr>
@@ -9176,15 +9149,7 @@
           <a:p>
             <a:r>
               <a:rPr lang="en-US"/>
-              <a:t>Detail </a:t>
-            </a:r>
-            <a:r>
-              <a:rPr lang="en-US" smtClean="0"/>
-              <a:t>design Alt-C: </a:t>
-            </a:r>
-            <a:r>
-              <a:rPr lang="en-US"/>
-              <a:t>Filter </a:t>
+              <a:t>Detail design Alt-C: Filter </a:t>
             </a:r>
             <a:r>
               <a:rPr lang="en-US" dirty="0"/>
@@ -9256,13 +9221,6 @@
   <p:clrMapOvr>
     <a:masterClrMapping/>
   </p:clrMapOvr>
-  <p:timing>
-    <p:tnLst>
-      <p:par>
-        <p:cTn id="1" dur="indefinite" restart="never" nodeType="tmRoot"/>
-      </p:par>
-    </p:tnLst>
-  </p:timing>
 </p:sld>
 </file>
 
@@ -9372,13 +9330,6 @@
   <p:clrMapOvr>
     <a:masterClrMapping/>
   </p:clrMapOvr>
-  <p:timing>
-    <p:tnLst>
-      <p:par>
-        <p:cTn id="1" dur="indefinite" restart="never" nodeType="tmRoot"/>
-      </p:par>
-    </p:tnLst>
-  </p:timing>
 </p:sld>
 </file>
 
@@ -9494,13 +9445,6 @@
   <p:clrMapOvr>
     <a:masterClrMapping/>
   </p:clrMapOvr>
-  <p:timing>
-    <p:tnLst>
-      <p:par>
-        <p:cTn id="1" dur="indefinite" restart="never" nodeType="tmRoot"/>
-      </p:par>
-    </p:tnLst>
-  </p:timing>
 </p:sld>
 </file>
 
@@ -9591,13 +9535,6 @@
   <p:clrMapOvr>
     <a:masterClrMapping/>
   </p:clrMapOvr>
-  <p:timing>
-    <p:tnLst>
-      <p:par>
-        <p:cTn id="1" dur="indefinite" restart="never" nodeType="tmRoot"/>
-      </p:par>
-    </p:tnLst>
-  </p:timing>
 </p:sld>
 </file>
 
@@ -9679,13 +9616,6 @@
   <p:clrMapOvr>
     <a:masterClrMapping/>
   </p:clrMapOvr>
-  <p:timing>
-    <p:tnLst>
-      <p:par>
-        <p:cTn id="1" dur="indefinite" restart="never" nodeType="tmRoot"/>
-      </p:par>
-    </p:tnLst>
-  </p:timing>
 </p:sld>
 </file>
 
@@ -9711,7 +9641,7 @@
           <p:cNvPr id="2" name="Title 1">
             <a:extLst>
               <a:ext uri="{FF2B5EF4-FFF2-40B4-BE49-F238E27FC236}">
-                <a16:creationId xmlns="" xmlns:a16="http://schemas.microsoft.com/office/drawing/2014/main" id="{65C86E6E-BE59-7A7B-6BE9-16A0A094C3D6}"/>
+                <a16:creationId xmlns:a16="http://schemas.microsoft.com/office/drawing/2014/main" id="{65C86E6E-BE59-7A7B-6BE9-16A0A094C3D6}"/>
               </a:ext>
             </a:extLst>
           </p:cNvPr>
@@ -9739,7 +9669,7 @@
           <p:cNvPr id="7" name="Content Placeholder 6">
             <a:extLst>
               <a:ext uri="{FF2B5EF4-FFF2-40B4-BE49-F238E27FC236}">
-                <a16:creationId xmlns="" xmlns:a16="http://schemas.microsoft.com/office/drawing/2014/main" id="{AD4A4EC6-9BB8-2849-8D75-05C44DE9A384}"/>
+                <a16:creationId xmlns:a16="http://schemas.microsoft.com/office/drawing/2014/main" id="{AD4A4EC6-9BB8-2849-8D75-05C44DE9A384}"/>
               </a:ext>
             </a:extLst>
           </p:cNvPr>
@@ -9771,7 +9701,7 @@
           <p:cNvPr id="9" name="Picture 8">
             <a:extLst>
               <a:ext uri="{FF2B5EF4-FFF2-40B4-BE49-F238E27FC236}">
-                <a16:creationId xmlns="" xmlns:a16="http://schemas.microsoft.com/office/drawing/2014/main" id="{C985C62C-76E5-84A1-DEF1-FC486F2BF179}"/>
+                <a16:creationId xmlns:a16="http://schemas.microsoft.com/office/drawing/2014/main" id="{C985C62C-76E5-84A1-DEF1-FC486F2BF179}"/>
               </a:ext>
             </a:extLst>
           </p:cNvPr>
@@ -9806,13 +9736,6 @@
   <p:clrMapOvr>
     <a:masterClrMapping/>
   </p:clrMapOvr>
-  <p:timing>
-    <p:tnLst>
-      <p:par>
-        <p:cTn id="1" dur="indefinite" restart="never" nodeType="tmRoot"/>
-      </p:par>
-    </p:tnLst>
-  </p:timing>
 </p:sld>
 </file>
 
@@ -9878,10 +9801,9 @@
           <a:lstStyle/>
           <a:p>
             <a:r>
-              <a:rPr lang="en-US" smtClean="0"/>
+              <a:rPr lang="en-US"/>
               <a:t>Detai design: IPC connection setup</a:t>
             </a:r>
-            <a:endParaRPr lang="en-US"/>
           </a:p>
         </p:txBody>
       </p:sp>
@@ -9919,13 +9841,6 @@
   <p:clrMapOvr>
     <a:masterClrMapping/>
   </p:clrMapOvr>
-  <p:timing>
-    <p:tnLst>
-      <p:par>
-        <p:cTn id="1" dur="indefinite" restart="never" nodeType="tmRoot"/>
-      </p:par>
-    </p:tnLst>
-  </p:timing>
 </p:sld>
 </file>
 
@@ -15282,13 +15197,6 @@
   <p:clrMapOvr>
     <a:masterClrMapping/>
   </p:clrMapOvr>
-  <p:timing>
-    <p:tnLst>
-      <p:par>
-        <p:cTn id="1" dur="indefinite" restart="never" nodeType="tmRoot"/>
-      </p:par>
-    </p:tnLst>
-  </p:timing>
 </p:sld>
 </file>
 
@@ -15325,10 +15233,9 @@
           <a:lstStyle/>
           <a:p>
             <a:r>
-              <a:rPr lang="en-US" smtClean="0"/>
+              <a:rPr lang="en-US"/>
               <a:t>Detail design: API request-response </a:t>
             </a:r>
-            <a:endParaRPr lang="en-US"/>
           </a:p>
         </p:txBody>
       </p:sp>
@@ -15395,13 +15302,6 @@
   <p:clrMapOvr>
     <a:masterClrMapping/>
   </p:clrMapOvr>
-  <p:timing>
-    <p:tnLst>
-      <p:par>
-        <p:cTn id="1" dur="indefinite" restart="never" nodeType="tmRoot"/>
-      </p:par>
-    </p:tnLst>
-  </p:timing>
 </p:sld>
 </file>
 
@@ -15448,13 +15348,8 @@
             <a:pPr algn="r"/>
             <a:r>
               <a:rPr lang="en-US"/>
-              <a:t>Detail design: </a:t>
-            </a:r>
-            <a:r>
-              <a:rPr lang="en-US" smtClean="0"/>
-              <a:t>Re-connect mechanism</a:t>
-            </a:r>
-            <a:endParaRPr lang="en-US"/>
+              <a:t>Detail design: Re-connect mechanism</a:t>
+            </a:r>
           </a:p>
         </p:txBody>
       </p:sp>
@@ -15551,13 +15446,6 @@
   <p:clrMapOvr>
     <a:masterClrMapping/>
   </p:clrMapOvr>
-  <p:timing>
-    <p:tnLst>
-      <p:par>
-        <p:cTn id="1" dur="indefinite" restart="never" nodeType="tmRoot"/>
-      </p:par>
-    </p:tnLst>
-  </p:timing>
 </p:sld>
 </file>
 
@@ -15569,7 +15457,7 @@
         <p:cNvPr id="1" name="">
           <a:extLst>
             <a:ext uri="{FF2B5EF4-FFF2-40B4-BE49-F238E27FC236}">
-              <a16:creationId xmlns="" xmlns:a16="http://schemas.microsoft.com/office/drawing/2014/main" id="{498DF60D-9815-C72C-E039-867021DB81A5}"/>
+              <a16:creationId xmlns:a16="http://schemas.microsoft.com/office/drawing/2014/main" id="{498DF60D-9815-C72C-E039-867021DB81A5}"/>
             </a:ext>
           </a:extLst>
         </p:cNvPr>
@@ -15589,7 +15477,7 @@
           <p:cNvPr id="2" name="Title 1">
             <a:extLst>
               <a:ext uri="{FF2B5EF4-FFF2-40B4-BE49-F238E27FC236}">
-                <a16:creationId xmlns="" xmlns:a16="http://schemas.microsoft.com/office/drawing/2014/main" id="{ED5429F4-17DA-8C65-E10D-772D18EA9959}"/>
+                <a16:creationId xmlns:a16="http://schemas.microsoft.com/office/drawing/2014/main" id="{ED5429F4-17DA-8C65-E10D-772D18EA9959}"/>
               </a:ext>
             </a:extLst>
           </p:cNvPr>
@@ -15624,7 +15512,7 @@
           <p:cNvPr id="7" name="Content Placeholder 6">
             <a:extLst>
               <a:ext uri="{FF2B5EF4-FFF2-40B4-BE49-F238E27FC236}">
-                <a16:creationId xmlns="" xmlns:a16="http://schemas.microsoft.com/office/drawing/2014/main" id="{C9BB87FF-FFF5-432F-99E1-3CFA176F711C}"/>
+                <a16:creationId xmlns:a16="http://schemas.microsoft.com/office/drawing/2014/main" id="{C9BB87FF-FFF5-432F-99E1-3CFA176F711C}"/>
               </a:ext>
             </a:extLst>
           </p:cNvPr>
@@ -15691,7 +15579,7 @@
           <p:cNvPr id="3" name="Picture 2">
             <a:extLst>
               <a:ext uri="{FF2B5EF4-FFF2-40B4-BE49-F238E27FC236}">
-                <a16:creationId xmlns="" xmlns:a16="http://schemas.microsoft.com/office/drawing/2014/main" id="{E28FFDEC-FAE3-F715-C17D-E64EBFEF57E2}"/>
+                <a16:creationId xmlns:a16="http://schemas.microsoft.com/office/drawing/2014/main" id="{E28FFDEC-FAE3-F715-C17D-E64EBFEF57E2}"/>
               </a:ext>
             </a:extLst>
           </p:cNvPr>
@@ -15721,7 +15609,7 @@
           <p:cNvPr id="10" name="TextBox 9">
             <a:extLst>
               <a:ext uri="{FF2B5EF4-FFF2-40B4-BE49-F238E27FC236}">
-                <a16:creationId xmlns="" xmlns:a16="http://schemas.microsoft.com/office/drawing/2014/main" id="{E5AD2A0C-B319-E101-9513-01BAFF04FFE6}"/>
+                <a16:creationId xmlns:a16="http://schemas.microsoft.com/office/drawing/2014/main" id="{E5AD2A0C-B319-E101-9513-01BAFF04FFE6}"/>
               </a:ext>
             </a:extLst>
           </p:cNvPr>
@@ -15756,7 +15644,7 @@
           <p:cNvPr id="12" name="Picture 11">
             <a:extLst>
               <a:ext uri="{FF2B5EF4-FFF2-40B4-BE49-F238E27FC236}">
-                <a16:creationId xmlns="" xmlns:a16="http://schemas.microsoft.com/office/drawing/2014/main" id="{52CEA5CE-1C3F-5BA0-00F6-DC7933C7618E}"/>
+                <a16:creationId xmlns:a16="http://schemas.microsoft.com/office/drawing/2014/main" id="{52CEA5CE-1C3F-5BA0-00F6-DC7933C7618E}"/>
               </a:ext>
             </a:extLst>
           </p:cNvPr>
@@ -15791,13 +15679,6 @@
   <p:clrMapOvr>
     <a:masterClrMapping/>
   </p:clrMapOvr>
-  <p:timing>
-    <p:tnLst>
-      <p:par>
-        <p:cTn id="1" dur="indefinite" restart="never" nodeType="tmRoot"/>
-      </p:par>
-    </p:tnLst>
-  </p:timing>
 </p:sld>
 </file>
 
@@ -15856,7 +15737,7 @@
           <p:cNvPr id="2" name="Title 1">
             <a:extLst>
               <a:ext uri="{FF2B5EF4-FFF2-40B4-BE49-F238E27FC236}">
-                <a16:creationId xmlns="" xmlns:a16="http://schemas.microsoft.com/office/drawing/2014/main" id="{F11C1235-51B4-A8A0-3A61-9C767F437001}"/>
+                <a16:creationId xmlns:a16="http://schemas.microsoft.com/office/drawing/2014/main" id="{F11C1235-51B4-A8A0-3A61-9C767F437001}"/>
               </a:ext>
             </a:extLst>
           </p:cNvPr>
@@ -15891,7 +15772,7 @@
           <p:cNvPr id="7" name="Content Placeholder 6">
             <a:extLst>
               <a:ext uri="{FF2B5EF4-FFF2-40B4-BE49-F238E27FC236}">
-                <a16:creationId xmlns="" xmlns:a16="http://schemas.microsoft.com/office/drawing/2014/main" id="{4A0E7BDD-2CF4-321B-0637-D9AF63CAB0BF}"/>
+                <a16:creationId xmlns:a16="http://schemas.microsoft.com/office/drawing/2014/main" id="{4A0E7BDD-2CF4-321B-0637-D9AF63CAB0BF}"/>
               </a:ext>
             </a:extLst>
           </p:cNvPr>
@@ -15928,11 +15809,7 @@
             </a:r>
             <a:r>
               <a:rPr lang="en-US" sz="1600"/>
-              <a:t>) </a:t>
-            </a:r>
-            <a:r>
-              <a:rPr lang="en-US" sz="1600" smtClean="0"/>
-              <a:t>partition (containing components which is able to communicate with network) could be </a:t>
+              <a:t>) partition (containing components which is able to communicate with network) could be </a:t>
             </a:r>
             <a:r>
               <a:rPr lang="en-US" sz="1600" dirty="0"/>
@@ -16120,7 +15997,7 @@
           <p:cNvPr id="15" name="Picture 14">
             <a:extLst>
               <a:ext uri="{FF2B5EF4-FFF2-40B4-BE49-F238E27FC236}">
-                <a16:creationId xmlns="" xmlns:a16="http://schemas.microsoft.com/office/drawing/2014/main" id="{82300E94-D641-5E7E-D410-1F95BB0C9A9B}"/>
+                <a16:creationId xmlns:a16="http://schemas.microsoft.com/office/drawing/2014/main" id="{82300E94-D641-5E7E-D410-1F95BB0C9A9B}"/>
               </a:ext>
             </a:extLst>
           </p:cNvPr>
@@ -16150,7 +16027,7 @@
           <p:cNvPr id="18" name="Picture 17">
             <a:extLst>
               <a:ext uri="{FF2B5EF4-FFF2-40B4-BE49-F238E27FC236}">
-                <a16:creationId xmlns="" xmlns:a16="http://schemas.microsoft.com/office/drawing/2014/main" id="{55A41CDD-7CE6-4D63-F256-F3E90D329D71}"/>
+                <a16:creationId xmlns:a16="http://schemas.microsoft.com/office/drawing/2014/main" id="{55A41CDD-7CE6-4D63-F256-F3E90D329D71}"/>
               </a:ext>
             </a:extLst>
           </p:cNvPr>
@@ -16185,13 +16062,6 @@
   <p:clrMapOvr>
     <a:masterClrMapping/>
   </p:clrMapOvr>
-  <p:timing>
-    <p:tnLst>
-      <p:par>
-        <p:cTn id="1" dur="indefinite" restart="never" nodeType="tmRoot"/>
-      </p:par>
-    </p:tnLst>
-  </p:timing>
 </p:sld>
 </file>
 
@@ -16217,7 +16087,7 @@
           <p:cNvPr id="10" name="Picture 9">
             <a:extLst>
               <a:ext uri="{FF2B5EF4-FFF2-40B4-BE49-F238E27FC236}">
-                <a16:creationId xmlns="" xmlns:a16="http://schemas.microsoft.com/office/drawing/2014/main" id="{20FEF80F-391D-5C0D-3E70-1754E47CE21A}"/>
+                <a16:creationId xmlns:a16="http://schemas.microsoft.com/office/drawing/2014/main" id="{20FEF80F-391D-5C0D-3E70-1754E47CE21A}"/>
               </a:ext>
             </a:extLst>
           </p:cNvPr>
@@ -16396,7 +16266,7 @@
           <p:cNvPr id="2" name="Title 1">
             <a:extLst>
               <a:ext uri="{FF2B5EF4-FFF2-40B4-BE49-F238E27FC236}">
-                <a16:creationId xmlns="" xmlns:a16="http://schemas.microsoft.com/office/drawing/2014/main" id="{C3585339-B774-DFDC-4DB4-D02F5083DD3E}"/>
+                <a16:creationId xmlns:a16="http://schemas.microsoft.com/office/drawing/2014/main" id="{C3585339-B774-DFDC-4DB4-D02F5083DD3E}"/>
               </a:ext>
             </a:extLst>
           </p:cNvPr>
@@ -16438,7 +16308,7 @@
             <p:cNvPr id="15" name="TextBox 14">
               <a:extLst>
                 <a:ext uri="{FF2B5EF4-FFF2-40B4-BE49-F238E27FC236}">
-                  <a16:creationId xmlns="" xmlns:a16="http://schemas.microsoft.com/office/drawing/2014/main" id="{2477AED6-8D6F-D505-6D7B-78460A03A2E8}"/>
+                  <a16:creationId xmlns:a16="http://schemas.microsoft.com/office/drawing/2014/main" id="{2477AED6-8D6F-D505-6D7B-78460A03A2E8}"/>
                 </a:ext>
               </a:extLst>
             </p:cNvPr>
@@ -16543,7 +16413,7 @@
           <p:cNvPr id="5" name="Picture 4">
             <a:extLst>
               <a:ext uri="{FF2B5EF4-FFF2-40B4-BE49-F238E27FC236}">
-                <a16:creationId xmlns="" xmlns:a16="http://schemas.microsoft.com/office/drawing/2014/main" id="{8B985467-A9DA-DE11-1910-E778EDD530AB}"/>
+                <a16:creationId xmlns:a16="http://schemas.microsoft.com/office/drawing/2014/main" id="{8B985467-A9DA-DE11-1910-E778EDD530AB}"/>
               </a:ext>
             </a:extLst>
           </p:cNvPr>
@@ -16578,13 +16448,6 @@
   <p:clrMapOvr>
     <a:masterClrMapping/>
   </p:clrMapOvr>
-  <p:timing>
-    <p:tnLst>
-      <p:par>
-        <p:cTn id="1" dur="indefinite" restart="never" nodeType="tmRoot"/>
-      </p:par>
-    </p:tnLst>
-  </p:timing>
 </p:sld>
 </file>
 
@@ -16632,7 +16495,7 @@
           <p:cNvPr id="4" name="Content Placeholder 3">
             <a:extLst>
               <a:ext uri="{FF2B5EF4-FFF2-40B4-BE49-F238E27FC236}">
-                <a16:creationId xmlns="" xmlns:a16="http://schemas.microsoft.com/office/drawing/2014/main" id="{E5625E47-EFA5-9C35-32C7-F793664192AF}"/>
+                <a16:creationId xmlns:a16="http://schemas.microsoft.com/office/drawing/2014/main" id="{E5625E47-EFA5-9C35-32C7-F793664192AF}"/>
               </a:ext>
             </a:extLst>
           </p:cNvPr>
@@ -16667,7 +16530,7 @@
           <p:cNvPr id="10" name="Table 9">
             <a:extLst>
               <a:ext uri="{FF2B5EF4-FFF2-40B4-BE49-F238E27FC236}">
-                <a16:creationId xmlns="" xmlns:a16="http://schemas.microsoft.com/office/drawing/2014/main" id="{658A328F-ADBC-7C5F-15DF-73E4DC21B209}"/>
+                <a16:creationId xmlns:a16="http://schemas.microsoft.com/office/drawing/2014/main" id="{658A328F-ADBC-7C5F-15DF-73E4DC21B209}"/>
               </a:ext>
             </a:extLst>
           </p:cNvPr>
@@ -16684,7 +16547,7 @@
         </p:nvGraphicFramePr>
         <p:xfrm>
           <a:off x="204773" y="1505336"/>
-          <a:ext cx="11782454" cy="1447840"/>
+          <a:ext cx="11782454" cy="1405295"/>
         </p:xfrm>
         <a:graphic>
           <a:graphicData uri="http://schemas.openxmlformats.org/drawingml/2006/table">
@@ -16696,14 +16559,14 @@
                 <a:gridCol w="1298801">
                   <a:extLst>
                     <a:ext uri="{9D8B030D-6E8A-4147-A177-3AD203B41FA5}">
-                      <a16:colId xmlns="" xmlns:a16="http://schemas.microsoft.com/office/drawing/2014/main" val="20000"/>
+                      <a16:colId xmlns:a16="http://schemas.microsoft.com/office/drawing/2014/main" val="20000"/>
                     </a:ext>
                   </a:extLst>
                 </a:gridCol>
                 <a:gridCol w="10483653">
                   <a:extLst>
                     <a:ext uri="{9D8B030D-6E8A-4147-A177-3AD203B41FA5}">
-                      <a16:colId xmlns="" xmlns:a16="http://schemas.microsoft.com/office/drawing/2014/main" val="20001"/>
+                      <a16:colId xmlns:a16="http://schemas.microsoft.com/office/drawing/2014/main" val="20001"/>
                     </a:ext>
                   </a:extLst>
                 </a:gridCol>
@@ -16842,7 +16705,7 @@
                 </a:tc>
                 <a:extLst>
                   <a:ext uri="{0D108BD9-81ED-4DB2-BD59-A6C34878D82A}">
-                    <a16:rowId xmlns="" xmlns:a16="http://schemas.microsoft.com/office/drawing/2014/main" val="10000"/>
+                    <a16:rowId xmlns:a16="http://schemas.microsoft.com/office/drawing/2014/main" val="10000"/>
                   </a:ext>
                 </a:extLst>
               </a:tr>
@@ -16980,7 +16843,7 @@
                 </a:tc>
                 <a:extLst>
                   <a:ext uri="{0D108BD9-81ED-4DB2-BD59-A6C34878D82A}">
-                    <a16:rowId xmlns="" xmlns:a16="http://schemas.microsoft.com/office/drawing/2014/main" val="10001"/>
+                    <a16:rowId xmlns:a16="http://schemas.microsoft.com/office/drawing/2014/main" val="10001"/>
                   </a:ext>
                 </a:extLst>
               </a:tr>
@@ -17130,7 +16993,7 @@
                 </a:tc>
                 <a:extLst>
                   <a:ext uri="{0D108BD9-81ED-4DB2-BD59-A6C34878D82A}">
-                    <a16:rowId xmlns="" xmlns:a16="http://schemas.microsoft.com/office/drawing/2014/main" val="10002"/>
+                    <a16:rowId xmlns:a16="http://schemas.microsoft.com/office/drawing/2014/main" val="10002"/>
                   </a:ext>
                 </a:extLst>
               </a:tr>
@@ -17148,13 +17011,6 @@
   <p:clrMapOvr>
     <a:masterClrMapping/>
   </p:clrMapOvr>
-  <p:timing>
-    <p:tnLst>
-      <p:par>
-        <p:cTn id="1" dur="indefinite" restart="never" nodeType="tmRoot"/>
-      </p:par>
-    </p:tnLst>
-  </p:timing>
 </p:sld>
 </file>
 
@@ -17166,7 +17022,7 @@
         <p:cNvPr id="1" name="">
           <a:extLst>
             <a:ext uri="{FF2B5EF4-FFF2-40B4-BE49-F238E27FC236}">
-              <a16:creationId xmlns="" xmlns:a16="http://schemas.microsoft.com/office/drawing/2014/main" id="{C0816B88-86B3-799E-3A3E-FA919E3E0922}"/>
+              <a16:creationId xmlns:a16="http://schemas.microsoft.com/office/drawing/2014/main" id="{C0816B88-86B3-799E-3A3E-FA919E3E0922}"/>
             </a:ext>
           </a:extLst>
         </p:cNvPr>
@@ -17186,7 +17042,7 @@
           <p:cNvPr id="2" name="Title 1">
             <a:extLst>
               <a:ext uri="{FF2B5EF4-FFF2-40B4-BE49-F238E27FC236}">
-                <a16:creationId xmlns="" xmlns:a16="http://schemas.microsoft.com/office/drawing/2014/main" id="{C36E5815-73D6-DA66-29AA-3BE061A3E84B}"/>
+                <a16:creationId xmlns:a16="http://schemas.microsoft.com/office/drawing/2014/main" id="{C36E5815-73D6-DA66-29AA-3BE061A3E84B}"/>
               </a:ext>
             </a:extLst>
           </p:cNvPr>
@@ -17214,7 +17070,7 @@
           <p:cNvPr id="11" name="Content Placeholder 3">
             <a:extLst>
               <a:ext uri="{FF2B5EF4-FFF2-40B4-BE49-F238E27FC236}">
-                <a16:creationId xmlns="" xmlns:a16="http://schemas.microsoft.com/office/drawing/2014/main" id="{6010EF79-766B-D3A2-10CE-882C40A1E836}"/>
+                <a16:creationId xmlns:a16="http://schemas.microsoft.com/office/drawing/2014/main" id="{6010EF79-766B-D3A2-10CE-882C40A1E836}"/>
               </a:ext>
             </a:extLst>
           </p:cNvPr>
@@ -17410,7 +17266,7 @@
           <p:cNvPr id="3" name="Table 2">
             <a:extLst>
               <a:ext uri="{FF2B5EF4-FFF2-40B4-BE49-F238E27FC236}">
-                <a16:creationId xmlns="" xmlns:a16="http://schemas.microsoft.com/office/drawing/2014/main" id="{6C8AAA51-C203-CD8B-4B02-DE7401134C21}"/>
+                <a16:creationId xmlns:a16="http://schemas.microsoft.com/office/drawing/2014/main" id="{6C8AAA51-C203-CD8B-4B02-DE7401134C21}"/>
               </a:ext>
             </a:extLst>
           </p:cNvPr>
@@ -17427,7 +17283,7 @@
         </p:nvGraphicFramePr>
         <p:xfrm>
           <a:off x="182820" y="960039"/>
-          <a:ext cx="11887260" cy="5059760"/>
+          <a:ext cx="11887260" cy="4908376"/>
         </p:xfrm>
         <a:graphic>
           <a:graphicData uri="http://schemas.openxmlformats.org/drawingml/2006/table">
@@ -17439,23 +17295,35 @@
                 <a:gridCol w="811057">
                   <a:extLst>
                     <a:ext uri="{9D8B030D-6E8A-4147-A177-3AD203B41FA5}">
-                      <a16:colId xmlns="" xmlns:a16="http://schemas.microsoft.com/office/drawing/2014/main" val="20000"/>
+                      <a16:colId xmlns:a16="http://schemas.microsoft.com/office/drawing/2014/main" val="20000"/>
                     </a:ext>
                   </a:extLst>
                 </a:gridCol>
-                <a:gridCol w="1467383"/>
-                <a:gridCol w="960120"/>
-                <a:gridCol w="4324350">
+                <a:gridCol w="1467383">
                   <a:extLst>
                     <a:ext uri="{9D8B030D-6E8A-4147-A177-3AD203B41FA5}">
-                      <a16:colId xmlns="" xmlns:a16="http://schemas.microsoft.com/office/drawing/2014/main" val="20001"/>
+                      <a16:colId xmlns:a16="http://schemas.microsoft.com/office/drawing/2014/main" val="20002"/>
+                    </a:ext>
+                  </a:extLst>
+                </a:gridCol>
+                <a:gridCol w="960120">
+                  <a:extLst>
+                    <a:ext uri="{9D8B030D-6E8A-4147-A177-3AD203B41FA5}">
+                      <a16:colId xmlns:a16="http://schemas.microsoft.com/office/drawing/2014/main" val="20003"/>
                     </a:ext>
                   </a:extLst>
                 </a:gridCol>
                 <a:gridCol w="4324350">
                   <a:extLst>
                     <a:ext uri="{9D8B030D-6E8A-4147-A177-3AD203B41FA5}">
-                      <a16:colId xmlns="" xmlns:a16="http://schemas.microsoft.com/office/drawing/2014/main" val="2530683369"/>
+                      <a16:colId xmlns:a16="http://schemas.microsoft.com/office/drawing/2014/main" val="20001"/>
+                    </a:ext>
+                  </a:extLst>
+                </a:gridCol>
+                <a:gridCol w="4324350">
+                  <a:extLst>
+                    <a:ext uri="{9D8B030D-6E8A-4147-A177-3AD203B41FA5}">
+                      <a16:colId xmlns:a16="http://schemas.microsoft.com/office/drawing/2014/main" val="2530683369"/>
                     </a:ext>
                   </a:extLst>
                 </a:gridCol>
@@ -17815,7 +17683,7 @@
                 </a:tc>
                 <a:extLst>
                   <a:ext uri="{0D108BD9-81ED-4DB2-BD59-A6C34878D82A}">
-                    <a16:rowId xmlns="" xmlns:a16="http://schemas.microsoft.com/office/drawing/2014/main" val="10000"/>
+                    <a16:rowId xmlns:a16="http://schemas.microsoft.com/office/drawing/2014/main" val="10000"/>
                   </a:ext>
                 </a:extLst>
               </a:tr>
@@ -18152,7 +18020,7 @@
                 </a:tc>
                 <a:extLst>
                   <a:ext uri="{0D108BD9-81ED-4DB2-BD59-A6C34878D82A}">
-                    <a16:rowId xmlns="" xmlns:a16="http://schemas.microsoft.com/office/drawing/2014/main" val="10001"/>
+                    <a16:rowId xmlns:a16="http://schemas.microsoft.com/office/drawing/2014/main" val="10001"/>
                   </a:ext>
                 </a:extLst>
               </a:tr>
@@ -18524,7 +18392,7 @@
                 </a:tc>
                 <a:extLst>
                   <a:ext uri="{0D108BD9-81ED-4DB2-BD59-A6C34878D82A}">
-                    <a16:rowId xmlns="" xmlns:a16="http://schemas.microsoft.com/office/drawing/2014/main" val="10002"/>
+                    <a16:rowId xmlns:a16="http://schemas.microsoft.com/office/drawing/2014/main" val="10002"/>
                   </a:ext>
                 </a:extLst>
               </a:tr>
@@ -18901,7 +18769,7 @@
                 </a:tc>
                 <a:extLst>
                   <a:ext uri="{0D108BD9-81ED-4DB2-BD59-A6C34878D82A}">
-                    <a16:rowId xmlns="" xmlns:a16="http://schemas.microsoft.com/office/drawing/2014/main" val="10003"/>
+                    <a16:rowId xmlns:a16="http://schemas.microsoft.com/office/drawing/2014/main" val="10003"/>
                   </a:ext>
                 </a:extLst>
               </a:tr>
@@ -19286,7 +19154,7 @@
                 </a:tc>
                 <a:extLst>
                   <a:ext uri="{0D108BD9-81ED-4DB2-BD59-A6C34878D82A}">
-                    <a16:rowId xmlns="" xmlns:a16="http://schemas.microsoft.com/office/drawing/2014/main" val="10004"/>
+                    <a16:rowId xmlns:a16="http://schemas.microsoft.com/office/drawing/2014/main" val="10004"/>
                   </a:ext>
                 </a:extLst>
               </a:tr>
@@ -19304,13 +19172,6 @@
   <p:clrMapOvr>
     <a:masterClrMapping/>
   </p:clrMapOvr>
-  <p:timing>
-    <p:tnLst>
-      <p:par>
-        <p:cTn id="1" dur="indefinite" restart="never" nodeType="tmRoot"/>
-      </p:par>
-    </p:tnLst>
-  </p:timing>
 </p:sld>
 </file>
 
@@ -19336,7 +19197,7 @@
           <p:cNvPr id="14" name="Picture 13">
             <a:extLst>
               <a:ext uri="{FF2B5EF4-FFF2-40B4-BE49-F238E27FC236}">
-                <a16:creationId xmlns="" xmlns:a16="http://schemas.microsoft.com/office/drawing/2014/main" id="{79F3C30A-9B01-61F0-056C-27C80301C91F}"/>
+                <a16:creationId xmlns:a16="http://schemas.microsoft.com/office/drawing/2014/main" id="{79F3C30A-9B01-61F0-056C-27C80301C91F}"/>
               </a:ext>
             </a:extLst>
           </p:cNvPr>
@@ -19567,7 +19428,7 @@
           <p:cNvPr id="10" name="Picture 9">
             <a:extLst>
               <a:ext uri="{FF2B5EF4-FFF2-40B4-BE49-F238E27FC236}">
-                <a16:creationId xmlns="" xmlns:a16="http://schemas.microsoft.com/office/drawing/2014/main" id="{09AB2A3E-4A5A-80E7-6BD7-3F4F73E5CF93}"/>
+                <a16:creationId xmlns:a16="http://schemas.microsoft.com/office/drawing/2014/main" id="{09AB2A3E-4A5A-80E7-6BD7-3F4F73E5CF93}"/>
               </a:ext>
             </a:extLst>
           </p:cNvPr>
@@ -19602,13 +19463,6 @@
   <p:clrMapOvr>
     <a:masterClrMapping/>
   </p:clrMapOvr>
-  <p:timing>
-    <p:tnLst>
-      <p:par>
-        <p:cTn id="1" dur="indefinite" restart="never" nodeType="tmRoot"/>
-      </p:par>
-    </p:tnLst>
-  </p:timing>
 </p:sld>
 </file>
 
@@ -19634,7 +19488,7 @@
           <p:cNvPr id="12" name="Picture 11">
             <a:extLst>
               <a:ext uri="{FF2B5EF4-FFF2-40B4-BE49-F238E27FC236}">
-                <a16:creationId xmlns="" xmlns:a16="http://schemas.microsoft.com/office/drawing/2014/main" id="{1687716E-3FC0-6720-F07D-6C24184342FD}"/>
+                <a16:creationId xmlns:a16="http://schemas.microsoft.com/office/drawing/2014/main" id="{1687716E-3FC0-6720-F07D-6C24184342FD}"/>
               </a:ext>
             </a:extLst>
           </p:cNvPr>
@@ -19717,15 +19571,7 @@
             </a:pPr>
             <a:r>
               <a:rPr lang="en-US"/>
-              <a:t>Move RemoteDiag into the </a:t>
-            </a:r>
-            <a:r>
-              <a:rPr lang="en-US" smtClean="0"/>
-              <a:t>Internal </a:t>
-            </a:r>
-            <a:r>
-              <a:rPr lang="en-US"/>
-              <a:t>container.</a:t>
+              <a:t>Move RemoteDiag into the Internal container.</a:t>
             </a:r>
           </a:p>
           <a:p>
@@ -19773,7 +19619,7 @@
           <p:cNvPr id="9" name="Picture 8">
             <a:extLst>
               <a:ext uri="{FF2B5EF4-FFF2-40B4-BE49-F238E27FC236}">
-                <a16:creationId xmlns="" xmlns:a16="http://schemas.microsoft.com/office/drawing/2014/main" id="{33B21BAC-9E9C-F667-EB81-43F48A0E1E40}"/>
+                <a16:creationId xmlns:a16="http://schemas.microsoft.com/office/drawing/2014/main" id="{33B21BAC-9E9C-F667-EB81-43F48A0E1E40}"/>
               </a:ext>
             </a:extLst>
           </p:cNvPr>
@@ -19803,7 +19649,7 @@
           <p:cNvPr id="14" name="TextBox 13">
             <a:extLst>
               <a:ext uri="{FF2B5EF4-FFF2-40B4-BE49-F238E27FC236}">
-                <a16:creationId xmlns="" xmlns:a16="http://schemas.microsoft.com/office/drawing/2014/main" id="{2AAE2910-7B87-F3B5-8408-E04FE9F21D42}"/>
+                <a16:creationId xmlns:a16="http://schemas.microsoft.com/office/drawing/2014/main" id="{2AAE2910-7B87-F3B5-8408-E04FE9F21D42}"/>
               </a:ext>
             </a:extLst>
           </p:cNvPr>
@@ -19843,13 +19689,6 @@
   <p:clrMapOvr>
     <a:masterClrMapping/>
   </p:clrMapOvr>
-  <p:timing>
-    <p:tnLst>
-      <p:par>
-        <p:cTn id="1" dur="indefinite" restart="never" nodeType="tmRoot"/>
-      </p:par>
-    </p:tnLst>
-  </p:timing>
 </p:sld>
 </file>
 
